--- a/Gent_Mechelen_Presentatie.pptx
+++ b/Gent_Mechelen_Presentatie.pptx
@@ -26,6 +26,8 @@
     <p:sldId id="274" r:id="rId25"/>
     <p:sldId id="275" r:id="rId26"/>
     <p:sldId id="276" r:id="rId27"/>
+    <p:sldId id="277" r:id="rId28"/>
+    <p:sldId id="278" r:id="rId29"/>
   </p:sldIdLst>
   <p:sldSz cx="12188952" cy="6858000" type="screen4x3"/>
   <p:notesSz cx="6858000" cy="9144000"/>
@@ -9471,7 +9473,7 @@
                 </a:solidFill>
                 <a:latin typeface="Calibri"/>
               </a:rPr>
-              <a:t>50 Scenario Voorspellingen</a:t>
+              <a:t>Wanneer welke modus? — Het Beslissingsmodel</a:t>
             </a:r>
           </a:p>
         </p:txBody>
@@ -9519,40 +9521,16 @@
           </a:p>
         </p:txBody>
       </p:sp>
-      <p:pic>
-        <p:nvPicPr>
-          <p:cNvPr id="4" name="Picture 3" descr="scenario_predictions.png"/>
-          <p:cNvPicPr>
-            <a:picLocks noChangeAspect="1"/>
-          </p:cNvPicPr>
-          <p:nvPr/>
-        </p:nvPicPr>
-        <p:blipFill>
-          <a:blip r:embed="rId2"/>
-          <a:stretch>
-            <a:fillRect/>
-          </a:stretch>
-        </p:blipFill>
-        <p:spPr>
-          <a:xfrm>
-            <a:off x="411480" y="1051560"/>
-            <a:ext cx="8046720" cy="5577840"/>
-          </a:xfrm>
-          <a:prstGeom prst="rect">
-            <a:avLst/>
-          </a:prstGeom>
-        </p:spPr>
-      </p:pic>
-      <p:sp>
-        <p:nvSpPr>
-          <p:cNvPr id="5" name="Rectangle 4"/>
+      <p:sp>
+        <p:nvSpPr>
+          <p:cNvPr id="4" name="Rectangle 3"/>
           <p:cNvSpPr/>
           <p:nvPr/>
         </p:nvSpPr>
         <p:spPr>
           <a:xfrm>
-            <a:off x="8641080" y="1051560"/>
-            <a:ext cx="3291840" cy="5577840"/>
+            <a:off x="411480" y="1188720"/>
+            <a:ext cx="2926080" cy="1005840"/>
           </a:xfrm>
           <a:prstGeom prst="rect">
             <a:avLst/>
@@ -9588,14 +9566,57 @@
       </p:sp>
       <p:sp>
         <p:nvSpPr>
+          <p:cNvPr id="5" name="Rectangle 4"/>
+          <p:cNvSpPr/>
+          <p:nvPr/>
+        </p:nvSpPr>
+        <p:spPr>
+          <a:xfrm>
+            <a:off x="411480" y="1188720"/>
+            <a:ext cx="2926080" cy="64008"/>
+          </a:xfrm>
+          <a:prstGeom prst="rect">
+            <a:avLst/>
+          </a:prstGeom>
+          <a:solidFill>
+            <a:srgbClr val="00C8A0"/>
+          </a:solidFill>
+          <a:ln>
+            <a:noFill/>
+          </a:ln>
+        </p:spPr>
+        <p:style>
+          <a:lnRef idx="1">
+            <a:schemeClr val="accent1"/>
+          </a:lnRef>
+          <a:fillRef idx="3">
+            <a:schemeClr val="accent1"/>
+          </a:fillRef>
+          <a:effectRef idx="2">
+            <a:schemeClr val="accent1"/>
+          </a:effectRef>
+          <a:fontRef idx="minor">
+            <a:schemeClr val="lt1"/>
+          </a:fontRef>
+        </p:style>
+        <p:txBody>
+          <a:bodyPr rtlCol="0" anchor="ctr"/>
+          <a:lstStyle/>
+          <a:p>
+            <a:pPr algn="ctr"/>
+          </a:p>
+        </p:txBody>
+      </p:sp>
+      <p:sp>
+        <p:nvSpPr>
           <p:cNvPr id="6" name="TextBox 5"/>
           <p:cNvSpPr txBox="1"/>
           <p:nvPr/>
         </p:nvSpPr>
         <p:spPr>
           <a:xfrm>
-            <a:off x="8823960" y="1188720"/>
-            <a:ext cx="3017520" cy="320040"/>
+            <a:off x="502920" y="1261872"/>
+            <a:ext cx="2743200" cy="320040"/>
           </a:xfrm>
           <a:prstGeom prst="rect">
             <a:avLst/>
@@ -9616,7 +9637,7 @@
                 </a:solidFill>
                 <a:latin typeface="Calibri"/>
               </a:rPr>
-              <a:t>SCENARIO DEKKING</a:t>
+              <a:t>STAP 1  —  Weerrisicoscore</a:t>
             </a:r>
           </a:p>
         </p:txBody>
@@ -9629,159 +9650,122 @@
         </p:nvSpPr>
         <p:spPr>
           <a:xfrm>
-            <a:off x="8823960" y="1554480"/>
-            <a:ext cx="3017520" cy="3200400"/>
-          </a:xfrm>
-          <a:prstGeom prst="rect">
-            <a:avLst/>
-          </a:prstGeom>
-          <a:noFill/>
-        </p:spPr>
-        <p:txBody>
-          <a:bodyPr wrap="square">
-            <a:spAutoFit/>
-          </a:bodyPr>
-          <a:lstStyle/>
-          <a:p>
-            <a:pPr algn="l">
-              <a:spcBef>
-                <a:spcPts val="400"/>
-              </a:spcBef>
-            </a:pPr>
-            <a:r>
-              <a:rPr sz="1200">
+            <a:off x="502920" y="1600200"/>
+            <a:ext cx="2743200" cy="502920"/>
+          </a:xfrm>
+          <a:prstGeom prst="rect">
+            <a:avLst/>
+          </a:prstGeom>
+          <a:noFill/>
+        </p:spPr>
+        <p:txBody>
+          <a:bodyPr wrap="square">
+            <a:spAutoFit/>
+          </a:bodyPr>
+          <a:lstStyle/>
+          <a:p>
+            <a:pPr algn="l"/>
+            <a:r>
+              <a:rPr sz="1100" b="0" i="0">
                 <a:solidFill>
                   <a:srgbClr val="FFFFFF"/>
                 </a:solidFill>
                 <a:latin typeface="Calibri"/>
               </a:rPr>
-              <a:t>›  Alle weekdagen (ma–vr)</a:t>
-            </a:r>
-          </a:p>
-          <a:p>
-            <a:pPr algn="l">
-              <a:spcBef>
-                <a:spcPts val="400"/>
-              </a:spcBef>
-            </a:pPr>
-            <a:r>
-              <a:rPr sz="1200">
-                <a:solidFill>
-                  <a:srgbClr val="FFFFFF"/>
-                </a:solidFill>
-                <a:latin typeface="Calibri"/>
-              </a:rPr>
-              <a:t>›  Mooi weer &amp; regen</a:t>
-            </a:r>
-          </a:p>
-          <a:p>
-            <a:pPr algn="l">
-              <a:spcBef>
-                <a:spcPts val="400"/>
-              </a:spcBef>
-            </a:pPr>
-            <a:r>
-              <a:rPr sz="1200">
-                <a:solidFill>
-                  <a:srgbClr val="FFFFFF"/>
-                </a:solidFill>
-                <a:latin typeface="Calibri"/>
-              </a:rPr>
-              <a:t>›  Zwaar onweer &amp; sneeuw</a:t>
-            </a:r>
-          </a:p>
-          <a:p>
-            <a:pPr algn="l">
-              <a:spcBef>
-                <a:spcPts val="400"/>
-              </a:spcBef>
-            </a:pPr>
-            <a:r>
-              <a:rPr sz="1200">
-                <a:solidFill>
-                  <a:srgbClr val="FFFFFF"/>
-                </a:solidFill>
-                <a:latin typeface="Calibri"/>
-              </a:rPr>
-              <a:t>›  IJzel (vorst zonder sneeuw)</a:t>
-            </a:r>
-          </a:p>
-          <a:p>
-            <a:pPr algn="l">
-              <a:spcBef>
-                <a:spcPts val="400"/>
-              </a:spcBef>
-            </a:pPr>
-            <a:r>
-              <a:rPr sz="1200">
-                <a:solidFill>
-                  <a:srgbClr val="FFFFFF"/>
-                </a:solidFill>
-                <a:latin typeface="Calibri"/>
-              </a:rPr>
-              <a:t>›  Schoolvakantie vs. schooltijd</a:t>
-            </a:r>
-          </a:p>
-          <a:p>
-            <a:pPr algn="l">
-              <a:spcBef>
-                <a:spcPts val="400"/>
-              </a:spcBef>
-            </a:pPr>
-            <a:r>
-              <a:rPr sz="1200">
-                <a:solidFill>
-                  <a:srgbClr val="FFFFFF"/>
-                </a:solidFill>
-                <a:latin typeface="Calibri"/>
-              </a:rPr>
-              <a:t>›  Feestdag (geen pendel)</a:t>
-            </a:r>
-          </a:p>
-          <a:p>
-            <a:pPr algn="l">
-              <a:spcBef>
-                <a:spcPts val="400"/>
-              </a:spcBef>
-            </a:pPr>
-            <a:r>
-              <a:rPr sz="1200">
-                <a:solidFill>
-                  <a:srgbClr val="FFFFFF"/>
-                </a:solidFill>
-                <a:latin typeface="Calibri"/>
-              </a:rPr>
-              <a:t>›  Vroege zomer, late herfst</a:t>
-            </a:r>
-          </a:p>
-          <a:p>
-            <a:pPr algn="l">
-              <a:spcBef>
-                <a:spcPts val="400"/>
-              </a:spcBef>
-            </a:pPr>
-            <a:r>
-              <a:rPr sz="1200">
-                <a:solidFill>
-                  <a:srgbClr val="FFFFFF"/>
-                </a:solidFill>
-                <a:latin typeface="Calibri"/>
-              </a:rPr>
-              <a:t>›  Combinaties: ma + zware regen</a:t>
-            </a:r>
-          </a:p>
-        </p:txBody>
-      </p:sp>
-      <p:sp>
-        <p:nvSpPr>
-          <p:cNvPr id="8" name="Rectangle 7"/>
+              <a:t>Bereken score 0–9 op basis van
+neerslag, wind, vorst, sneeuw &amp; mist</a:t>
+            </a:r>
+          </a:p>
+        </p:txBody>
+      </p:sp>
+      <p:sp>
+        <p:nvSpPr>
+          <p:cNvPr id="8" name="TextBox 7"/>
+          <p:cNvSpPr txBox="1"/>
+          <p:nvPr/>
+        </p:nvSpPr>
+        <p:spPr>
+          <a:xfrm>
+            <a:off x="3429000" y="1508760"/>
+            <a:ext cx="365760" cy="365760"/>
+          </a:xfrm>
+          <a:prstGeom prst="rect">
+            <a:avLst/>
+          </a:prstGeom>
+          <a:noFill/>
+        </p:spPr>
+        <p:txBody>
+          <a:bodyPr wrap="square">
+            <a:spAutoFit/>
+          </a:bodyPr>
+          <a:lstStyle/>
+          <a:p>
+            <a:pPr algn="ctr"/>
+            <a:r>
+              <a:rPr sz="2000" b="1" i="0">
+                <a:solidFill>
+                  <a:srgbClr val="8B9DC3"/>
+                </a:solidFill>
+                <a:latin typeface="Calibri"/>
+              </a:rPr>
+              <a:t>→</a:t>
+            </a:r>
+          </a:p>
+        </p:txBody>
+      </p:sp>
+      <p:sp>
+        <p:nvSpPr>
+          <p:cNvPr id="9" name="Rectangle 8"/>
           <p:cNvSpPr/>
           <p:nvPr/>
         </p:nvSpPr>
         <p:spPr>
           <a:xfrm>
-            <a:off x="8641080" y="4937760"/>
-            <a:ext cx="3291840" cy="45720"/>
+            <a:off x="3840480" y="1188720"/>
+            <a:ext cx="3840480" cy="1005840"/>
+          </a:xfrm>
+          <a:prstGeom prst="rect">
+            <a:avLst/>
+          </a:prstGeom>
+          <a:solidFill>
+            <a:srgbClr val="112D4E"/>
+          </a:solidFill>
+          <a:ln>
+            <a:noFill/>
+          </a:ln>
+        </p:spPr>
+        <p:style>
+          <a:lnRef idx="1">
+            <a:schemeClr val="accent1"/>
+          </a:lnRef>
+          <a:fillRef idx="3">
+            <a:schemeClr val="accent1"/>
+          </a:fillRef>
+          <a:effectRef idx="2">
+            <a:schemeClr val="accent1"/>
+          </a:effectRef>
+          <a:fontRef idx="minor">
+            <a:schemeClr val="lt1"/>
+          </a:fontRef>
+        </p:style>
+        <p:txBody>
+          <a:bodyPr rtlCol="0" anchor="ctr"/>
+          <a:lstStyle/>
+          <a:p>
+            <a:pPr algn="ctr"/>
+          </a:p>
+        </p:txBody>
+      </p:sp>
+      <p:sp>
+        <p:nvSpPr>
+          <p:cNvPr id="10" name="Rectangle 9"/>
+          <p:cNvSpPr/>
+          <p:nvPr/>
+        </p:nvSpPr>
+        <p:spPr>
+          <a:xfrm>
+            <a:off x="3840480" y="1188720"/>
+            <a:ext cx="3840480" cy="64008"/>
           </a:xfrm>
           <a:prstGeom prst="rect">
             <a:avLst/>
@@ -9817,13 +9801,397 @@
       </p:sp>
       <p:sp>
         <p:nvSpPr>
-          <p:cNvPr id="9" name="TextBox 8"/>
-          <p:cNvSpPr txBox="1"/>
-          <p:nvPr/>
-        </p:nvSpPr>
-        <p:spPr>
-          <a:xfrm>
-            <a:off x="8823960" y="5029200"/>
+          <p:cNvPr id="11" name="TextBox 10"/>
+          <p:cNvSpPr txBox="1"/>
+          <p:nvPr/>
+        </p:nvSpPr>
+        <p:spPr>
+          <a:xfrm>
+            <a:off x="3931920" y="1261872"/>
+            <a:ext cx="3657600" cy="320040"/>
+          </a:xfrm>
+          <a:prstGeom prst="rect">
+            <a:avLst/>
+          </a:prstGeom>
+          <a:noFill/>
+        </p:spPr>
+        <p:txBody>
+          <a:bodyPr wrap="square">
+            <a:spAutoFit/>
+          </a:bodyPr>
+          <a:lstStyle/>
+          <a:p>
+            <a:pPr algn="l"/>
+            <a:r>
+              <a:rPr sz="1200" b="1" i="0">
+                <a:solidFill>
+                  <a:srgbClr val="FF6B35"/>
+                </a:solidFill>
+                <a:latin typeface="Calibri"/>
+              </a:rPr>
+              <a:t>Score &gt;= 5?</a:t>
+            </a:r>
+          </a:p>
+        </p:txBody>
+      </p:sp>
+      <p:sp>
+        <p:nvSpPr>
+          <p:cNvPr id="12" name="TextBox 11"/>
+          <p:cNvSpPr txBox="1"/>
+          <p:nvPr/>
+        </p:nvSpPr>
+        <p:spPr>
+          <a:xfrm>
+            <a:off x="3931920" y="1600200"/>
+            <a:ext cx="3566160" cy="502920"/>
+          </a:xfrm>
+          <a:prstGeom prst="rect">
+            <a:avLst/>
+          </a:prstGeom>
+          <a:noFill/>
+        </p:spPr>
+        <p:txBody>
+          <a:bodyPr wrap="square">
+            <a:spAutoFit/>
+          </a:bodyPr>
+          <a:lstStyle/>
+          <a:p>
+            <a:pPr algn="l"/>
+            <a:r>
+              <a:rPr sz="1100" b="0" i="0">
+                <a:solidFill>
+                  <a:srgbClr val="FFFFFF"/>
+                </a:solidFill>
+                <a:latin typeface="Calibri"/>
+              </a:rPr>
+              <a:t>Extreme weersomstandigheden —
+beiden modi onbetrouwbaar of gevaarlijk</a:t>
+            </a:r>
+          </a:p>
+        </p:txBody>
+      </p:sp>
+      <p:sp>
+        <p:nvSpPr>
+          <p:cNvPr id="13" name="TextBox 12"/>
+          <p:cNvSpPr txBox="1"/>
+          <p:nvPr/>
+        </p:nvSpPr>
+        <p:spPr>
+          <a:xfrm>
+            <a:off x="4937760" y="2240280"/>
+            <a:ext cx="1097280" cy="320040"/>
+          </a:xfrm>
+          <a:prstGeom prst="rect">
+            <a:avLst/>
+          </a:prstGeom>
+          <a:noFill/>
+        </p:spPr>
+        <p:txBody>
+          <a:bodyPr wrap="square">
+            <a:spAutoFit/>
+          </a:bodyPr>
+          <a:lstStyle/>
+          <a:p>
+            <a:pPr algn="ctr"/>
+            <a:r>
+              <a:rPr sz="1300" b="1" i="0">
+                <a:solidFill>
+                  <a:srgbClr val="FF6B35"/>
+                </a:solidFill>
+                <a:latin typeface="Calibri"/>
+              </a:rPr>
+              <a:t>JA  ↓</a:t>
+            </a:r>
+          </a:p>
+        </p:txBody>
+      </p:sp>
+      <p:sp>
+        <p:nvSpPr>
+          <p:cNvPr id="14" name="Rectangle 13"/>
+          <p:cNvSpPr/>
+          <p:nvPr/>
+        </p:nvSpPr>
+        <p:spPr>
+          <a:xfrm>
+            <a:off x="4114800" y="2606040"/>
+            <a:ext cx="2743200" cy="1463040"/>
+          </a:xfrm>
+          <a:prstGeom prst="rect">
+            <a:avLst/>
+          </a:prstGeom>
+          <a:solidFill>
+            <a:srgbClr val="363636"/>
+          </a:solidFill>
+          <a:ln>
+            <a:noFill/>
+          </a:ln>
+        </p:spPr>
+        <p:style>
+          <a:lnRef idx="1">
+            <a:schemeClr val="accent1"/>
+          </a:lnRef>
+          <a:fillRef idx="3">
+            <a:schemeClr val="accent1"/>
+          </a:fillRef>
+          <a:effectRef idx="2">
+            <a:schemeClr val="accent1"/>
+          </a:effectRef>
+          <a:fontRef idx="minor">
+            <a:schemeClr val="lt1"/>
+          </a:fontRef>
+        </p:style>
+        <p:txBody>
+          <a:bodyPr rtlCol="0" anchor="ctr"/>
+          <a:lstStyle/>
+          <a:p>
+            <a:pPr algn="ctr"/>
+          </a:p>
+        </p:txBody>
+      </p:sp>
+      <p:sp>
+        <p:nvSpPr>
+          <p:cNvPr id="15" name="Rectangle 14"/>
+          <p:cNvSpPr/>
+          <p:nvPr/>
+        </p:nvSpPr>
+        <p:spPr>
+          <a:xfrm>
+            <a:off x="4114800" y="2606040"/>
+            <a:ext cx="2743200" cy="73152"/>
+          </a:xfrm>
+          <a:prstGeom prst="rect">
+            <a:avLst/>
+          </a:prstGeom>
+          <a:solidFill>
+            <a:srgbClr val="FF6B35"/>
+          </a:solidFill>
+          <a:ln>
+            <a:noFill/>
+          </a:ln>
+        </p:spPr>
+        <p:style>
+          <a:lnRef idx="1">
+            <a:schemeClr val="accent1"/>
+          </a:lnRef>
+          <a:fillRef idx="3">
+            <a:schemeClr val="accent1"/>
+          </a:fillRef>
+          <a:effectRef idx="2">
+            <a:schemeClr val="accent1"/>
+          </a:effectRef>
+          <a:fontRef idx="minor">
+            <a:schemeClr val="lt1"/>
+          </a:fontRef>
+        </p:style>
+        <p:txBody>
+          <a:bodyPr rtlCol="0" anchor="ctr"/>
+          <a:lstStyle/>
+          <a:p>
+            <a:pPr algn="ctr"/>
+          </a:p>
+        </p:txBody>
+      </p:sp>
+      <p:sp>
+        <p:nvSpPr>
+          <p:cNvPr id="16" name="TextBox 15"/>
+          <p:cNvSpPr txBox="1"/>
+          <p:nvPr/>
+        </p:nvSpPr>
+        <p:spPr>
+          <a:xfrm>
+            <a:off x="4206240" y="2697480"/>
+            <a:ext cx="2560320" cy="411480"/>
+          </a:xfrm>
+          <a:prstGeom prst="rect">
+            <a:avLst/>
+          </a:prstGeom>
+          <a:noFill/>
+        </p:spPr>
+        <p:txBody>
+          <a:bodyPr wrap="square">
+            <a:spAutoFit/>
+          </a:bodyPr>
+          <a:lstStyle/>
+          <a:p>
+            <a:pPr algn="ctr"/>
+            <a:r>
+              <a:rPr sz="1600" b="1" i="0">
+                <a:solidFill>
+                  <a:srgbClr val="FF6B35"/>
+                </a:solidFill>
+                <a:latin typeface="Calibri"/>
+              </a:rPr>
+              <a:t>THUISWERKEN</a:t>
+            </a:r>
+          </a:p>
+        </p:txBody>
+      </p:sp>
+      <p:sp>
+        <p:nvSpPr>
+          <p:cNvPr id="17" name="TextBox 16"/>
+          <p:cNvSpPr txBox="1"/>
+          <p:nvPr/>
+        </p:nvSpPr>
+        <p:spPr>
+          <a:xfrm>
+            <a:off x="4206240" y="3154680"/>
+            <a:ext cx="2560320" cy="777240"/>
+          </a:xfrm>
+          <a:prstGeom prst="rect">
+            <a:avLst/>
+          </a:prstGeom>
+          <a:noFill/>
+        </p:spPr>
+        <p:txBody>
+          <a:bodyPr wrap="square">
+            <a:spAutoFit/>
+          </a:bodyPr>
+          <a:lstStyle/>
+          <a:p>
+            <a:pPr algn="ctr"/>
+            <a:r>
+              <a:rPr sz="1100" b="0" i="0">
+                <a:solidFill>
+                  <a:srgbClr val="8B9DC3"/>
+                </a:solidFill>
+                <a:latin typeface="Calibri"/>
+              </a:rPr>
+              <a:t>Sneeuw + iets · Zware regen + storm
+IJzel + wind · Code rood KMI</a:t>
+            </a:r>
+          </a:p>
+        </p:txBody>
+      </p:sp>
+      <p:sp>
+        <p:nvSpPr>
+          <p:cNvPr id="18" name="TextBox 17"/>
+          <p:cNvSpPr txBox="1"/>
+          <p:nvPr/>
+        </p:nvSpPr>
+        <p:spPr>
+          <a:xfrm>
+            <a:off x="7772400" y="1508760"/>
+            <a:ext cx="914400" cy="365760"/>
+          </a:xfrm>
+          <a:prstGeom prst="rect">
+            <a:avLst/>
+          </a:prstGeom>
+          <a:noFill/>
+        </p:spPr>
+        <p:txBody>
+          <a:bodyPr wrap="square">
+            <a:spAutoFit/>
+          </a:bodyPr>
+          <a:lstStyle/>
+          <a:p>
+            <a:pPr algn="ctr"/>
+            <a:r>
+              <a:rPr sz="1300" b="1" i="0">
+                <a:solidFill>
+                  <a:srgbClr val="00C8A0"/>
+                </a:solidFill>
+                <a:latin typeface="Calibri"/>
+              </a:rPr>
+              <a:t>NEE  →</a:t>
+            </a:r>
+          </a:p>
+        </p:txBody>
+      </p:sp>
+      <p:sp>
+        <p:nvSpPr>
+          <p:cNvPr id="19" name="Rectangle 18"/>
+          <p:cNvSpPr/>
+          <p:nvPr/>
+        </p:nvSpPr>
+        <p:spPr>
+          <a:xfrm>
+            <a:off x="8778240" y="1188720"/>
+            <a:ext cx="3200400" cy="1005840"/>
+          </a:xfrm>
+          <a:prstGeom prst="rect">
+            <a:avLst/>
+          </a:prstGeom>
+          <a:solidFill>
+            <a:srgbClr val="112D4E"/>
+          </a:solidFill>
+          <a:ln>
+            <a:noFill/>
+          </a:ln>
+        </p:spPr>
+        <p:style>
+          <a:lnRef idx="1">
+            <a:schemeClr val="accent1"/>
+          </a:lnRef>
+          <a:fillRef idx="3">
+            <a:schemeClr val="accent1"/>
+          </a:fillRef>
+          <a:effectRef idx="2">
+            <a:schemeClr val="accent1"/>
+          </a:effectRef>
+          <a:fontRef idx="minor">
+            <a:schemeClr val="lt1"/>
+          </a:fontRef>
+        </p:style>
+        <p:txBody>
+          <a:bodyPr rtlCol="0" anchor="ctr"/>
+          <a:lstStyle/>
+          <a:p>
+            <a:pPr algn="ctr"/>
+          </a:p>
+        </p:txBody>
+      </p:sp>
+      <p:sp>
+        <p:nvSpPr>
+          <p:cNvPr id="20" name="Rectangle 19"/>
+          <p:cNvSpPr/>
+          <p:nvPr/>
+        </p:nvSpPr>
+        <p:spPr>
+          <a:xfrm>
+            <a:off x="8778240" y="1188720"/>
+            <a:ext cx="3200400" cy="64008"/>
+          </a:xfrm>
+          <a:prstGeom prst="rect">
+            <a:avLst/>
+          </a:prstGeom>
+          <a:solidFill>
+            <a:srgbClr val="00C8A0"/>
+          </a:solidFill>
+          <a:ln>
+            <a:noFill/>
+          </a:ln>
+        </p:spPr>
+        <p:style>
+          <a:lnRef idx="1">
+            <a:schemeClr val="accent1"/>
+          </a:lnRef>
+          <a:fillRef idx="3">
+            <a:schemeClr val="accent1"/>
+          </a:fillRef>
+          <a:effectRef idx="2">
+            <a:schemeClr val="accent1"/>
+          </a:effectRef>
+          <a:fontRef idx="minor">
+            <a:schemeClr val="lt1"/>
+          </a:fontRef>
+        </p:style>
+        <p:txBody>
+          <a:bodyPr rtlCol="0" anchor="ctr"/>
+          <a:lstStyle/>
+          <a:p>
+            <a:pPr algn="ctr"/>
+          </a:p>
+        </p:txBody>
+      </p:sp>
+      <p:sp>
+        <p:nvSpPr>
+          <p:cNvPr id="21" name="TextBox 20"/>
+          <p:cNvSpPr txBox="1"/>
+          <p:nvPr/>
+        </p:nvSpPr>
+        <p:spPr>
+          <a:xfrm>
+            <a:off x="8869680" y="1261872"/>
             <a:ext cx="3017520" cy="320040"/>
           </a:xfrm>
           <a:prstGeom prst="rect">
@@ -9841,48 +10209,1120 @@
             <a:r>
               <a:rPr sz="1100" b="1" i="0">
                 <a:solidFill>
+                  <a:srgbClr val="00C8A0"/>
+                </a:solidFill>
+                <a:latin typeface="Calibri"/>
+              </a:rPr>
+              <a:t>STAP 2  —  Auto vs. Trein vergelijk</a:t>
+            </a:r>
+          </a:p>
+        </p:txBody>
+      </p:sp>
+      <p:sp>
+        <p:nvSpPr>
+          <p:cNvPr id="22" name="TextBox 21"/>
+          <p:cNvSpPr txBox="1"/>
+          <p:nvPr/>
+        </p:nvSpPr>
+        <p:spPr>
+          <a:xfrm>
+            <a:off x="8869680" y="1600200"/>
+            <a:ext cx="3017520" cy="502920"/>
+          </a:xfrm>
+          <a:prstGeom prst="rect">
+            <a:avLst/>
+          </a:prstGeom>
+          <a:noFill/>
+        </p:spPr>
+        <p:txBody>
+          <a:bodyPr wrap="square">
+            <a:spAutoFit/>
+          </a:bodyPr>
+          <a:lstStyle/>
+          <a:p>
+            <a:pPr algn="l"/>
+            <a:r>
+              <a:rPr sz="1100" b="0" i="0">
+                <a:solidFill>
+                  <a:srgbClr val="FFFFFF"/>
+                </a:solidFill>
+                <a:latin typeface="Calibri"/>
+              </a:rPr>
+              <a:t>Auto-reistijd (VC gecalibreerd)
+vs. Treinreis (58 min) + 10 min buffer</a:t>
+            </a:r>
+          </a:p>
+        </p:txBody>
+      </p:sp>
+      <p:sp>
+        <p:nvSpPr>
+          <p:cNvPr id="23" name="TextBox 22"/>
+          <p:cNvSpPr txBox="1"/>
+          <p:nvPr/>
+        </p:nvSpPr>
+        <p:spPr>
+          <a:xfrm>
+            <a:off x="8869680" y="2240280"/>
+            <a:ext cx="2560320" cy="320040"/>
+          </a:xfrm>
+          <a:prstGeom prst="rect">
+            <a:avLst/>
+          </a:prstGeom>
+          <a:noFill/>
+        </p:spPr>
+        <p:txBody>
+          <a:bodyPr wrap="square">
+            <a:spAutoFit/>
+          </a:bodyPr>
+          <a:lstStyle/>
+          <a:p>
+            <a:pPr algn="l"/>
+            <a:r>
+              <a:rPr sz="1100" b="1" i="0">
+                <a:solidFill>
+                  <a:srgbClr val="1565C0"/>
+                </a:solidFill>
+                <a:latin typeface="Calibri"/>
+              </a:rPr>
+              <a:t>Auto &lt;= 68 min  ↓</a:t>
+            </a:r>
+          </a:p>
+        </p:txBody>
+      </p:sp>
+      <p:sp>
+        <p:nvSpPr>
+          <p:cNvPr id="24" name="Rectangle 23"/>
+          <p:cNvSpPr/>
+          <p:nvPr/>
+        </p:nvSpPr>
+        <p:spPr>
+          <a:xfrm>
+            <a:off x="8915400" y="2606040"/>
+            <a:ext cx="2560320" cy="1463040"/>
+          </a:xfrm>
+          <a:prstGeom prst="rect">
+            <a:avLst/>
+          </a:prstGeom>
+          <a:solidFill>
+            <a:srgbClr val="0D306E"/>
+          </a:solidFill>
+          <a:ln>
+            <a:noFill/>
+          </a:ln>
+        </p:spPr>
+        <p:style>
+          <a:lnRef idx="1">
+            <a:schemeClr val="accent1"/>
+          </a:lnRef>
+          <a:fillRef idx="3">
+            <a:schemeClr val="accent1"/>
+          </a:fillRef>
+          <a:effectRef idx="2">
+            <a:schemeClr val="accent1"/>
+          </a:effectRef>
+          <a:fontRef idx="minor">
+            <a:schemeClr val="lt1"/>
+          </a:fontRef>
+        </p:style>
+        <p:txBody>
+          <a:bodyPr rtlCol="0" anchor="ctr"/>
+          <a:lstStyle/>
+          <a:p>
+            <a:pPr algn="ctr"/>
+          </a:p>
+        </p:txBody>
+      </p:sp>
+      <p:sp>
+        <p:nvSpPr>
+          <p:cNvPr id="25" name="Rectangle 24"/>
+          <p:cNvSpPr/>
+          <p:nvPr/>
+        </p:nvSpPr>
+        <p:spPr>
+          <a:xfrm>
+            <a:off x="8915400" y="2606040"/>
+            <a:ext cx="2560320" cy="73152"/>
+          </a:xfrm>
+          <a:prstGeom prst="rect">
+            <a:avLst/>
+          </a:prstGeom>
+          <a:solidFill>
+            <a:srgbClr val="1565C0"/>
+          </a:solidFill>
+          <a:ln>
+            <a:noFill/>
+          </a:ln>
+        </p:spPr>
+        <p:style>
+          <a:lnRef idx="1">
+            <a:schemeClr val="accent1"/>
+          </a:lnRef>
+          <a:fillRef idx="3">
+            <a:schemeClr val="accent1"/>
+          </a:fillRef>
+          <a:effectRef idx="2">
+            <a:schemeClr val="accent1"/>
+          </a:effectRef>
+          <a:fontRef idx="minor">
+            <a:schemeClr val="lt1"/>
+          </a:fontRef>
+        </p:style>
+        <p:txBody>
+          <a:bodyPr rtlCol="0" anchor="ctr"/>
+          <a:lstStyle/>
+          <a:p>
+            <a:pPr algn="ctr"/>
+          </a:p>
+        </p:txBody>
+      </p:sp>
+      <p:sp>
+        <p:nvSpPr>
+          <p:cNvPr id="26" name="TextBox 25"/>
+          <p:cNvSpPr txBox="1"/>
+          <p:nvPr/>
+        </p:nvSpPr>
+        <p:spPr>
+          <a:xfrm>
+            <a:off x="9006840" y="2697480"/>
+            <a:ext cx="2377440" cy="411480"/>
+          </a:xfrm>
+          <a:prstGeom prst="rect">
+            <a:avLst/>
+          </a:prstGeom>
+          <a:noFill/>
+        </p:spPr>
+        <p:txBody>
+          <a:bodyPr wrap="square">
+            <a:spAutoFit/>
+          </a:bodyPr>
+          <a:lstStyle/>
+          <a:p>
+            <a:pPr algn="ctr"/>
+            <a:r>
+              <a:rPr sz="1600" b="1" i="0">
+                <a:solidFill>
+                  <a:srgbClr val="1565C0"/>
+                </a:solidFill>
+                <a:latin typeface="Calibri"/>
+              </a:rPr>
+              <a:t>AUTO</a:t>
+            </a:r>
+          </a:p>
+        </p:txBody>
+      </p:sp>
+      <p:sp>
+        <p:nvSpPr>
+          <p:cNvPr id="27" name="TextBox 26"/>
+          <p:cNvSpPr txBox="1"/>
+          <p:nvPr/>
+        </p:nvSpPr>
+        <p:spPr>
+          <a:xfrm>
+            <a:off x="9006840" y="3154680"/>
+            <a:ext cx="2377440" cy="777240"/>
+          </a:xfrm>
+          <a:prstGeom prst="rect">
+            <a:avLst/>
+          </a:prstGeom>
+          <a:noFill/>
+        </p:spPr>
+        <p:txBody>
+          <a:bodyPr wrap="square">
+            <a:spAutoFit/>
+          </a:bodyPr>
+          <a:lstStyle/>
+          <a:p>
+            <a:pPr algn="ctr"/>
+            <a:r>
+              <a:rPr sz="1100" b="0" i="0">
+                <a:solidFill>
+                  <a:srgbClr val="8B9DC3"/>
+                </a:solidFill>
+                <a:latin typeface="Calibri"/>
+              </a:rPr>
+              <a:t>Woensdag (vrijwel altijd)
+Dinsdag &amp; vrijdag (normaal weer)</a:t>
+            </a:r>
+          </a:p>
+        </p:txBody>
+      </p:sp>
+      <p:sp>
+        <p:nvSpPr>
+          <p:cNvPr id="28" name="TextBox 27"/>
+          <p:cNvSpPr txBox="1"/>
+          <p:nvPr/>
+        </p:nvSpPr>
+        <p:spPr>
+          <a:xfrm>
+            <a:off x="8869680" y="4160520"/>
+            <a:ext cx="2560320" cy="320040"/>
+          </a:xfrm>
+          <a:prstGeom prst="rect">
+            <a:avLst/>
+          </a:prstGeom>
+          <a:noFill/>
+        </p:spPr>
+        <p:txBody>
+          <a:bodyPr wrap="square">
+            <a:spAutoFit/>
+          </a:bodyPr>
+          <a:lstStyle/>
+          <a:p>
+            <a:pPr algn="l"/>
+            <a:r>
+              <a:rPr sz="1100" b="1" i="0">
+                <a:solidFill>
                   <a:srgbClr val="FF6B35"/>
                 </a:solidFill>
                 <a:latin typeface="Calibri"/>
               </a:rPr>
-              <a:t>THUISWERK-TRIGGER</a:t>
-            </a:r>
-          </a:p>
-        </p:txBody>
-      </p:sp>
-      <p:sp>
-        <p:nvSpPr>
-          <p:cNvPr id="10" name="TextBox 9"/>
-          <p:cNvSpPr txBox="1"/>
-          <p:nvPr/>
-        </p:nvSpPr>
-        <p:spPr>
-          <a:xfrm>
-            <a:off x="8823960" y="5394960"/>
-            <a:ext cx="3017520" cy="914400"/>
-          </a:xfrm>
-          <a:prstGeom prst="rect">
-            <a:avLst/>
-          </a:prstGeom>
-          <a:noFill/>
-        </p:spPr>
-        <p:txBody>
-          <a:bodyPr wrap="square">
-            <a:spAutoFit/>
-          </a:bodyPr>
-          <a:lstStyle/>
-          <a:p>
-            <a:pPr algn="l"/>
-            <a:r>
-              <a:rPr sz="1300" b="0" i="0">
+              <a:t>Auto &gt; 68 min  ↓</a:t>
+            </a:r>
+          </a:p>
+        </p:txBody>
+      </p:sp>
+      <p:sp>
+        <p:nvSpPr>
+          <p:cNvPr id="29" name="Rectangle 28"/>
+          <p:cNvSpPr/>
+          <p:nvPr/>
+        </p:nvSpPr>
+        <p:spPr>
+          <a:xfrm>
+            <a:off x="8915400" y="4526280"/>
+            <a:ext cx="2560320" cy="1463040"/>
+          </a:xfrm>
+          <a:prstGeom prst="rect">
+            <a:avLst/>
+          </a:prstGeom>
+          <a:solidFill>
+            <a:srgbClr val="3E1A00"/>
+          </a:solidFill>
+          <a:ln>
+            <a:noFill/>
+          </a:ln>
+        </p:spPr>
+        <p:style>
+          <a:lnRef idx="1">
+            <a:schemeClr val="accent1"/>
+          </a:lnRef>
+          <a:fillRef idx="3">
+            <a:schemeClr val="accent1"/>
+          </a:fillRef>
+          <a:effectRef idx="2">
+            <a:schemeClr val="accent1"/>
+          </a:effectRef>
+          <a:fontRef idx="minor">
+            <a:schemeClr val="lt1"/>
+          </a:fontRef>
+        </p:style>
+        <p:txBody>
+          <a:bodyPr rtlCol="0" anchor="ctr"/>
+          <a:lstStyle/>
+          <a:p>
+            <a:pPr algn="ctr"/>
+          </a:p>
+        </p:txBody>
+      </p:sp>
+      <p:sp>
+        <p:nvSpPr>
+          <p:cNvPr id="30" name="Rectangle 29"/>
+          <p:cNvSpPr/>
+          <p:nvPr/>
+        </p:nvSpPr>
+        <p:spPr>
+          <a:xfrm>
+            <a:off x="8915400" y="4526280"/>
+            <a:ext cx="2560320" cy="73152"/>
+          </a:xfrm>
+          <a:prstGeom prst="rect">
+            <a:avLst/>
+          </a:prstGeom>
+          <a:solidFill>
+            <a:srgbClr val="FF6B35"/>
+          </a:solidFill>
+          <a:ln>
+            <a:noFill/>
+          </a:ln>
+        </p:spPr>
+        <p:style>
+          <a:lnRef idx="1">
+            <a:schemeClr val="accent1"/>
+          </a:lnRef>
+          <a:fillRef idx="3">
+            <a:schemeClr val="accent1"/>
+          </a:fillRef>
+          <a:effectRef idx="2">
+            <a:schemeClr val="accent1"/>
+          </a:effectRef>
+          <a:fontRef idx="minor">
+            <a:schemeClr val="lt1"/>
+          </a:fontRef>
+        </p:style>
+        <p:txBody>
+          <a:bodyPr rtlCol="0" anchor="ctr"/>
+          <a:lstStyle/>
+          <a:p>
+            <a:pPr algn="ctr"/>
+          </a:p>
+        </p:txBody>
+      </p:sp>
+      <p:sp>
+        <p:nvSpPr>
+          <p:cNvPr id="31" name="TextBox 30"/>
+          <p:cNvSpPr txBox="1"/>
+          <p:nvPr/>
+        </p:nvSpPr>
+        <p:spPr>
+          <a:xfrm>
+            <a:off x="9006840" y="4617720"/>
+            <a:ext cx="2377440" cy="411480"/>
+          </a:xfrm>
+          <a:prstGeom prst="rect">
+            <a:avLst/>
+          </a:prstGeom>
+          <a:noFill/>
+        </p:spPr>
+        <p:txBody>
+          <a:bodyPr wrap="square">
+            <a:spAutoFit/>
+          </a:bodyPr>
+          <a:lstStyle/>
+          <a:p>
+            <a:pPr algn="ctr"/>
+            <a:r>
+              <a:rPr sz="1600" b="1" i="0">
+                <a:solidFill>
+                  <a:srgbClr val="FF6B35"/>
+                </a:solidFill>
+                <a:latin typeface="Calibri"/>
+              </a:rPr>
+              <a:t>TREIN</a:t>
+            </a:r>
+          </a:p>
+        </p:txBody>
+      </p:sp>
+      <p:sp>
+        <p:nvSpPr>
+          <p:cNvPr id="32" name="TextBox 31"/>
+          <p:cNvSpPr txBox="1"/>
+          <p:nvPr/>
+        </p:nvSpPr>
+        <p:spPr>
+          <a:xfrm>
+            <a:off x="9006840" y="5074920"/>
+            <a:ext cx="2377440" cy="777240"/>
+          </a:xfrm>
+          <a:prstGeom prst="rect">
+            <a:avLst/>
+          </a:prstGeom>
+          <a:noFill/>
+        </p:spPr>
+        <p:txBody>
+          <a:bodyPr wrap="square">
+            <a:spAutoFit/>
+          </a:bodyPr>
+          <a:lstStyle/>
+          <a:p>
+            <a:pPr algn="ctr"/>
+            <a:r>
+              <a:rPr sz="1100" b="0" i="0">
+                <a:solidFill>
+                  <a:srgbClr val="8B9DC3"/>
+                </a:solidFill>
+                <a:latin typeface="Calibri"/>
+              </a:rPr>
+              <a:t>Maandag &amp; donderdag (bijna altijd)
+Bij zware regen of sterke wind</a:t>
+            </a:r>
+          </a:p>
+        </p:txBody>
+      </p:sp>
+      <p:sp>
+        <p:nvSpPr>
+          <p:cNvPr id="33" name="Rectangle 32"/>
+          <p:cNvSpPr/>
+          <p:nvPr/>
+        </p:nvSpPr>
+        <p:spPr>
+          <a:xfrm>
+            <a:off x="10332720" y="2240280"/>
+            <a:ext cx="36576" cy="3200400"/>
+          </a:xfrm>
+          <a:prstGeom prst="rect">
+            <a:avLst/>
+          </a:prstGeom>
+          <a:solidFill>
+            <a:srgbClr val="8B9DC3"/>
+          </a:solidFill>
+          <a:ln>
+            <a:noFill/>
+          </a:ln>
+        </p:spPr>
+        <p:style>
+          <a:lnRef idx="1">
+            <a:schemeClr val="accent1"/>
+          </a:lnRef>
+          <a:fillRef idx="3">
+            <a:schemeClr val="accent1"/>
+          </a:fillRef>
+          <a:effectRef idx="2">
+            <a:schemeClr val="accent1"/>
+          </a:effectRef>
+          <a:fontRef idx="minor">
+            <a:schemeClr val="lt1"/>
+          </a:fontRef>
+        </p:style>
+        <p:txBody>
+          <a:bodyPr rtlCol="0" anchor="ctr"/>
+          <a:lstStyle/>
+          <a:p>
+            <a:pPr algn="ctr"/>
+          </a:p>
+        </p:txBody>
+      </p:sp>
+      <p:sp>
+        <p:nvSpPr>
+          <p:cNvPr id="34" name="Rectangle 33"/>
+          <p:cNvSpPr/>
+          <p:nvPr/>
+        </p:nvSpPr>
+        <p:spPr>
+          <a:xfrm>
+            <a:off x="411480" y="4343400"/>
+            <a:ext cx="8138160" cy="2331720"/>
+          </a:xfrm>
+          <a:prstGeom prst="rect">
+            <a:avLst/>
+          </a:prstGeom>
+          <a:solidFill>
+            <a:srgbClr val="112D4E"/>
+          </a:solidFill>
+          <a:ln>
+            <a:noFill/>
+          </a:ln>
+        </p:spPr>
+        <p:style>
+          <a:lnRef idx="1">
+            <a:schemeClr val="accent1"/>
+          </a:lnRef>
+          <a:fillRef idx="3">
+            <a:schemeClr val="accent1"/>
+          </a:fillRef>
+          <a:effectRef idx="2">
+            <a:schemeClr val="accent1"/>
+          </a:effectRef>
+          <a:fontRef idx="minor">
+            <a:schemeClr val="lt1"/>
+          </a:fontRef>
+        </p:style>
+        <p:txBody>
+          <a:bodyPr rtlCol="0" anchor="ctr"/>
+          <a:lstStyle/>
+          <a:p>
+            <a:pPr algn="ctr"/>
+          </a:p>
+        </p:txBody>
+      </p:sp>
+      <p:sp>
+        <p:nvSpPr>
+          <p:cNvPr id="35" name="Rectangle 34"/>
+          <p:cNvSpPr/>
+          <p:nvPr/>
+        </p:nvSpPr>
+        <p:spPr>
+          <a:xfrm>
+            <a:off x="411480" y="4343400"/>
+            <a:ext cx="8138160" cy="54864"/>
+          </a:xfrm>
+          <a:prstGeom prst="rect">
+            <a:avLst/>
+          </a:prstGeom>
+          <a:solidFill>
+            <a:srgbClr val="00C8A0"/>
+          </a:solidFill>
+          <a:ln>
+            <a:noFill/>
+          </a:ln>
+        </p:spPr>
+        <p:style>
+          <a:lnRef idx="1">
+            <a:schemeClr val="accent1"/>
+          </a:lnRef>
+          <a:fillRef idx="3">
+            <a:schemeClr val="accent1"/>
+          </a:fillRef>
+          <a:effectRef idx="2">
+            <a:schemeClr val="accent1"/>
+          </a:effectRef>
+          <a:fontRef idx="minor">
+            <a:schemeClr val="lt1"/>
+          </a:fontRef>
+        </p:style>
+        <p:txBody>
+          <a:bodyPr rtlCol="0" anchor="ctr"/>
+          <a:lstStyle/>
+          <a:p>
+            <a:pPr algn="ctr"/>
+          </a:p>
+        </p:txBody>
+      </p:sp>
+      <p:sp>
+        <p:nvSpPr>
+          <p:cNvPr id="36" name="TextBox 35"/>
+          <p:cNvSpPr txBox="1"/>
+          <p:nvPr/>
+        </p:nvSpPr>
+        <p:spPr>
+          <a:xfrm>
+            <a:off x="548640" y="4416552"/>
+            <a:ext cx="7863840" cy="320040"/>
+          </a:xfrm>
+          <a:prstGeom prst="rect">
+            <a:avLst/>
+          </a:prstGeom>
+          <a:noFill/>
+        </p:spPr>
+        <p:txBody>
+          <a:bodyPr wrap="square">
+            <a:spAutoFit/>
+          </a:bodyPr>
+          <a:lstStyle/>
+          <a:p>
+            <a:pPr algn="l"/>
+            <a:r>
+              <a:rPr sz="1200" b="1" i="0">
+                <a:solidFill>
+                  <a:srgbClr val="00C8A0"/>
+                </a:solidFill>
+                <a:latin typeface="Calibri"/>
+              </a:rPr>
+              <a:t>RISICOSCORE BREAKDOWN (max = 9 punten)  →  drempel = 5</a:t>
+            </a:r>
+          </a:p>
+        </p:txBody>
+      </p:sp>
+      <p:sp>
+        <p:nvSpPr>
+          <p:cNvPr id="37" name="TextBox 36"/>
+          <p:cNvSpPr txBox="1"/>
+          <p:nvPr/>
+        </p:nvSpPr>
+        <p:spPr>
+          <a:xfrm>
+            <a:off x="640080" y="4828032"/>
+            <a:ext cx="2743200" cy="320040"/>
+          </a:xfrm>
+          <a:prstGeom prst="rect">
+            <a:avLst/>
+          </a:prstGeom>
+          <a:noFill/>
+        </p:spPr>
+        <p:txBody>
+          <a:bodyPr wrap="square">
+            <a:spAutoFit/>
+          </a:bodyPr>
+          <a:lstStyle/>
+          <a:p>
+            <a:pPr algn="l"/>
+            <a:r>
+              <a:rPr sz="1200" b="0" i="0">
                 <a:solidFill>
                   <a:srgbClr val="FFFFFF"/>
                 </a:solidFill>
                 <a:latin typeface="Calibri"/>
               </a:rPr>
-              <a:t>weather_risk ≥ 5
-ÉN beide modi &gt; 90 min
-→ Thuiswerken aanbevolen</a:t>
+              <a:t>Regen  &gt;= 2 mm/u</a:t>
+            </a:r>
+          </a:p>
+        </p:txBody>
+      </p:sp>
+      <p:sp>
+        <p:nvSpPr>
+          <p:cNvPr id="38" name="TextBox 37"/>
+          <p:cNvSpPr txBox="1"/>
+          <p:nvPr/>
+        </p:nvSpPr>
+        <p:spPr>
+          <a:xfrm>
+            <a:off x="3429000" y="4828032"/>
+            <a:ext cx="731520" cy="320040"/>
+          </a:xfrm>
+          <a:prstGeom prst="rect">
+            <a:avLst/>
+          </a:prstGeom>
+          <a:noFill/>
+        </p:spPr>
+        <p:txBody>
+          <a:bodyPr wrap="square">
+            <a:spAutoFit/>
+          </a:bodyPr>
+          <a:lstStyle/>
+          <a:p>
+            <a:pPr algn="l"/>
+            <a:r>
+              <a:rPr sz="1200" b="1" i="0">
+                <a:solidFill>
+                  <a:srgbClr val="00C8A0"/>
+                </a:solidFill>
+                <a:latin typeface="Calibri"/>
+              </a:rPr>
+              <a:t>+2 pt</a:t>
+            </a:r>
+          </a:p>
+        </p:txBody>
+      </p:sp>
+      <p:sp>
+        <p:nvSpPr>
+          <p:cNvPr id="39" name="TextBox 38"/>
+          <p:cNvSpPr txBox="1"/>
+          <p:nvPr/>
+        </p:nvSpPr>
+        <p:spPr>
+          <a:xfrm>
+            <a:off x="4206240" y="4828032"/>
+            <a:ext cx="4206240" cy="320040"/>
+          </a:xfrm>
+          <a:prstGeom prst="rect">
+            <a:avLst/>
+          </a:prstGeom>
+          <a:noFill/>
+        </p:spPr>
+        <p:txBody>
+          <a:bodyPr wrap="square">
+            <a:spAutoFit/>
+          </a:bodyPr>
+          <a:lstStyle/>
+          <a:p>
+            <a:pPr algn="l"/>
+            <a:r>
+              <a:rPr sz="1100" b="0" i="1">
+                <a:solidFill>
+                  <a:srgbClr val="8B9DC3"/>
+                </a:solidFill>
+                <a:latin typeface="Calibri"/>
+              </a:rPr>
+              <a:t>matige tot zware neerslag</a:t>
+            </a:r>
+          </a:p>
+        </p:txBody>
+      </p:sp>
+      <p:sp>
+        <p:nvSpPr>
+          <p:cNvPr id="40" name="TextBox 39"/>
+          <p:cNvSpPr txBox="1"/>
+          <p:nvPr/>
+        </p:nvSpPr>
+        <p:spPr>
+          <a:xfrm>
+            <a:off x="640080" y="5175504"/>
+            <a:ext cx="2743200" cy="320040"/>
+          </a:xfrm>
+          <a:prstGeom prst="rect">
+            <a:avLst/>
+          </a:prstGeom>
+          <a:noFill/>
+        </p:spPr>
+        <p:txBody>
+          <a:bodyPr wrap="square">
+            <a:spAutoFit/>
+          </a:bodyPr>
+          <a:lstStyle/>
+          <a:p>
+            <a:pPr algn="l"/>
+            <a:r>
+              <a:rPr sz="1200" b="0" i="0">
+                <a:solidFill>
+                  <a:srgbClr val="FFFFFF"/>
+                </a:solidFill>
+                <a:latin typeface="Calibri"/>
+              </a:rPr>
+              <a:t>Wind  &gt;= 45 km/h</a:t>
+            </a:r>
+          </a:p>
+        </p:txBody>
+      </p:sp>
+      <p:sp>
+        <p:nvSpPr>
+          <p:cNvPr id="41" name="TextBox 40"/>
+          <p:cNvSpPr txBox="1"/>
+          <p:nvPr/>
+        </p:nvSpPr>
+        <p:spPr>
+          <a:xfrm>
+            <a:off x="3429000" y="5175504"/>
+            <a:ext cx="731520" cy="320040"/>
+          </a:xfrm>
+          <a:prstGeom prst="rect">
+            <a:avLst/>
+          </a:prstGeom>
+          <a:noFill/>
+        </p:spPr>
+        <p:txBody>
+          <a:bodyPr wrap="square">
+            <a:spAutoFit/>
+          </a:bodyPr>
+          <a:lstStyle/>
+          <a:p>
+            <a:pPr algn="l"/>
+            <a:r>
+              <a:rPr sz="1200" b="1" i="0">
+                <a:solidFill>
+                  <a:srgbClr val="00C8A0"/>
+                </a:solidFill>
+                <a:latin typeface="Calibri"/>
+              </a:rPr>
+              <a:t>+2 pt</a:t>
+            </a:r>
+          </a:p>
+        </p:txBody>
+      </p:sp>
+      <p:sp>
+        <p:nvSpPr>
+          <p:cNvPr id="42" name="TextBox 41"/>
+          <p:cNvSpPr txBox="1"/>
+          <p:nvPr/>
+        </p:nvSpPr>
+        <p:spPr>
+          <a:xfrm>
+            <a:off x="4206240" y="5175504"/>
+            <a:ext cx="4206240" cy="320040"/>
+          </a:xfrm>
+          <a:prstGeom prst="rect">
+            <a:avLst/>
+          </a:prstGeom>
+          <a:noFill/>
+        </p:spPr>
+        <p:txBody>
+          <a:bodyPr wrap="square">
+            <a:spAutoFit/>
+          </a:bodyPr>
+          <a:lstStyle/>
+          <a:p>
+            <a:pPr algn="l"/>
+            <a:r>
+              <a:rPr sz="1100" b="0" i="1">
+                <a:solidFill>
+                  <a:srgbClr val="8B9DC3"/>
+                </a:solidFill>
+                <a:latin typeface="Calibri"/>
+              </a:rPr>
+              <a:t>windstoten op snelweg</a:t>
+            </a:r>
+          </a:p>
+        </p:txBody>
+      </p:sp>
+      <p:sp>
+        <p:nvSpPr>
+          <p:cNvPr id="43" name="TextBox 42"/>
+          <p:cNvSpPr txBox="1"/>
+          <p:nvPr/>
+        </p:nvSpPr>
+        <p:spPr>
+          <a:xfrm>
+            <a:off x="640080" y="5522976"/>
+            <a:ext cx="2743200" cy="320040"/>
+          </a:xfrm>
+          <a:prstGeom prst="rect">
+            <a:avLst/>
+          </a:prstGeom>
+          <a:noFill/>
+        </p:spPr>
+        <p:txBody>
+          <a:bodyPr wrap="square">
+            <a:spAutoFit/>
+          </a:bodyPr>
+          <a:lstStyle/>
+          <a:p>
+            <a:pPr algn="l"/>
+            <a:r>
+              <a:rPr sz="1200" b="0" i="0">
+                <a:solidFill>
+                  <a:srgbClr val="FFFFFF"/>
+                </a:solidFill>
+                <a:latin typeface="Calibri"/>
+              </a:rPr>
+              <a:t>Vorst  (temp &lt; 0°C)</a:t>
+            </a:r>
+          </a:p>
+        </p:txBody>
+      </p:sp>
+      <p:sp>
+        <p:nvSpPr>
+          <p:cNvPr id="44" name="TextBox 43"/>
+          <p:cNvSpPr txBox="1"/>
+          <p:nvPr/>
+        </p:nvSpPr>
+        <p:spPr>
+          <a:xfrm>
+            <a:off x="3429000" y="5522976"/>
+            <a:ext cx="731520" cy="320040"/>
+          </a:xfrm>
+          <a:prstGeom prst="rect">
+            <a:avLst/>
+          </a:prstGeom>
+          <a:noFill/>
+        </p:spPr>
+        <p:txBody>
+          <a:bodyPr wrap="square">
+            <a:spAutoFit/>
+          </a:bodyPr>
+          <a:lstStyle/>
+          <a:p>
+            <a:pPr algn="l"/>
+            <a:r>
+              <a:rPr sz="1200" b="1" i="0">
+                <a:solidFill>
+                  <a:srgbClr val="8B9DC3"/>
+                </a:solidFill>
+                <a:latin typeface="Calibri"/>
+              </a:rPr>
+              <a:t>+1 pt</a:t>
+            </a:r>
+          </a:p>
+        </p:txBody>
+      </p:sp>
+      <p:sp>
+        <p:nvSpPr>
+          <p:cNvPr id="45" name="TextBox 44"/>
+          <p:cNvSpPr txBox="1"/>
+          <p:nvPr/>
+        </p:nvSpPr>
+        <p:spPr>
+          <a:xfrm>
+            <a:off x="4206240" y="5522976"/>
+            <a:ext cx="4206240" cy="320040"/>
+          </a:xfrm>
+          <a:prstGeom prst="rect">
+            <a:avLst/>
+          </a:prstGeom>
+          <a:noFill/>
+        </p:spPr>
+        <p:txBody>
+          <a:bodyPr wrap="square">
+            <a:spAutoFit/>
+          </a:bodyPr>
+          <a:lstStyle/>
+          <a:p>
+            <a:pPr algn="l"/>
+            <a:r>
+              <a:rPr sz="1100" b="0" i="1">
+                <a:solidFill>
+                  <a:srgbClr val="8B9DC3"/>
+                </a:solidFill>
+                <a:latin typeface="Calibri"/>
+              </a:rPr>
+              <a:t>ijzel / berijpte wegen</a:t>
+            </a:r>
+          </a:p>
+        </p:txBody>
+      </p:sp>
+      <p:sp>
+        <p:nvSpPr>
+          <p:cNvPr id="46" name="TextBox 45"/>
+          <p:cNvSpPr txBox="1"/>
+          <p:nvPr/>
+        </p:nvSpPr>
+        <p:spPr>
+          <a:xfrm>
+            <a:off x="640080" y="5870448"/>
+            <a:ext cx="2743200" cy="320040"/>
+          </a:xfrm>
+          <a:prstGeom prst="rect">
+            <a:avLst/>
+          </a:prstGeom>
+          <a:noFill/>
+        </p:spPr>
+        <p:txBody>
+          <a:bodyPr wrap="square">
+            <a:spAutoFit/>
+          </a:bodyPr>
+          <a:lstStyle/>
+          <a:p>
+            <a:pPr algn="l"/>
+            <a:r>
+              <a:rPr sz="1200" b="0" i="0">
+                <a:solidFill>
+                  <a:srgbClr val="FFFFFF"/>
+                </a:solidFill>
+                <a:latin typeface="Calibri"/>
+              </a:rPr>
+              <a:t>Sneeuw  (&gt; 0 cm)</a:t>
+            </a:r>
+          </a:p>
+        </p:txBody>
+      </p:sp>
+      <p:sp>
+        <p:nvSpPr>
+          <p:cNvPr id="47" name="TextBox 46"/>
+          <p:cNvSpPr txBox="1"/>
+          <p:nvPr/>
+        </p:nvSpPr>
+        <p:spPr>
+          <a:xfrm>
+            <a:off x="3429000" y="5870448"/>
+            <a:ext cx="731520" cy="320040"/>
+          </a:xfrm>
+          <a:prstGeom prst="rect">
+            <a:avLst/>
+          </a:prstGeom>
+          <a:noFill/>
+        </p:spPr>
+        <p:txBody>
+          <a:bodyPr wrap="square">
+            <a:spAutoFit/>
+          </a:bodyPr>
+          <a:lstStyle/>
+          <a:p>
+            <a:pPr algn="l"/>
+            <a:r>
+              <a:rPr sz="1200" b="1" i="0">
+                <a:solidFill>
+                  <a:srgbClr val="FF6B35"/>
+                </a:solidFill>
+                <a:latin typeface="Calibri"/>
+              </a:rPr>
+              <a:t>+3 pt</a:t>
+            </a:r>
+          </a:p>
+        </p:txBody>
+      </p:sp>
+      <p:sp>
+        <p:nvSpPr>
+          <p:cNvPr id="48" name="TextBox 47"/>
+          <p:cNvSpPr txBox="1"/>
+          <p:nvPr/>
+        </p:nvSpPr>
+        <p:spPr>
+          <a:xfrm>
+            <a:off x="4206240" y="5870448"/>
+            <a:ext cx="4206240" cy="320040"/>
+          </a:xfrm>
+          <a:prstGeom prst="rect">
+            <a:avLst/>
+          </a:prstGeom>
+          <a:noFill/>
+        </p:spPr>
+        <p:txBody>
+          <a:bodyPr wrap="square">
+            <a:spAutoFit/>
+          </a:bodyPr>
+          <a:lstStyle/>
+          <a:p>
+            <a:pPr algn="l"/>
+            <a:r>
+              <a:rPr sz="1100" b="0" i="1">
+                <a:solidFill>
+                  <a:srgbClr val="8B9DC3"/>
+                </a:solidFill>
+                <a:latin typeface="Calibri"/>
+              </a:rPr>
+              <a:t>sneeuw haalt drempel snel!</a:t>
+            </a:r>
+          </a:p>
+        </p:txBody>
+      </p:sp>
+      <p:sp>
+        <p:nvSpPr>
+          <p:cNvPr id="49" name="TextBox 48"/>
+          <p:cNvSpPr txBox="1"/>
+          <p:nvPr/>
+        </p:nvSpPr>
+        <p:spPr>
+          <a:xfrm>
+            <a:off x="640080" y="6217920"/>
+            <a:ext cx="2743200" cy="320040"/>
+          </a:xfrm>
+          <a:prstGeom prst="rect">
+            <a:avLst/>
+          </a:prstGeom>
+          <a:noFill/>
+        </p:spPr>
+        <p:txBody>
+          <a:bodyPr wrap="square">
+            <a:spAutoFit/>
+          </a:bodyPr>
+          <a:lstStyle/>
+          <a:p>
+            <a:pPr algn="l"/>
+            <a:r>
+              <a:rPr sz="1200" b="0" i="0">
+                <a:solidFill>
+                  <a:srgbClr val="FFFFFF"/>
+                </a:solidFill>
+                <a:latin typeface="Calibri"/>
+              </a:rPr>
+              <a:t>Mist  (vochtigheid ≥ 97%)</a:t>
+            </a:r>
+          </a:p>
+        </p:txBody>
+      </p:sp>
+      <p:sp>
+        <p:nvSpPr>
+          <p:cNvPr id="50" name="TextBox 49"/>
+          <p:cNvSpPr txBox="1"/>
+          <p:nvPr/>
+        </p:nvSpPr>
+        <p:spPr>
+          <a:xfrm>
+            <a:off x="3429000" y="6217920"/>
+            <a:ext cx="731520" cy="320040"/>
+          </a:xfrm>
+          <a:prstGeom prst="rect">
+            <a:avLst/>
+          </a:prstGeom>
+          <a:noFill/>
+        </p:spPr>
+        <p:txBody>
+          <a:bodyPr wrap="square">
+            <a:spAutoFit/>
+          </a:bodyPr>
+          <a:lstStyle/>
+          <a:p>
+            <a:pPr algn="l"/>
+            <a:r>
+              <a:rPr sz="1200" b="1" i="0">
+                <a:solidFill>
+                  <a:srgbClr val="8B9DC3"/>
+                </a:solidFill>
+                <a:latin typeface="Calibri"/>
+              </a:rPr>
+              <a:t>+1 pt</a:t>
+            </a:r>
+          </a:p>
+        </p:txBody>
+      </p:sp>
+      <p:sp>
+        <p:nvSpPr>
+          <p:cNvPr id="51" name="TextBox 50"/>
+          <p:cNvSpPr txBox="1"/>
+          <p:nvPr/>
+        </p:nvSpPr>
+        <p:spPr>
+          <a:xfrm>
+            <a:off x="4206240" y="6217920"/>
+            <a:ext cx="4206240" cy="320040"/>
+          </a:xfrm>
+          <a:prstGeom prst="rect">
+            <a:avLst/>
+          </a:prstGeom>
+          <a:noFill/>
+        </p:spPr>
+        <p:txBody>
+          <a:bodyPr wrap="square">
+            <a:spAutoFit/>
+          </a:bodyPr>
+          <a:lstStyle/>
+          <a:p>
+            <a:pPr algn="l"/>
+            <a:r>
+              <a:rPr sz="1100" b="0" i="1">
+                <a:solidFill>
+                  <a:srgbClr val="8B9DC3"/>
+                </a:solidFill>
+                <a:latin typeface="Calibri"/>
+              </a:rPr>
+              <a:t>dense ochtendmist</a:t>
             </a:r>
           </a:p>
         </p:txBody>
@@ -9943,7 +11383,7 @@
                 </a:solidFill>
                 <a:latin typeface="Calibri"/>
               </a:rPr>
-              <a:t>Sleutelinzichten</a:t>
+              <a:t>Uitgebreide Analyse — 485 Scenario's</a:t>
             </a:r>
           </a:p>
         </p:txBody>
@@ -9991,16 +11431,40 @@
           </a:p>
         </p:txBody>
       </p:sp>
-      <p:sp>
-        <p:nvSpPr>
-          <p:cNvPr id="4" name="Rectangle 3"/>
+      <p:pic>
+        <p:nvPicPr>
+          <p:cNvPr id="4" name="Picture 3" descr="scenarios_extended_by_weather.png"/>
+          <p:cNvPicPr>
+            <a:picLocks noChangeAspect="1"/>
+          </p:cNvPicPr>
+          <p:nvPr/>
+        </p:nvPicPr>
+        <p:blipFill>
+          <a:blip r:embed="rId2"/>
+          <a:stretch>
+            <a:fillRect/>
+          </a:stretch>
+        </p:blipFill>
+        <p:spPr>
+          <a:xfrm>
+            <a:off x="411480" y="1097280"/>
+            <a:ext cx="7498079" cy="5303520"/>
+          </a:xfrm>
+          <a:prstGeom prst="rect">
+            <a:avLst/>
+          </a:prstGeom>
+        </p:spPr>
+      </p:pic>
+      <p:sp>
+        <p:nvSpPr>
+          <p:cNvPr id="5" name="Rectangle 4"/>
           <p:cNvSpPr/>
           <p:nvPr/>
         </p:nvSpPr>
         <p:spPr>
           <a:xfrm>
-            <a:off x="411480" y="1188720"/>
-            <a:ext cx="5486400" cy="1554480"/>
+            <a:off x="8138160" y="1097280"/>
+            <a:ext cx="3749039" cy="5303520"/>
           </a:xfrm>
           <a:prstGeom prst="rect">
             <a:avLst/>
@@ -10036,14 +11500,92 @@
       </p:sp>
       <p:sp>
         <p:nvSpPr>
-          <p:cNvPr id="5" name="Rectangle 4"/>
+          <p:cNvPr id="6" name="TextBox 5"/>
+          <p:cNvSpPr txBox="1"/>
+          <p:nvPr/>
+        </p:nvSpPr>
+        <p:spPr>
+          <a:xfrm>
+            <a:off x="8321040" y="1234440"/>
+            <a:ext cx="3474720" cy="365760"/>
+          </a:xfrm>
+          <a:prstGeom prst="rect">
+            <a:avLst/>
+          </a:prstGeom>
+          <a:noFill/>
+        </p:spPr>
+        <p:txBody>
+          <a:bodyPr wrap="square">
+            <a:spAutoFit/>
+          </a:bodyPr>
+          <a:lstStyle/>
+          <a:p>
+            <a:pPr algn="l"/>
+            <a:r>
+              <a:rPr sz="1100" b="1" i="0">
+                <a:solidFill>
+                  <a:srgbClr val="00C8A0"/>
+                </a:solidFill>
+                <a:latin typeface="Calibri"/>
+              </a:rPr>
+              <a:t>SLEUTELBEVINDINGEN</a:t>
+            </a:r>
+          </a:p>
+        </p:txBody>
+      </p:sp>
+      <p:sp>
+        <p:nvSpPr>
+          <p:cNvPr id="7" name="Rectangle 6"/>
           <p:cNvSpPr/>
           <p:nvPr/>
         </p:nvSpPr>
         <p:spPr>
           <a:xfrm>
-            <a:off x="411480" y="1188720"/>
-            <a:ext cx="64008" cy="1554480"/>
+            <a:off x="8138160" y="1691640"/>
+            <a:ext cx="3749039" cy="1005840"/>
+          </a:xfrm>
+          <a:prstGeom prst="rect">
+            <a:avLst/>
+          </a:prstGeom>
+          <a:solidFill>
+            <a:srgbClr val="0D1B2A"/>
+          </a:solidFill>
+          <a:ln>
+            <a:noFill/>
+          </a:ln>
+        </p:spPr>
+        <p:style>
+          <a:lnRef idx="1">
+            <a:schemeClr val="accent1"/>
+          </a:lnRef>
+          <a:fillRef idx="3">
+            <a:schemeClr val="accent1"/>
+          </a:fillRef>
+          <a:effectRef idx="2">
+            <a:schemeClr val="accent1"/>
+          </a:effectRef>
+          <a:fontRef idx="minor">
+            <a:schemeClr val="lt1"/>
+          </a:fontRef>
+        </p:style>
+        <p:txBody>
+          <a:bodyPr rtlCol="0" anchor="ctr"/>
+          <a:lstStyle/>
+          <a:p>
+            <a:pPr algn="ctr"/>
+          </a:p>
+        </p:txBody>
+      </p:sp>
+      <p:sp>
+        <p:nvSpPr>
+          <p:cNvPr id="8" name="Rectangle 7"/>
+          <p:cNvSpPr/>
+          <p:nvPr/>
+        </p:nvSpPr>
+        <p:spPr>
+          <a:xfrm>
+            <a:off x="8138160" y="1691640"/>
+            <a:ext cx="54864" cy="1005840"/>
           </a:xfrm>
           <a:prstGeom prst="rect">
             <a:avLst/>
@@ -10079,84 +11621,552 @@
       </p:sp>
       <p:sp>
         <p:nvSpPr>
-          <p:cNvPr id="6" name="TextBox 5"/>
-          <p:cNvSpPr txBox="1"/>
-          <p:nvPr/>
-        </p:nvSpPr>
-        <p:spPr>
-          <a:xfrm>
-            <a:off x="594360" y="1280160"/>
-            <a:ext cx="5166360" cy="411480"/>
-          </a:xfrm>
-          <a:prstGeom prst="rect">
-            <a:avLst/>
-          </a:prstGeom>
-          <a:noFill/>
-        </p:spPr>
-        <p:txBody>
-          <a:bodyPr wrap="square">
-            <a:spAutoFit/>
-          </a:bodyPr>
-          <a:lstStyle/>
-          <a:p>
-            <a:pPr algn="l"/>
-            <a:r>
-              <a:rPr sz="1400" b="1" i="0">
+          <p:cNvPr id="9" name="TextBox 8"/>
+          <p:cNvSpPr txBox="1"/>
+          <p:nvPr/>
+        </p:nvSpPr>
+        <p:spPr>
+          <a:xfrm>
+            <a:off x="8275320" y="1737360"/>
+            <a:ext cx="3474720" cy="365760"/>
+          </a:xfrm>
+          <a:prstGeom prst="rect">
+            <a:avLst/>
+          </a:prstGeom>
+          <a:noFill/>
+        </p:spPr>
+        <p:txBody>
+          <a:bodyPr wrap="square">
+            <a:spAutoFit/>
+          </a:bodyPr>
+          <a:lstStyle/>
+          <a:p>
+            <a:pPr algn="l"/>
+            <a:r>
+              <a:rPr sz="1200" b="1" i="0">
                 <a:solidFill>
                   <a:srgbClr val="FF6B35"/>
                 </a:solidFill>
                 <a:latin typeface="Calibri"/>
               </a:rPr>
-              <a:t>Ma &amp; do = slechtste dagen voor autorijden</a:t>
-            </a:r>
-          </a:p>
-        </p:txBody>
-      </p:sp>
-      <p:sp>
-        <p:nvSpPr>
-          <p:cNvPr id="7" name="TextBox 6"/>
-          <p:cNvSpPr txBox="1"/>
-          <p:nvPr/>
-        </p:nvSpPr>
-        <p:spPr>
-          <a:xfrm>
-            <a:off x="594360" y="1719072"/>
-            <a:ext cx="5166360" cy="822960"/>
-          </a:xfrm>
-          <a:prstGeom prst="rect">
-            <a:avLst/>
-          </a:prstGeom>
-          <a:noFill/>
-        </p:spPr>
-        <p:txBody>
-          <a:bodyPr wrap="square">
-            <a:spAutoFit/>
-          </a:bodyPr>
-          <a:lstStyle/>
-          <a:p>
-            <a:pPr algn="l"/>
-            <a:r>
-              <a:rPr sz="1200" b="0" i="0">
+              <a:t>Ma &amp; Do: trein wint in 86% van scenario's</a:t>
+            </a:r>
+          </a:p>
+        </p:txBody>
+      </p:sp>
+      <p:sp>
+        <p:nvSpPr>
+          <p:cNvPr id="10" name="TextBox 9"/>
+          <p:cNvSpPr txBox="1"/>
+          <p:nvPr/>
+        </p:nvSpPr>
+        <p:spPr>
+          <a:xfrm>
+            <a:off x="8275320" y="2130552"/>
+            <a:ext cx="3474720" cy="502920"/>
+          </a:xfrm>
+          <a:prstGeom prst="rect">
+            <a:avLst/>
+          </a:prstGeom>
+          <a:noFill/>
+        </p:spPr>
+        <p:txBody>
+          <a:bodyPr wrap="square">
+            <a:spAutoFit/>
+          </a:bodyPr>
+          <a:lstStyle/>
+          <a:p>
+            <a:pPr algn="l"/>
+            <a:r>
+              <a:rPr sz="1100" b="0" i="0">
                 <a:solidFill>
                   <a:srgbClr val="8B9DC3"/>
                 </a:solidFill>
                 <a:latin typeface="Calibri"/>
               </a:rPr>
-              <a:t>~18% en ~17% boven vrije doorstroomtijd (Infrabel) — menselijk rijgedrag, niet het weer.</a:t>
-            </a:r>
-          </a:p>
-        </p:txBody>
-      </p:sp>
-      <p:sp>
-        <p:nvSpPr>
-          <p:cNvPr id="8" name="Rectangle 7"/>
+              <a:t>69 min auto vs. 68 min drempel. Elke extra vertraging = trein.</a:t>
+            </a:r>
+          </a:p>
+        </p:txBody>
+      </p:sp>
+      <p:sp>
+        <p:nvSpPr>
+          <p:cNvPr id="11" name="Rectangle 10"/>
           <p:cNvSpPr/>
           <p:nvPr/>
         </p:nvSpPr>
         <p:spPr>
           <a:xfrm>
-            <a:off x="6217920" y="1188720"/>
-            <a:ext cx="5486400" cy="1554480"/>
+            <a:off x="8138160" y="2788920"/>
+            <a:ext cx="3749039" cy="1005840"/>
+          </a:xfrm>
+          <a:prstGeom prst="rect">
+            <a:avLst/>
+          </a:prstGeom>
+          <a:solidFill>
+            <a:srgbClr val="0D1B2A"/>
+          </a:solidFill>
+          <a:ln>
+            <a:noFill/>
+          </a:ln>
+        </p:spPr>
+        <p:style>
+          <a:lnRef idx="1">
+            <a:schemeClr val="accent1"/>
+          </a:lnRef>
+          <a:fillRef idx="3">
+            <a:schemeClr val="accent1"/>
+          </a:fillRef>
+          <a:effectRef idx="2">
+            <a:schemeClr val="accent1"/>
+          </a:effectRef>
+          <a:fontRef idx="minor">
+            <a:schemeClr val="lt1"/>
+          </a:fontRef>
+        </p:style>
+        <p:txBody>
+          <a:bodyPr rtlCol="0" anchor="ctr"/>
+          <a:lstStyle/>
+          <a:p>
+            <a:pPr algn="ctr"/>
+          </a:p>
+        </p:txBody>
+      </p:sp>
+      <p:sp>
+        <p:nvSpPr>
+          <p:cNvPr id="12" name="Rectangle 11"/>
+          <p:cNvSpPr/>
+          <p:nvPr/>
+        </p:nvSpPr>
+        <p:spPr>
+          <a:xfrm>
+            <a:off x="8138160" y="2788920"/>
+            <a:ext cx="54864" cy="1005840"/>
+          </a:xfrm>
+          <a:prstGeom prst="rect">
+            <a:avLst/>
+          </a:prstGeom>
+          <a:solidFill>
+            <a:srgbClr val="00C8A0"/>
+          </a:solidFill>
+          <a:ln>
+            <a:noFill/>
+          </a:ln>
+        </p:spPr>
+        <p:style>
+          <a:lnRef idx="1">
+            <a:schemeClr val="accent1"/>
+          </a:lnRef>
+          <a:fillRef idx="3">
+            <a:schemeClr val="accent1"/>
+          </a:fillRef>
+          <a:effectRef idx="2">
+            <a:schemeClr val="accent1"/>
+          </a:effectRef>
+          <a:fontRef idx="minor">
+            <a:schemeClr val="lt1"/>
+          </a:fontRef>
+        </p:style>
+        <p:txBody>
+          <a:bodyPr rtlCol="0" anchor="ctr"/>
+          <a:lstStyle/>
+          <a:p>
+            <a:pPr algn="ctr"/>
+          </a:p>
+        </p:txBody>
+      </p:sp>
+      <p:sp>
+        <p:nvSpPr>
+          <p:cNvPr id="13" name="TextBox 12"/>
+          <p:cNvSpPr txBox="1"/>
+          <p:nvPr/>
+        </p:nvSpPr>
+        <p:spPr>
+          <a:xfrm>
+            <a:off x="8275320" y="2834640"/>
+            <a:ext cx="3474720" cy="365760"/>
+          </a:xfrm>
+          <a:prstGeom prst="rect">
+            <a:avLst/>
+          </a:prstGeom>
+          <a:noFill/>
+        </p:spPr>
+        <p:txBody>
+          <a:bodyPr wrap="square">
+            <a:spAutoFit/>
+          </a:bodyPr>
+          <a:lstStyle/>
+          <a:p>
+            <a:pPr algn="l"/>
+            <a:r>
+              <a:rPr sz="1200" b="1" i="0">
+                <a:solidFill>
+                  <a:srgbClr val="00C8A0"/>
+                </a:solidFill>
+                <a:latin typeface="Calibri"/>
+              </a:rPr>
+              <a:t>Woensdag: auto wint altijd (droog/regen)</a:t>
+            </a:r>
+          </a:p>
+        </p:txBody>
+      </p:sp>
+      <p:sp>
+        <p:nvSpPr>
+          <p:cNvPr id="14" name="TextBox 13"/>
+          <p:cNvSpPr txBox="1"/>
+          <p:nvPr/>
+        </p:nvSpPr>
+        <p:spPr>
+          <a:xfrm>
+            <a:off x="8275320" y="3227832"/>
+            <a:ext cx="3474720" cy="502920"/>
+          </a:xfrm>
+          <a:prstGeom prst="rect">
+            <a:avLst/>
+          </a:prstGeom>
+          <a:noFill/>
+        </p:spPr>
+        <p:txBody>
+          <a:bodyPr wrap="square">
+            <a:spAutoFit/>
+          </a:bodyPr>
+          <a:lstStyle/>
+          <a:p>
+            <a:pPr algn="l"/>
+            <a:r>
+              <a:rPr sz="1100" b="0" i="0">
+                <a:solidFill>
+                  <a:srgbClr val="8B9DC3"/>
+                </a:solidFill>
+                <a:latin typeface="Calibri"/>
+              </a:rPr>
+              <a:t>55 min auto ruim onder drempel. Enkel storm = thuiswerken.</a:t>
+            </a:r>
+          </a:p>
+        </p:txBody>
+      </p:sp>
+      <p:sp>
+        <p:nvSpPr>
+          <p:cNvPr id="15" name="Rectangle 14"/>
+          <p:cNvSpPr/>
+          <p:nvPr/>
+        </p:nvSpPr>
+        <p:spPr>
+          <a:xfrm>
+            <a:off x="8138160" y="3886200"/>
+            <a:ext cx="3749039" cy="1005840"/>
+          </a:xfrm>
+          <a:prstGeom prst="rect">
+            <a:avLst/>
+          </a:prstGeom>
+          <a:solidFill>
+            <a:srgbClr val="0D1B2A"/>
+          </a:solidFill>
+          <a:ln>
+            <a:noFill/>
+          </a:ln>
+        </p:spPr>
+        <p:style>
+          <a:lnRef idx="1">
+            <a:schemeClr val="accent1"/>
+          </a:lnRef>
+          <a:fillRef idx="3">
+            <a:schemeClr val="accent1"/>
+          </a:fillRef>
+          <a:effectRef idx="2">
+            <a:schemeClr val="accent1"/>
+          </a:effectRef>
+          <a:fontRef idx="minor">
+            <a:schemeClr val="lt1"/>
+          </a:fontRef>
+        </p:style>
+        <p:txBody>
+          <a:bodyPr rtlCol="0" anchor="ctr"/>
+          <a:lstStyle/>
+          <a:p>
+            <a:pPr algn="ctr"/>
+          </a:p>
+        </p:txBody>
+      </p:sp>
+      <p:sp>
+        <p:nvSpPr>
+          <p:cNvPr id="16" name="Rectangle 15"/>
+          <p:cNvSpPr/>
+          <p:nvPr/>
+        </p:nvSpPr>
+        <p:spPr>
+          <a:xfrm>
+            <a:off x="8138160" y="3886200"/>
+            <a:ext cx="54864" cy="1005840"/>
+          </a:xfrm>
+          <a:prstGeom prst="rect">
+            <a:avLst/>
+          </a:prstGeom>
+          <a:solidFill>
+            <a:srgbClr val="363636"/>
+          </a:solidFill>
+          <a:ln>
+            <a:noFill/>
+          </a:ln>
+        </p:spPr>
+        <p:style>
+          <a:lnRef idx="1">
+            <a:schemeClr val="accent1"/>
+          </a:lnRef>
+          <a:fillRef idx="3">
+            <a:schemeClr val="accent1"/>
+          </a:fillRef>
+          <a:effectRef idx="2">
+            <a:schemeClr val="accent1"/>
+          </a:effectRef>
+          <a:fontRef idx="minor">
+            <a:schemeClr val="lt1"/>
+          </a:fontRef>
+        </p:style>
+        <p:txBody>
+          <a:bodyPr rtlCol="0" anchor="ctr"/>
+          <a:lstStyle/>
+          <a:p>
+            <a:pPr algn="ctr"/>
+          </a:p>
+        </p:txBody>
+      </p:sp>
+      <p:sp>
+        <p:nvSpPr>
+          <p:cNvPr id="17" name="TextBox 16"/>
+          <p:cNvSpPr txBox="1"/>
+          <p:nvPr/>
+        </p:nvSpPr>
+        <p:spPr>
+          <a:xfrm>
+            <a:off x="8275320" y="3931920"/>
+            <a:ext cx="3474720" cy="365760"/>
+          </a:xfrm>
+          <a:prstGeom prst="rect">
+            <a:avLst/>
+          </a:prstGeom>
+          <a:noFill/>
+        </p:spPr>
+        <p:txBody>
+          <a:bodyPr wrap="square">
+            <a:spAutoFit/>
+          </a:bodyPr>
+          <a:lstStyle/>
+          <a:p>
+            <a:pPr algn="l"/>
+            <a:r>
+              <a:rPr sz="1200" b="1" i="0">
+                <a:solidFill>
+                  <a:srgbClr val="363636"/>
+                </a:solidFill>
+                <a:latin typeface="Calibri"/>
+              </a:rPr>
+              <a:t>Storm (code rood) = altijd thuiswerken</a:t>
+            </a:r>
+          </a:p>
+        </p:txBody>
+      </p:sp>
+      <p:sp>
+        <p:nvSpPr>
+          <p:cNvPr id="18" name="TextBox 17"/>
+          <p:cNvSpPr txBox="1"/>
+          <p:nvPr/>
+        </p:nvSpPr>
+        <p:spPr>
+          <a:xfrm>
+            <a:off x="8275320" y="4325112"/>
+            <a:ext cx="3474720" cy="502920"/>
+          </a:xfrm>
+          <a:prstGeom prst="rect">
+            <a:avLst/>
+          </a:prstGeom>
+          <a:noFill/>
+        </p:spPr>
+        <p:txBody>
+          <a:bodyPr wrap="square">
+            <a:spAutoFit/>
+          </a:bodyPr>
+          <a:lstStyle/>
+          <a:p>
+            <a:pPr algn="l"/>
+            <a:r>
+              <a:rPr sz="1100" b="0" i="0">
+                <a:solidFill>
+                  <a:srgbClr val="8B9DC3"/>
+                </a:solidFill>
+                <a:latin typeface="Calibri"/>
+              </a:rPr>
+              <a:t>Wind &gt; 45 km/h + regen ≥ 2 mm → risicoscore ≥ 5 → thuiswerken.</a:t>
+            </a:r>
+          </a:p>
+        </p:txBody>
+      </p:sp>
+      <p:sp>
+        <p:nvSpPr>
+          <p:cNvPr id="19" name="Rectangle 18"/>
+          <p:cNvSpPr/>
+          <p:nvPr/>
+        </p:nvSpPr>
+        <p:spPr>
+          <a:xfrm>
+            <a:off x="8138160" y="4983479"/>
+            <a:ext cx="3749039" cy="1005840"/>
+          </a:xfrm>
+          <a:prstGeom prst="rect">
+            <a:avLst/>
+          </a:prstGeom>
+          <a:solidFill>
+            <a:srgbClr val="0D1B2A"/>
+          </a:solidFill>
+          <a:ln>
+            <a:noFill/>
+          </a:ln>
+        </p:spPr>
+        <p:style>
+          <a:lnRef idx="1">
+            <a:schemeClr val="accent1"/>
+          </a:lnRef>
+          <a:fillRef idx="3">
+            <a:schemeClr val="accent1"/>
+          </a:fillRef>
+          <a:effectRef idx="2">
+            <a:schemeClr val="accent1"/>
+          </a:effectRef>
+          <a:fontRef idx="minor">
+            <a:schemeClr val="lt1"/>
+          </a:fontRef>
+        </p:style>
+        <p:txBody>
+          <a:bodyPr rtlCol="0" anchor="ctr"/>
+          <a:lstStyle/>
+          <a:p>
+            <a:pPr algn="ctr"/>
+          </a:p>
+        </p:txBody>
+      </p:sp>
+      <p:sp>
+        <p:nvSpPr>
+          <p:cNvPr id="20" name="Rectangle 19"/>
+          <p:cNvSpPr/>
+          <p:nvPr/>
+        </p:nvSpPr>
+        <p:spPr>
+          <a:xfrm>
+            <a:off x="8138160" y="4983479"/>
+            <a:ext cx="54864" cy="1005840"/>
+          </a:xfrm>
+          <a:prstGeom prst="rect">
+            <a:avLst/>
+          </a:prstGeom>
+          <a:solidFill>
+            <a:srgbClr val="00C8A0"/>
+          </a:solidFill>
+          <a:ln>
+            <a:noFill/>
+          </a:ln>
+        </p:spPr>
+        <p:style>
+          <a:lnRef idx="1">
+            <a:schemeClr val="accent1"/>
+          </a:lnRef>
+          <a:fillRef idx="3">
+            <a:schemeClr val="accent1"/>
+          </a:fillRef>
+          <a:effectRef idx="2">
+            <a:schemeClr val="accent1"/>
+          </a:effectRef>
+          <a:fontRef idx="minor">
+            <a:schemeClr val="lt1"/>
+          </a:fontRef>
+        </p:style>
+        <p:txBody>
+          <a:bodyPr rtlCol="0" anchor="ctr"/>
+          <a:lstStyle/>
+          <a:p>
+            <a:pPr algn="ctr"/>
+          </a:p>
+        </p:txBody>
+      </p:sp>
+      <p:sp>
+        <p:nvSpPr>
+          <p:cNvPr id="21" name="TextBox 20"/>
+          <p:cNvSpPr txBox="1"/>
+          <p:nvPr/>
+        </p:nvSpPr>
+        <p:spPr>
+          <a:xfrm>
+            <a:off x="8275320" y="5029199"/>
+            <a:ext cx="3474720" cy="365760"/>
+          </a:xfrm>
+          <a:prstGeom prst="rect">
+            <a:avLst/>
+          </a:prstGeom>
+          <a:noFill/>
+        </p:spPr>
+        <p:txBody>
+          <a:bodyPr wrap="square">
+            <a:spAutoFit/>
+          </a:bodyPr>
+          <a:lstStyle/>
+          <a:p>
+            <a:pPr algn="l"/>
+            <a:r>
+              <a:rPr sz="1200" b="1" i="0">
+                <a:solidFill>
+                  <a:srgbClr val="00C8A0"/>
+                </a:solidFill>
+                <a:latin typeface="Calibri"/>
+              </a:rPr>
+              <a:t>Zware regen + wind: 73% trein</a:t>
+            </a:r>
+          </a:p>
+        </p:txBody>
+      </p:sp>
+      <p:sp>
+        <p:nvSpPr>
+          <p:cNvPr id="22" name="TextBox 21"/>
+          <p:cNvSpPr txBox="1"/>
+          <p:nvPr/>
+        </p:nvSpPr>
+        <p:spPr>
+          <a:xfrm>
+            <a:off x="8275320" y="5422391"/>
+            <a:ext cx="3474720" cy="502920"/>
+          </a:xfrm>
+          <a:prstGeom prst="rect">
+            <a:avLst/>
+          </a:prstGeom>
+          <a:noFill/>
+        </p:spPr>
+        <p:txBody>
+          <a:bodyPr wrap="square">
+            <a:spAutoFit/>
+          </a:bodyPr>
+          <a:lstStyle/>
+          <a:p>
+            <a:pPr algn="l"/>
+            <a:r>
+              <a:rPr sz="1100" b="0" i="0">
+                <a:solidFill>
+                  <a:srgbClr val="8B9DC3"/>
+                </a:solidFill>
+                <a:latin typeface="Calibri"/>
+              </a:rPr>
+              <a:t>Auto-tijd stijgt door regen (+12%) → overschrijdt drempel op 3 van 5 dagen.</a:t>
+            </a:r>
+          </a:p>
+        </p:txBody>
+      </p:sp>
+      <p:sp>
+        <p:nvSpPr>
+          <p:cNvPr id="23" name="Rectangle 22"/>
+          <p:cNvSpPr/>
+          <p:nvPr/>
+        </p:nvSpPr>
+        <p:spPr>
+          <a:xfrm>
+            <a:off x="8138160" y="6080760"/>
+            <a:ext cx="3749039" cy="457200"/>
           </a:xfrm>
           <a:prstGeom prst="rect">
             <a:avLst/>
@@ -10192,737 +12202,35 @@
       </p:sp>
       <p:sp>
         <p:nvSpPr>
-          <p:cNvPr id="9" name="Rectangle 8"/>
-          <p:cNvSpPr/>
-          <p:nvPr/>
-        </p:nvSpPr>
-        <p:spPr>
-          <a:xfrm>
-            <a:off x="6217920" y="1188720"/>
-            <a:ext cx="64008" cy="1554480"/>
-          </a:xfrm>
-          <a:prstGeom prst="rect">
-            <a:avLst/>
-          </a:prstGeom>
-          <a:solidFill>
-            <a:srgbClr val="00C8A0"/>
-          </a:solidFill>
-          <a:ln>
-            <a:noFill/>
-          </a:ln>
-        </p:spPr>
-        <p:style>
-          <a:lnRef idx="1">
-            <a:schemeClr val="accent1"/>
-          </a:lnRef>
-          <a:fillRef idx="3">
-            <a:schemeClr val="accent1"/>
-          </a:fillRef>
-          <a:effectRef idx="2">
-            <a:schemeClr val="accent1"/>
-          </a:effectRef>
-          <a:fontRef idx="minor">
-            <a:schemeClr val="lt1"/>
-          </a:fontRef>
-        </p:style>
-        <p:txBody>
-          <a:bodyPr rtlCol="0" anchor="ctr"/>
-          <a:lstStyle/>
-          <a:p>
-            <a:pPr algn="ctr"/>
-          </a:p>
-        </p:txBody>
-      </p:sp>
-      <p:sp>
-        <p:nvSpPr>
-          <p:cNvPr id="10" name="TextBox 9"/>
-          <p:cNvSpPr txBox="1"/>
-          <p:nvPr/>
-        </p:nvSpPr>
-        <p:spPr>
-          <a:xfrm>
-            <a:off x="6400800" y="1280160"/>
-            <a:ext cx="5166360" cy="411480"/>
-          </a:xfrm>
-          <a:prstGeom prst="rect">
-            <a:avLst/>
-          </a:prstGeom>
-          <a:noFill/>
-        </p:spPr>
-        <p:txBody>
-          <a:bodyPr wrap="square">
-            <a:spAutoFit/>
-          </a:bodyPr>
-          <a:lstStyle/>
-          <a:p>
-            <a:pPr algn="l"/>
-            <a:r>
-              <a:rPr sz="1400" b="1" i="0">
-                <a:solidFill>
-                  <a:srgbClr val="00C8A0"/>
-                </a:solidFill>
-                <a:latin typeface="Calibri"/>
-              </a:rPr>
-              <a:t>Zware regen: de grootste weerimpact op autoverkeer</a:t>
-            </a:r>
-          </a:p>
-        </p:txBody>
-      </p:sp>
-      <p:sp>
-        <p:nvSpPr>
-          <p:cNvPr id="11" name="TextBox 10"/>
-          <p:cNvSpPr txBox="1"/>
-          <p:nvPr/>
-        </p:nvSpPr>
-        <p:spPr>
-          <a:xfrm>
-            <a:off x="6400800" y="1719072"/>
-            <a:ext cx="5166360" cy="822960"/>
-          </a:xfrm>
-          <a:prstGeom prst="rect">
-            <a:avLst/>
-          </a:prstGeom>
-          <a:noFill/>
-        </p:spPr>
-        <p:txBody>
-          <a:bodyPr wrap="square">
-            <a:spAutoFit/>
-          </a:bodyPr>
-          <a:lstStyle/>
-          <a:p>
-            <a:pPr algn="l"/>
-            <a:r>
-              <a:rPr sz="1200" b="0" i="0">
+          <p:cNvPr id="24" name="TextBox 23"/>
+          <p:cNvSpPr txBox="1"/>
+          <p:nvPr/>
+        </p:nvSpPr>
+        <p:spPr>
+          <a:xfrm>
+            <a:off x="8229600" y="6126480"/>
+            <a:ext cx="3566160" cy="365760"/>
+          </a:xfrm>
+          <a:prstGeom prst="rect">
+            <a:avLst/>
+          </a:prstGeom>
+          <a:noFill/>
+        </p:spPr>
+        <p:txBody>
+          <a:bodyPr wrap="square">
+            <a:spAutoFit/>
+          </a:bodyPr>
+          <a:lstStyle/>
+          <a:p>
+            <a:pPr algn="l"/>
+            <a:r>
+              <a:rPr sz="900" b="0" i="1">
                 <a:solidFill>
                   <a:srgbClr val="8B9DC3"/>
                 </a:solidFill>
                 <a:latin typeface="Calibri"/>
               </a:rPr>
-              <a:t>+12% reistijd bij piekintensiteit ≥ 5 mm/u — lichte regen en rijp slechts +3–4%.</a:t>
-            </a:r>
-          </a:p>
-        </p:txBody>
-      </p:sp>
-      <p:sp>
-        <p:nvSpPr>
-          <p:cNvPr id="12" name="Rectangle 11"/>
-          <p:cNvSpPr/>
-          <p:nvPr/>
-        </p:nvSpPr>
-        <p:spPr>
-          <a:xfrm>
-            <a:off x="411480" y="2926080"/>
-            <a:ext cx="5486400" cy="1554480"/>
-          </a:xfrm>
-          <a:prstGeom prst="rect">
-            <a:avLst/>
-          </a:prstGeom>
-          <a:solidFill>
-            <a:srgbClr val="112D4E"/>
-          </a:solidFill>
-          <a:ln>
-            <a:noFill/>
-          </a:ln>
-        </p:spPr>
-        <p:style>
-          <a:lnRef idx="1">
-            <a:schemeClr val="accent1"/>
-          </a:lnRef>
-          <a:fillRef idx="3">
-            <a:schemeClr val="accent1"/>
-          </a:fillRef>
-          <a:effectRef idx="2">
-            <a:schemeClr val="accent1"/>
-          </a:effectRef>
-          <a:fontRef idx="minor">
-            <a:schemeClr val="lt1"/>
-          </a:fontRef>
-        </p:style>
-        <p:txBody>
-          <a:bodyPr rtlCol="0" anchor="ctr"/>
-          <a:lstStyle/>
-          <a:p>
-            <a:pPr algn="ctr"/>
-          </a:p>
-        </p:txBody>
-      </p:sp>
-      <p:sp>
-        <p:nvSpPr>
-          <p:cNvPr id="13" name="Rectangle 12"/>
-          <p:cNvSpPr/>
-          <p:nvPr/>
-        </p:nvSpPr>
-        <p:spPr>
-          <a:xfrm>
-            <a:off x="411480" y="2926080"/>
-            <a:ext cx="64008" cy="1554480"/>
-          </a:xfrm>
-          <a:prstGeom prst="rect">
-            <a:avLst/>
-          </a:prstGeom>
-          <a:solidFill>
-            <a:srgbClr val="FF6B35"/>
-          </a:solidFill>
-          <a:ln>
-            <a:noFill/>
-          </a:ln>
-        </p:spPr>
-        <p:style>
-          <a:lnRef idx="1">
-            <a:schemeClr val="accent1"/>
-          </a:lnRef>
-          <a:fillRef idx="3">
-            <a:schemeClr val="accent1"/>
-          </a:fillRef>
-          <a:effectRef idx="2">
-            <a:schemeClr val="accent1"/>
-          </a:effectRef>
-          <a:fontRef idx="minor">
-            <a:schemeClr val="lt1"/>
-          </a:fontRef>
-        </p:style>
-        <p:txBody>
-          <a:bodyPr rtlCol="0" anchor="ctr"/>
-          <a:lstStyle/>
-          <a:p>
-            <a:pPr algn="ctr"/>
-          </a:p>
-        </p:txBody>
-      </p:sp>
-      <p:sp>
-        <p:nvSpPr>
-          <p:cNvPr id="14" name="TextBox 13"/>
-          <p:cNvSpPr txBox="1"/>
-          <p:nvPr/>
-        </p:nvSpPr>
-        <p:spPr>
-          <a:xfrm>
-            <a:off x="594360" y="3017520"/>
-            <a:ext cx="5166360" cy="411480"/>
-          </a:xfrm>
-          <a:prstGeom prst="rect">
-            <a:avLst/>
-          </a:prstGeom>
-          <a:noFill/>
-        </p:spPr>
-        <p:txBody>
-          <a:bodyPr wrap="square">
-            <a:spAutoFit/>
-          </a:bodyPr>
-          <a:lstStyle/>
-          <a:p>
-            <a:pPr algn="l"/>
-            <a:r>
-              <a:rPr sz="1400" b="1" i="0">
-                <a:solidFill>
-                  <a:srgbClr val="FF6B35"/>
-                </a:solidFill>
-                <a:latin typeface="Calibri"/>
-              </a:rPr>
-              <a:t>Weer is NIET afhankelijk van weekdag</a:t>
-            </a:r>
-          </a:p>
-        </p:txBody>
-      </p:sp>
-      <p:sp>
-        <p:nvSpPr>
-          <p:cNvPr id="15" name="TextBox 14"/>
-          <p:cNvSpPr txBox="1"/>
-          <p:nvPr/>
-        </p:nvSpPr>
-        <p:spPr>
-          <a:xfrm>
-            <a:off x="594360" y="3456432"/>
-            <a:ext cx="5166360" cy="822960"/>
-          </a:xfrm>
-          <a:prstGeom prst="rect">
-            <a:avLst/>
-          </a:prstGeom>
-          <a:noFill/>
-        </p:spPr>
-        <p:txBody>
-          <a:bodyPr wrap="square">
-            <a:spAutoFit/>
-          </a:bodyPr>
-          <a:lstStyle/>
-          <a:p>
-            <a:pPr algn="l"/>
-            <a:r>
-              <a:rPr sz="1200" b="0" i="0">
-                <a:solidFill>
-                  <a:srgbClr val="8B9DC3"/>
-                </a:solidFill>
-                <a:latin typeface="Calibri"/>
-              </a:rPr>
-              <a:t>Maandag is niet natter dan vrijdag. Verkeerspatronen = mensengedrag.</a:t>
-            </a:r>
-          </a:p>
-        </p:txBody>
-      </p:sp>
-      <p:sp>
-        <p:nvSpPr>
-          <p:cNvPr id="16" name="Rectangle 15"/>
-          <p:cNvSpPr/>
-          <p:nvPr/>
-        </p:nvSpPr>
-        <p:spPr>
-          <a:xfrm>
-            <a:off x="6217920" y="2926080"/>
-            <a:ext cx="5486400" cy="1554480"/>
-          </a:xfrm>
-          <a:prstGeom prst="rect">
-            <a:avLst/>
-          </a:prstGeom>
-          <a:solidFill>
-            <a:srgbClr val="112D4E"/>
-          </a:solidFill>
-          <a:ln>
-            <a:noFill/>
-          </a:ln>
-        </p:spPr>
-        <p:style>
-          <a:lnRef idx="1">
-            <a:schemeClr val="accent1"/>
-          </a:lnRef>
-          <a:fillRef idx="3">
-            <a:schemeClr val="accent1"/>
-          </a:fillRef>
-          <a:effectRef idx="2">
-            <a:schemeClr val="accent1"/>
-          </a:effectRef>
-          <a:fontRef idx="minor">
-            <a:schemeClr val="lt1"/>
-          </a:fontRef>
-        </p:style>
-        <p:txBody>
-          <a:bodyPr rtlCol="0" anchor="ctr"/>
-          <a:lstStyle/>
-          <a:p>
-            <a:pPr algn="ctr"/>
-          </a:p>
-        </p:txBody>
-      </p:sp>
-      <p:sp>
-        <p:nvSpPr>
-          <p:cNvPr id="17" name="Rectangle 16"/>
-          <p:cNvSpPr/>
-          <p:nvPr/>
-        </p:nvSpPr>
-        <p:spPr>
-          <a:xfrm>
-            <a:off x="6217920" y="2926080"/>
-            <a:ext cx="64008" cy="1554480"/>
-          </a:xfrm>
-          <a:prstGeom prst="rect">
-            <a:avLst/>
-          </a:prstGeom>
-          <a:solidFill>
-            <a:srgbClr val="A060FF"/>
-          </a:solidFill>
-          <a:ln>
-            <a:noFill/>
-          </a:ln>
-        </p:spPr>
-        <p:style>
-          <a:lnRef idx="1">
-            <a:schemeClr val="accent1"/>
-          </a:lnRef>
-          <a:fillRef idx="3">
-            <a:schemeClr val="accent1"/>
-          </a:fillRef>
-          <a:effectRef idx="2">
-            <a:schemeClr val="accent1"/>
-          </a:effectRef>
-          <a:fontRef idx="minor">
-            <a:schemeClr val="lt1"/>
-          </a:fontRef>
-        </p:style>
-        <p:txBody>
-          <a:bodyPr rtlCol="0" anchor="ctr"/>
-          <a:lstStyle/>
-          <a:p>
-            <a:pPr algn="ctr"/>
-          </a:p>
-        </p:txBody>
-      </p:sp>
-      <p:sp>
-        <p:nvSpPr>
-          <p:cNvPr id="18" name="TextBox 17"/>
-          <p:cNvSpPr txBox="1"/>
-          <p:nvPr/>
-        </p:nvSpPr>
-        <p:spPr>
-          <a:xfrm>
-            <a:off x="6400800" y="3017520"/>
-            <a:ext cx="5166360" cy="411480"/>
-          </a:xfrm>
-          <a:prstGeom prst="rect">
-            <a:avLst/>
-          </a:prstGeom>
-          <a:noFill/>
-        </p:spPr>
-        <p:txBody>
-          <a:bodyPr wrap="square">
-            <a:spAutoFit/>
-          </a:bodyPr>
-          <a:lstStyle/>
-          <a:p>
-            <a:pPr algn="l"/>
-            <a:r>
-              <a:rPr sz="1400" b="1" i="0">
-                <a:solidFill>
-                  <a:srgbClr val="A060FF"/>
-                </a:solidFill>
-                <a:latin typeface="Calibri"/>
-              </a:rPr>
-              <a:t>Trein is concurrentieel</a:t>
-            </a:r>
-          </a:p>
-        </p:txBody>
-      </p:sp>
-      <p:sp>
-        <p:nvSpPr>
-          <p:cNvPr id="19" name="TextBox 18"/>
-          <p:cNvSpPr txBox="1"/>
-          <p:nvPr/>
-        </p:nvSpPr>
-        <p:spPr>
-          <a:xfrm>
-            <a:off x="6400800" y="3456432"/>
-            <a:ext cx="5166360" cy="822960"/>
-          </a:xfrm>
-          <a:prstGeom prst="rect">
-            <a:avLst/>
-          </a:prstGeom>
-          <a:noFill/>
-        </p:spPr>
-        <p:txBody>
-          <a:bodyPr wrap="square">
-            <a:spAutoFit/>
-          </a:bodyPr>
-          <a:lstStyle/>
-          <a:p>
-            <a:pPr algn="l"/>
-            <a:r>
-              <a:rPr sz="1200" b="0" i="0">
-                <a:solidFill>
-                  <a:srgbClr val="8B9DC3"/>
-                </a:solidFill>
-                <a:latin typeface="Calibri"/>
-              </a:rPr>
-              <a:t>Op een significant deel werkdagen is de trein sneller dan de auto (zelfs met 10 min buffer).</a:t>
-            </a:r>
-          </a:p>
-        </p:txBody>
-      </p:sp>
-      <p:sp>
-        <p:nvSpPr>
-          <p:cNvPr id="20" name="Rectangle 19"/>
-          <p:cNvSpPr/>
-          <p:nvPr/>
-        </p:nvSpPr>
-        <p:spPr>
-          <a:xfrm>
-            <a:off x="411480" y="4663440"/>
-            <a:ext cx="5486400" cy="1554480"/>
-          </a:xfrm>
-          <a:prstGeom prst="rect">
-            <a:avLst/>
-          </a:prstGeom>
-          <a:solidFill>
-            <a:srgbClr val="112D4E"/>
-          </a:solidFill>
-          <a:ln>
-            <a:noFill/>
-          </a:ln>
-        </p:spPr>
-        <p:style>
-          <a:lnRef idx="1">
-            <a:schemeClr val="accent1"/>
-          </a:lnRef>
-          <a:fillRef idx="3">
-            <a:schemeClr val="accent1"/>
-          </a:fillRef>
-          <a:effectRef idx="2">
-            <a:schemeClr val="accent1"/>
-          </a:effectRef>
-          <a:fontRef idx="minor">
-            <a:schemeClr val="lt1"/>
-          </a:fontRef>
-        </p:style>
-        <p:txBody>
-          <a:bodyPr rtlCol="0" anchor="ctr"/>
-          <a:lstStyle/>
-          <a:p>
-            <a:pPr algn="ctr"/>
-          </a:p>
-        </p:txBody>
-      </p:sp>
-      <p:sp>
-        <p:nvSpPr>
-          <p:cNvPr id="21" name="Rectangle 20"/>
-          <p:cNvSpPr/>
-          <p:nvPr/>
-        </p:nvSpPr>
-        <p:spPr>
-          <a:xfrm>
-            <a:off x="411480" y="4663440"/>
-            <a:ext cx="64008" cy="1554480"/>
-          </a:xfrm>
-          <a:prstGeom prst="rect">
-            <a:avLst/>
-          </a:prstGeom>
-          <a:solidFill>
-            <a:srgbClr val="0099FF"/>
-          </a:solidFill>
-          <a:ln>
-            <a:noFill/>
-          </a:ln>
-        </p:spPr>
-        <p:style>
-          <a:lnRef idx="1">
-            <a:schemeClr val="accent1"/>
-          </a:lnRef>
-          <a:fillRef idx="3">
-            <a:schemeClr val="accent1"/>
-          </a:fillRef>
-          <a:effectRef idx="2">
-            <a:schemeClr val="accent1"/>
-          </a:effectRef>
-          <a:fontRef idx="minor">
-            <a:schemeClr val="lt1"/>
-          </a:fontRef>
-        </p:style>
-        <p:txBody>
-          <a:bodyPr rtlCol="0" anchor="ctr"/>
-          <a:lstStyle/>
-          <a:p>
-            <a:pPr algn="ctr"/>
-          </a:p>
-        </p:txBody>
-      </p:sp>
-      <p:sp>
-        <p:nvSpPr>
-          <p:cNvPr id="22" name="TextBox 21"/>
-          <p:cNvSpPr txBox="1"/>
-          <p:nvPr/>
-        </p:nvSpPr>
-        <p:spPr>
-          <a:xfrm>
-            <a:off x="594360" y="4754880"/>
-            <a:ext cx="5166360" cy="411480"/>
-          </a:xfrm>
-          <a:prstGeom prst="rect">
-            <a:avLst/>
-          </a:prstGeom>
-          <a:noFill/>
-        </p:spPr>
-        <p:txBody>
-          <a:bodyPr wrap="square">
-            <a:spAutoFit/>
-          </a:bodyPr>
-          <a:lstStyle/>
-          <a:p>
-            <a:pPr algn="l"/>
-            <a:r>
-              <a:rPr sz="1400" b="1" i="0">
-                <a:solidFill>
-                  <a:srgbClr val="0099FF"/>
-                </a:solidFill>
-                <a:latin typeface="Calibri"/>
-              </a:rPr>
-              <a:t>Januari–februari &amp; nov–december = hoogste risicomaanden</a:t>
-            </a:r>
-          </a:p>
-        </p:txBody>
-      </p:sp>
-      <p:sp>
-        <p:nvSpPr>
-          <p:cNvPr id="23" name="TextBox 22"/>
-          <p:cNvSpPr txBox="1"/>
-          <p:nvPr/>
-        </p:nvSpPr>
-        <p:spPr>
-          <a:xfrm>
-            <a:off x="594360" y="5193792"/>
-            <a:ext cx="5166360" cy="822960"/>
-          </a:xfrm>
-          <a:prstGeom prst="rect">
-            <a:avLst/>
-          </a:prstGeom>
-          <a:noFill/>
-        </p:spPr>
-        <p:txBody>
-          <a:bodyPr wrap="square">
-            <a:spAutoFit/>
-          </a:bodyPr>
-          <a:lstStyle/>
-          <a:p>
-            <a:pPr algn="l"/>
-            <a:r>
-              <a:rPr sz="1200" b="0" i="0">
-                <a:solidFill>
-                  <a:srgbClr val="8B9DC3"/>
-                </a:solidFill>
-                <a:latin typeface="Calibri"/>
-              </a:rPr>
-              <a:t>Beide vervoersmodi zijn tegelijk belast bij slechte weersomstandigheden.</a:t>
-            </a:r>
-          </a:p>
-        </p:txBody>
-      </p:sp>
-      <p:sp>
-        <p:nvSpPr>
-          <p:cNvPr id="24" name="Rectangle 23"/>
-          <p:cNvSpPr/>
-          <p:nvPr/>
-        </p:nvSpPr>
-        <p:spPr>
-          <a:xfrm>
-            <a:off x="6217920" y="4663440"/>
-            <a:ext cx="5486400" cy="1554480"/>
-          </a:xfrm>
-          <a:prstGeom prst="rect">
-            <a:avLst/>
-          </a:prstGeom>
-          <a:solidFill>
-            <a:srgbClr val="112D4E"/>
-          </a:solidFill>
-          <a:ln>
-            <a:noFill/>
-          </a:ln>
-        </p:spPr>
-        <p:style>
-          <a:lnRef idx="1">
-            <a:schemeClr val="accent1"/>
-          </a:lnRef>
-          <a:fillRef idx="3">
-            <a:schemeClr val="accent1"/>
-          </a:fillRef>
-          <a:effectRef idx="2">
-            <a:schemeClr val="accent1"/>
-          </a:effectRef>
-          <a:fontRef idx="minor">
-            <a:schemeClr val="lt1"/>
-          </a:fontRef>
-        </p:style>
-        <p:txBody>
-          <a:bodyPr rtlCol="0" anchor="ctr"/>
-          <a:lstStyle/>
-          <a:p>
-            <a:pPr algn="ctr"/>
-          </a:p>
-        </p:txBody>
-      </p:sp>
-      <p:sp>
-        <p:nvSpPr>
-          <p:cNvPr id="25" name="Rectangle 24"/>
-          <p:cNvSpPr/>
-          <p:nvPr/>
-        </p:nvSpPr>
-        <p:spPr>
-          <a:xfrm>
-            <a:off x="6217920" y="4663440"/>
-            <a:ext cx="64008" cy="1554480"/>
-          </a:xfrm>
-          <a:prstGeom prst="rect">
-            <a:avLst/>
-          </a:prstGeom>
-          <a:solidFill>
-            <a:srgbClr val="00C8A0"/>
-          </a:solidFill>
-          <a:ln>
-            <a:noFill/>
-          </a:ln>
-        </p:spPr>
-        <p:style>
-          <a:lnRef idx="1">
-            <a:schemeClr val="accent1"/>
-          </a:lnRef>
-          <a:fillRef idx="3">
-            <a:schemeClr val="accent1"/>
-          </a:fillRef>
-          <a:effectRef idx="2">
-            <a:schemeClr val="accent1"/>
-          </a:effectRef>
-          <a:fontRef idx="minor">
-            <a:schemeClr val="lt1"/>
-          </a:fontRef>
-        </p:style>
-        <p:txBody>
-          <a:bodyPr rtlCol="0" anchor="ctr"/>
-          <a:lstStyle/>
-          <a:p>
-            <a:pPr algn="ctr"/>
-          </a:p>
-        </p:txBody>
-      </p:sp>
-      <p:sp>
-        <p:nvSpPr>
-          <p:cNvPr id="26" name="TextBox 25"/>
-          <p:cNvSpPr txBox="1"/>
-          <p:nvPr/>
-        </p:nvSpPr>
-        <p:spPr>
-          <a:xfrm>
-            <a:off x="6400800" y="4754880"/>
-            <a:ext cx="5166360" cy="411480"/>
-          </a:xfrm>
-          <a:prstGeom prst="rect">
-            <a:avLst/>
-          </a:prstGeom>
-          <a:noFill/>
-        </p:spPr>
-        <p:txBody>
-          <a:bodyPr wrap="square">
-            <a:spAutoFit/>
-          </a:bodyPr>
-          <a:lstStyle/>
-          <a:p>
-            <a:pPr algn="l"/>
-            <a:r>
-              <a:rPr sz="1400" b="1" i="0">
-                <a:solidFill>
-                  <a:srgbClr val="00C8A0"/>
-                </a:solidFill>
-                <a:latin typeface="Calibri"/>
-              </a:rPr>
-              <a:t>Juiste route: E17 → R1 → E19 via Antwerpen</a:t>
-            </a:r>
-          </a:p>
-        </p:txBody>
-      </p:sp>
-      <p:sp>
-        <p:nvSpPr>
-          <p:cNvPr id="27" name="TextBox 26"/>
-          <p:cNvSpPr txBox="1"/>
-          <p:nvPr/>
-        </p:nvSpPr>
-        <p:spPr>
-          <a:xfrm>
-            <a:off x="6400800" y="5193792"/>
-            <a:ext cx="5166360" cy="822960"/>
-          </a:xfrm>
-          <a:prstGeom prst="rect">
-            <a:avLst/>
-          </a:prstGeom>
-          <a:noFill/>
-        </p:spPr>
-        <p:txBody>
-          <a:bodyPr wrap="square">
-            <a:spAutoFit/>
-          </a:bodyPr>
-          <a:lstStyle/>
-          <a:p>
-            <a:pPr algn="l"/>
-            <a:r>
-              <a:rPr sz="1200" b="0" i="0">
-                <a:solidFill>
-                  <a:srgbClr val="8B9DC3"/>
-                </a:solidFill>
-                <a:latin typeface="Calibri"/>
-              </a:rPr>
-              <a:t>Niet de directe E40. Bevestigd door VC-gegevens die overeenkomen met GPS-aanbevelingen.</a:t>
+              <a:t>predict_scenarios_extended.py  ·  5 dagen × 12 maanden × 8 weercondities</a:t>
             </a:r>
           </a:p>
         </p:txBody>
@@ -11678,14 +12986,116 @@
       <p:grpSpPr/>
       <p:sp>
         <p:nvSpPr>
-          <p:cNvPr id="2" name="Rectangle 1"/>
+          <p:cNvPr id="2" name="TextBox 1"/>
+          <p:cNvSpPr txBox="1"/>
+          <p:nvPr/>
+        </p:nvSpPr>
+        <p:spPr>
+          <a:xfrm>
+            <a:off x="411480" y="256032"/>
+            <a:ext cx="11338560" cy="594360"/>
+          </a:xfrm>
+          <a:prstGeom prst="rect">
+            <a:avLst/>
+          </a:prstGeom>
+          <a:noFill/>
+        </p:spPr>
+        <p:txBody>
+          <a:bodyPr wrap="square">
+            <a:spAutoFit/>
+          </a:bodyPr>
+          <a:lstStyle/>
+          <a:p>
+            <a:pPr algn="l"/>
+            <a:r>
+              <a:rPr sz="3000" b="1" i="0">
+                <a:solidFill>
+                  <a:srgbClr val="00C8A0"/>
+                </a:solidFill>
+                <a:latin typeface="Calibri"/>
+              </a:rPr>
+              <a:t>50 Scenario Voorspellingen</a:t>
+            </a:r>
+          </a:p>
+        </p:txBody>
+      </p:sp>
+      <p:sp>
+        <p:nvSpPr>
+          <p:cNvPr id="3" name="Rectangle 2"/>
           <p:cNvSpPr/>
           <p:nvPr/>
         </p:nvSpPr>
         <p:spPr>
           <a:xfrm>
-            <a:off x="0" y="0"/>
-            <a:ext cx="12188952" cy="1920240"/>
+            <a:off x="365760" y="822960"/>
+            <a:ext cx="11430000" cy="25400"/>
+          </a:xfrm>
+          <a:prstGeom prst="rect">
+            <a:avLst/>
+          </a:prstGeom>
+          <a:solidFill>
+            <a:srgbClr val="00C8A0"/>
+          </a:solidFill>
+          <a:ln>
+            <a:noFill/>
+          </a:ln>
+        </p:spPr>
+        <p:style>
+          <a:lnRef idx="1">
+            <a:schemeClr val="accent1"/>
+          </a:lnRef>
+          <a:fillRef idx="3">
+            <a:schemeClr val="accent1"/>
+          </a:fillRef>
+          <a:effectRef idx="2">
+            <a:schemeClr val="accent1"/>
+          </a:effectRef>
+          <a:fontRef idx="minor">
+            <a:schemeClr val="lt1"/>
+          </a:fontRef>
+        </p:style>
+        <p:txBody>
+          <a:bodyPr rtlCol="0" anchor="ctr"/>
+          <a:lstStyle/>
+          <a:p>
+            <a:pPr algn="ctr"/>
+          </a:p>
+        </p:txBody>
+      </p:sp>
+      <p:pic>
+        <p:nvPicPr>
+          <p:cNvPr id="4" name="Picture 3" descr="scenario_predictions.png"/>
+          <p:cNvPicPr>
+            <a:picLocks noChangeAspect="1"/>
+          </p:cNvPicPr>
+          <p:nvPr/>
+        </p:nvPicPr>
+        <p:blipFill>
+          <a:blip r:embed="rId2"/>
+          <a:stretch>
+            <a:fillRect/>
+          </a:stretch>
+        </p:blipFill>
+        <p:spPr>
+          <a:xfrm>
+            <a:off x="411480" y="1051560"/>
+            <a:ext cx="8046720" cy="5577840"/>
+          </a:xfrm>
+          <a:prstGeom prst="rect">
+            <a:avLst/>
+          </a:prstGeom>
+        </p:spPr>
+      </p:pic>
+      <p:sp>
+        <p:nvSpPr>
+          <p:cNvPr id="5" name="Rectangle 4"/>
+          <p:cNvSpPr/>
+          <p:nvPr/>
+        </p:nvSpPr>
+        <p:spPr>
+          <a:xfrm>
+            <a:off x="8641080" y="1051560"/>
+            <a:ext cx="3291840" cy="5577840"/>
           </a:xfrm>
           <a:prstGeom prst="rect">
             <a:avLst/>
@@ -11721,20 +13131,206 @@
       </p:sp>
       <p:sp>
         <p:nvSpPr>
-          <p:cNvPr id="3" name="Rectangle 2"/>
+          <p:cNvPr id="6" name="TextBox 5"/>
+          <p:cNvSpPr txBox="1"/>
+          <p:nvPr/>
+        </p:nvSpPr>
+        <p:spPr>
+          <a:xfrm>
+            <a:off x="8823960" y="1188720"/>
+            <a:ext cx="3017520" cy="320040"/>
+          </a:xfrm>
+          <a:prstGeom prst="rect">
+            <a:avLst/>
+          </a:prstGeom>
+          <a:noFill/>
+        </p:spPr>
+        <p:txBody>
+          <a:bodyPr wrap="square">
+            <a:spAutoFit/>
+          </a:bodyPr>
+          <a:lstStyle/>
+          <a:p>
+            <a:pPr algn="l"/>
+            <a:r>
+              <a:rPr sz="1100" b="1" i="0">
+                <a:solidFill>
+                  <a:srgbClr val="00C8A0"/>
+                </a:solidFill>
+                <a:latin typeface="Calibri"/>
+              </a:rPr>
+              <a:t>SCENARIO DEKKING</a:t>
+            </a:r>
+          </a:p>
+        </p:txBody>
+      </p:sp>
+      <p:sp>
+        <p:nvSpPr>
+          <p:cNvPr id="7" name="TextBox 6"/>
+          <p:cNvSpPr txBox="1"/>
+          <p:nvPr/>
+        </p:nvSpPr>
+        <p:spPr>
+          <a:xfrm>
+            <a:off x="8823960" y="1554480"/>
+            <a:ext cx="3017520" cy="3200400"/>
+          </a:xfrm>
+          <a:prstGeom prst="rect">
+            <a:avLst/>
+          </a:prstGeom>
+          <a:noFill/>
+        </p:spPr>
+        <p:txBody>
+          <a:bodyPr wrap="square">
+            <a:spAutoFit/>
+          </a:bodyPr>
+          <a:lstStyle/>
+          <a:p>
+            <a:pPr algn="l">
+              <a:spcBef>
+                <a:spcPts val="400"/>
+              </a:spcBef>
+            </a:pPr>
+            <a:r>
+              <a:rPr sz="1200">
+                <a:solidFill>
+                  <a:srgbClr val="FFFFFF"/>
+                </a:solidFill>
+                <a:latin typeface="Calibri"/>
+              </a:rPr>
+              <a:t>›  Alle weekdagen (ma–vr)</a:t>
+            </a:r>
+          </a:p>
+          <a:p>
+            <a:pPr algn="l">
+              <a:spcBef>
+                <a:spcPts val="400"/>
+              </a:spcBef>
+            </a:pPr>
+            <a:r>
+              <a:rPr sz="1200">
+                <a:solidFill>
+                  <a:srgbClr val="FFFFFF"/>
+                </a:solidFill>
+                <a:latin typeface="Calibri"/>
+              </a:rPr>
+              <a:t>›  Mooi weer &amp; regen</a:t>
+            </a:r>
+          </a:p>
+          <a:p>
+            <a:pPr algn="l">
+              <a:spcBef>
+                <a:spcPts val="400"/>
+              </a:spcBef>
+            </a:pPr>
+            <a:r>
+              <a:rPr sz="1200">
+                <a:solidFill>
+                  <a:srgbClr val="FFFFFF"/>
+                </a:solidFill>
+                <a:latin typeface="Calibri"/>
+              </a:rPr>
+              <a:t>›  Zwaar onweer &amp; sneeuw</a:t>
+            </a:r>
+          </a:p>
+          <a:p>
+            <a:pPr algn="l">
+              <a:spcBef>
+                <a:spcPts val="400"/>
+              </a:spcBef>
+            </a:pPr>
+            <a:r>
+              <a:rPr sz="1200">
+                <a:solidFill>
+                  <a:srgbClr val="FFFFFF"/>
+                </a:solidFill>
+                <a:latin typeface="Calibri"/>
+              </a:rPr>
+              <a:t>›  IJzel (vorst zonder sneeuw)</a:t>
+            </a:r>
+          </a:p>
+          <a:p>
+            <a:pPr algn="l">
+              <a:spcBef>
+                <a:spcPts val="400"/>
+              </a:spcBef>
+            </a:pPr>
+            <a:r>
+              <a:rPr sz="1200">
+                <a:solidFill>
+                  <a:srgbClr val="FFFFFF"/>
+                </a:solidFill>
+                <a:latin typeface="Calibri"/>
+              </a:rPr>
+              <a:t>›  Schoolvakantie vs. schooltijd</a:t>
+            </a:r>
+          </a:p>
+          <a:p>
+            <a:pPr algn="l">
+              <a:spcBef>
+                <a:spcPts val="400"/>
+              </a:spcBef>
+            </a:pPr>
+            <a:r>
+              <a:rPr sz="1200">
+                <a:solidFill>
+                  <a:srgbClr val="FFFFFF"/>
+                </a:solidFill>
+                <a:latin typeface="Calibri"/>
+              </a:rPr>
+              <a:t>›  Feestdag (geen pendel)</a:t>
+            </a:r>
+          </a:p>
+          <a:p>
+            <a:pPr algn="l">
+              <a:spcBef>
+                <a:spcPts val="400"/>
+              </a:spcBef>
+            </a:pPr>
+            <a:r>
+              <a:rPr sz="1200">
+                <a:solidFill>
+                  <a:srgbClr val="FFFFFF"/>
+                </a:solidFill>
+                <a:latin typeface="Calibri"/>
+              </a:rPr>
+              <a:t>›  Vroege zomer, late herfst</a:t>
+            </a:r>
+          </a:p>
+          <a:p>
+            <a:pPr algn="l">
+              <a:spcBef>
+                <a:spcPts val="400"/>
+              </a:spcBef>
+            </a:pPr>
+            <a:r>
+              <a:rPr sz="1200">
+                <a:solidFill>
+                  <a:srgbClr val="FFFFFF"/>
+                </a:solidFill>
+                <a:latin typeface="Calibri"/>
+              </a:rPr>
+              <a:t>›  Combinaties: ma + zware regen</a:t>
+            </a:r>
+          </a:p>
+        </p:txBody>
+      </p:sp>
+      <p:sp>
+        <p:nvSpPr>
+          <p:cNvPr id="8" name="Rectangle 7"/>
           <p:cNvSpPr/>
           <p:nvPr/>
         </p:nvSpPr>
         <p:spPr>
           <a:xfrm>
-            <a:off x="0" y="1874519"/>
-            <a:ext cx="12188952" cy="73152"/>
+            <a:off x="8641080" y="4937760"/>
+            <a:ext cx="3291840" cy="45720"/>
           </a:xfrm>
           <a:prstGeom prst="rect">
             <a:avLst/>
           </a:prstGeom>
           <a:solidFill>
-            <a:srgbClr val="00C8A0"/>
+            <a:srgbClr val="FF6B35"/>
           </a:solidFill>
           <a:ln>
             <a:noFill/>
@@ -11764,834 +13360,72 @@
       </p:sp>
       <p:sp>
         <p:nvSpPr>
-          <p:cNvPr id="4" name="TextBox 3"/>
-          <p:cNvSpPr txBox="1"/>
-          <p:nvPr/>
-        </p:nvSpPr>
-        <p:spPr>
-          <a:xfrm>
-            <a:off x="411480" y="274320"/>
-            <a:ext cx="11338560" cy="548640"/>
-          </a:xfrm>
-          <a:prstGeom prst="rect">
-            <a:avLst/>
-          </a:prstGeom>
-          <a:noFill/>
-        </p:spPr>
-        <p:txBody>
-          <a:bodyPr wrap="square">
-            <a:spAutoFit/>
-          </a:bodyPr>
-          <a:lstStyle/>
-          <a:p>
-            <a:pPr algn="l"/>
-            <a:r>
-              <a:rPr sz="1600" b="1" i="0">
-                <a:solidFill>
-                  <a:srgbClr val="00C8A0"/>
-                </a:solidFill>
-                <a:latin typeface="Calibri"/>
-              </a:rPr>
-              <a:t>LIVE DEMO</a:t>
-            </a:r>
-          </a:p>
-        </p:txBody>
-      </p:sp>
-      <p:sp>
-        <p:nvSpPr>
-          <p:cNvPr id="5" name="TextBox 4"/>
-          <p:cNvSpPr txBox="1"/>
-          <p:nvPr/>
-        </p:nvSpPr>
-        <p:spPr>
-          <a:xfrm>
-            <a:off x="411480" y="777240"/>
-            <a:ext cx="11338560" cy="731520"/>
-          </a:xfrm>
-          <a:prstGeom prst="rect">
-            <a:avLst/>
-          </a:prstGeom>
-          <a:noFill/>
-        </p:spPr>
-        <p:txBody>
-          <a:bodyPr wrap="square">
-            <a:spAutoFit/>
-          </a:bodyPr>
-          <a:lstStyle/>
-          <a:p>
-            <a:pPr algn="l"/>
-            <a:r>
-              <a:rPr sz="3400" b="1" i="0">
+          <p:cNvPr id="9" name="TextBox 8"/>
+          <p:cNvSpPr txBox="1"/>
+          <p:nvPr/>
+        </p:nvSpPr>
+        <p:spPr>
+          <a:xfrm>
+            <a:off x="8823960" y="5029200"/>
+            <a:ext cx="3017520" cy="320040"/>
+          </a:xfrm>
+          <a:prstGeom prst="rect">
+            <a:avLst/>
+          </a:prstGeom>
+          <a:noFill/>
+        </p:spPr>
+        <p:txBody>
+          <a:bodyPr wrap="square">
+            <a:spAutoFit/>
+          </a:bodyPr>
+          <a:lstStyle/>
+          <a:p>
+            <a:pPr algn="l"/>
+            <a:r>
+              <a:rPr sz="1100" b="1" i="0">
+                <a:solidFill>
+                  <a:srgbClr val="FF6B35"/>
+                </a:solidFill>
+                <a:latin typeface="Calibri"/>
+              </a:rPr>
+              <a:t>THUISWERK-TRIGGER</a:t>
+            </a:r>
+          </a:p>
+        </p:txBody>
+      </p:sp>
+      <p:sp>
+        <p:nvSpPr>
+          <p:cNvPr id="10" name="TextBox 9"/>
+          <p:cNvSpPr txBox="1"/>
+          <p:nvPr/>
+        </p:nvSpPr>
+        <p:spPr>
+          <a:xfrm>
+            <a:off x="8823960" y="5394960"/>
+            <a:ext cx="3017520" cy="914400"/>
+          </a:xfrm>
+          <a:prstGeom prst="rect">
+            <a:avLst/>
+          </a:prstGeom>
+          <a:noFill/>
+        </p:spPr>
+        <p:txBody>
+          <a:bodyPr wrap="square">
+            <a:spAutoFit/>
+          </a:bodyPr>
+          <a:lstStyle/>
+          <a:p>
+            <a:pPr algn="l"/>
+            <a:r>
+              <a:rPr sz="1200" b="0" i="0">
                 <a:solidFill>
                   <a:srgbClr val="FFFFFF"/>
                 </a:solidFill>
                 <a:latin typeface="Calibri"/>
               </a:rPr>
-              <a:t>gent_mechelen_commute_risk_forecast.ipynb</a:t>
-            </a:r>
-          </a:p>
-        </p:txBody>
-      </p:sp>
-      <p:sp>
-        <p:nvSpPr>
-          <p:cNvPr id="6" name="Rectangle 5"/>
-          <p:cNvSpPr/>
-          <p:nvPr/>
-        </p:nvSpPr>
-        <p:spPr>
-          <a:xfrm>
-            <a:off x="411480" y="2148840"/>
-            <a:ext cx="5486400" cy="1920240"/>
-          </a:xfrm>
-          <a:prstGeom prst="rect">
-            <a:avLst/>
-          </a:prstGeom>
-          <a:solidFill>
-            <a:srgbClr val="112D4E"/>
-          </a:solidFill>
-          <a:ln>
-            <a:noFill/>
-          </a:ln>
-        </p:spPr>
-        <p:style>
-          <a:lnRef idx="1">
-            <a:schemeClr val="accent1"/>
-          </a:lnRef>
-          <a:fillRef idx="3">
-            <a:schemeClr val="accent1"/>
-          </a:fillRef>
-          <a:effectRef idx="2">
-            <a:schemeClr val="accent1"/>
-          </a:effectRef>
-          <a:fontRef idx="minor">
-            <a:schemeClr val="lt1"/>
-          </a:fontRef>
-        </p:style>
-        <p:txBody>
-          <a:bodyPr rtlCol="0" anchor="ctr"/>
-          <a:lstStyle/>
-          <a:p>
-            <a:pPr algn="ctr"/>
-          </a:p>
-        </p:txBody>
-      </p:sp>
-      <p:sp>
-        <p:nvSpPr>
-          <p:cNvPr id="7" name="Rectangle 6"/>
-          <p:cNvSpPr/>
-          <p:nvPr/>
-        </p:nvSpPr>
-        <p:spPr>
-          <a:xfrm>
-            <a:off x="411480" y="2148840"/>
-            <a:ext cx="502920" cy="1920240"/>
-          </a:xfrm>
-          <a:prstGeom prst="rect">
-            <a:avLst/>
-          </a:prstGeom>
-          <a:solidFill>
-            <a:srgbClr val="00C8A0"/>
-          </a:solidFill>
-          <a:ln>
-            <a:noFill/>
-          </a:ln>
-        </p:spPr>
-        <p:style>
-          <a:lnRef idx="1">
-            <a:schemeClr val="accent1"/>
-          </a:lnRef>
-          <a:fillRef idx="3">
-            <a:schemeClr val="accent1"/>
-          </a:fillRef>
-          <a:effectRef idx="2">
-            <a:schemeClr val="accent1"/>
-          </a:effectRef>
-          <a:fontRef idx="minor">
-            <a:schemeClr val="lt1"/>
-          </a:fontRef>
-        </p:style>
-        <p:txBody>
-          <a:bodyPr rtlCol="0" anchor="ctr"/>
-          <a:lstStyle/>
-          <a:p>
-            <a:pPr algn="ctr"/>
-          </a:p>
-        </p:txBody>
-      </p:sp>
-      <p:sp>
-        <p:nvSpPr>
-          <p:cNvPr id="8" name="TextBox 7"/>
-          <p:cNvSpPr txBox="1"/>
-          <p:nvPr/>
-        </p:nvSpPr>
-        <p:spPr>
-          <a:xfrm>
-            <a:off x="475488" y="2743200"/>
-            <a:ext cx="365760" cy="548640"/>
-          </a:xfrm>
-          <a:prstGeom prst="rect">
-            <a:avLst/>
-          </a:prstGeom>
-          <a:noFill/>
-        </p:spPr>
-        <p:txBody>
-          <a:bodyPr wrap="square">
-            <a:spAutoFit/>
-          </a:bodyPr>
-          <a:lstStyle/>
-          <a:p>
-            <a:pPr algn="ctr"/>
-            <a:r>
-              <a:rPr sz="2200" b="1" i="0">
-                <a:solidFill>
-                  <a:srgbClr val="FFFFFF"/>
-                </a:solidFill>
-                <a:latin typeface="Calibri"/>
-              </a:rPr>
-              <a:t>1</a:t>
-            </a:r>
-          </a:p>
-        </p:txBody>
-      </p:sp>
-      <p:sp>
-        <p:nvSpPr>
-          <p:cNvPr id="9" name="TextBox 8"/>
-          <p:cNvSpPr txBox="1"/>
-          <p:nvPr/>
-        </p:nvSpPr>
-        <p:spPr>
-          <a:xfrm>
-            <a:off x="1051560" y="2286000"/>
-            <a:ext cx="4754880" cy="457200"/>
-          </a:xfrm>
-          <a:prstGeom prst="rect">
-            <a:avLst/>
-          </a:prstGeom>
-          <a:noFill/>
-        </p:spPr>
-        <p:txBody>
-          <a:bodyPr wrap="square">
-            <a:spAutoFit/>
-          </a:bodyPr>
-          <a:lstStyle/>
-          <a:p>
-            <a:pPr algn="l"/>
-            <a:r>
-              <a:rPr sz="1500" b="1" i="0">
-                <a:solidFill>
-                  <a:srgbClr val="FFFFFF"/>
-                </a:solidFill>
-                <a:latin typeface="Calibri"/>
-              </a:rPr>
-              <a:t>Snelle Run cel uitvoeren</a:t>
-            </a:r>
-          </a:p>
-        </p:txBody>
-      </p:sp>
-      <p:sp>
-        <p:nvSpPr>
-          <p:cNvPr id="10" name="TextBox 9"/>
-          <p:cNvSpPr txBox="1"/>
-          <p:nvPr/>
-        </p:nvSpPr>
-        <p:spPr>
-          <a:xfrm>
-            <a:off x="1051560" y="2788920"/>
-            <a:ext cx="4754880" cy="1051560"/>
-          </a:xfrm>
-          <a:prstGeom prst="rect">
-            <a:avLst/>
-          </a:prstGeom>
-          <a:noFill/>
-        </p:spPr>
-        <p:txBody>
-          <a:bodyPr wrap="square">
-            <a:spAutoFit/>
-          </a:bodyPr>
-          <a:lstStyle/>
-          <a:p>
-            <a:pPr algn="l"/>
-            <a:r>
-              <a:rPr sz="1200" b="0" i="0">
-                <a:solidFill>
-                  <a:srgbClr val="8B9DC3"/>
-                </a:solidFill>
-                <a:latin typeface="Calibri"/>
-              </a:rPr>
-              <a:t>Laadt gecachede resultaten → toont backtest KPI's &amp; aanbevelingen direct</a:t>
-            </a:r>
-          </a:p>
-        </p:txBody>
-      </p:sp>
-      <p:sp>
-        <p:nvSpPr>
-          <p:cNvPr id="11" name="Rectangle 10"/>
-          <p:cNvSpPr/>
-          <p:nvPr/>
-        </p:nvSpPr>
-        <p:spPr>
-          <a:xfrm>
-            <a:off x="6217920" y="2148840"/>
-            <a:ext cx="5486400" cy="1920240"/>
-          </a:xfrm>
-          <a:prstGeom prst="rect">
-            <a:avLst/>
-          </a:prstGeom>
-          <a:solidFill>
-            <a:srgbClr val="112D4E"/>
-          </a:solidFill>
-          <a:ln>
-            <a:noFill/>
-          </a:ln>
-        </p:spPr>
-        <p:style>
-          <a:lnRef idx="1">
-            <a:schemeClr val="accent1"/>
-          </a:lnRef>
-          <a:fillRef idx="3">
-            <a:schemeClr val="accent1"/>
-          </a:fillRef>
-          <a:effectRef idx="2">
-            <a:schemeClr val="accent1"/>
-          </a:effectRef>
-          <a:fontRef idx="minor">
-            <a:schemeClr val="lt1"/>
-          </a:fontRef>
-        </p:style>
-        <p:txBody>
-          <a:bodyPr rtlCol="0" anchor="ctr"/>
-          <a:lstStyle/>
-          <a:p>
-            <a:pPr algn="ctr"/>
-          </a:p>
-        </p:txBody>
-      </p:sp>
-      <p:sp>
-        <p:nvSpPr>
-          <p:cNvPr id="12" name="Rectangle 11"/>
-          <p:cNvSpPr/>
-          <p:nvPr/>
-        </p:nvSpPr>
-        <p:spPr>
-          <a:xfrm>
-            <a:off x="6217920" y="2148840"/>
-            <a:ext cx="502920" cy="1920240"/>
-          </a:xfrm>
-          <a:prstGeom prst="rect">
-            <a:avLst/>
-          </a:prstGeom>
-          <a:solidFill>
-            <a:srgbClr val="00C8A0"/>
-          </a:solidFill>
-          <a:ln>
-            <a:noFill/>
-          </a:ln>
-        </p:spPr>
-        <p:style>
-          <a:lnRef idx="1">
-            <a:schemeClr val="accent1"/>
-          </a:lnRef>
-          <a:fillRef idx="3">
-            <a:schemeClr val="accent1"/>
-          </a:fillRef>
-          <a:effectRef idx="2">
-            <a:schemeClr val="accent1"/>
-          </a:effectRef>
-          <a:fontRef idx="minor">
-            <a:schemeClr val="lt1"/>
-          </a:fontRef>
-        </p:style>
-        <p:txBody>
-          <a:bodyPr rtlCol="0" anchor="ctr"/>
-          <a:lstStyle/>
-          <a:p>
-            <a:pPr algn="ctr"/>
-          </a:p>
-        </p:txBody>
-      </p:sp>
-      <p:sp>
-        <p:nvSpPr>
-          <p:cNvPr id="13" name="TextBox 12"/>
-          <p:cNvSpPr txBox="1"/>
-          <p:nvPr/>
-        </p:nvSpPr>
-        <p:spPr>
-          <a:xfrm>
-            <a:off x="6281928" y="2743200"/>
-            <a:ext cx="365760" cy="548640"/>
-          </a:xfrm>
-          <a:prstGeom prst="rect">
-            <a:avLst/>
-          </a:prstGeom>
-          <a:noFill/>
-        </p:spPr>
-        <p:txBody>
-          <a:bodyPr wrap="square">
-            <a:spAutoFit/>
-          </a:bodyPr>
-          <a:lstStyle/>
-          <a:p>
-            <a:pPr algn="ctr"/>
-            <a:r>
-              <a:rPr sz="2200" b="1" i="0">
-                <a:solidFill>
-                  <a:srgbClr val="FFFFFF"/>
-                </a:solidFill>
-                <a:latin typeface="Calibri"/>
-              </a:rPr>
-              <a:t>2</a:t>
-            </a:r>
-          </a:p>
-        </p:txBody>
-      </p:sp>
-      <p:sp>
-        <p:nvSpPr>
-          <p:cNvPr id="14" name="TextBox 13"/>
-          <p:cNvSpPr txBox="1"/>
-          <p:nvPr/>
-        </p:nvSpPr>
-        <p:spPr>
-          <a:xfrm>
-            <a:off x="6858000" y="2286000"/>
-            <a:ext cx="4754880" cy="457200"/>
-          </a:xfrm>
-          <a:prstGeom prst="rect">
-            <a:avLst/>
-          </a:prstGeom>
-          <a:noFill/>
-        </p:spPr>
-        <p:txBody>
-          <a:bodyPr wrap="square">
-            <a:spAutoFit/>
-          </a:bodyPr>
-          <a:lstStyle/>
-          <a:p>
-            <a:pPr algn="l"/>
-            <a:r>
-              <a:rPr sz="1500" b="1" i="0">
-                <a:solidFill>
-                  <a:srgbClr val="FFFFFF"/>
-                </a:solidFill>
-                <a:latin typeface="Calibri"/>
-              </a:rPr>
-              <a:t>Dag-voorspelling</a:t>
-            </a:r>
-          </a:p>
-        </p:txBody>
-      </p:sp>
-      <p:sp>
-        <p:nvSpPr>
-          <p:cNvPr id="15" name="TextBox 14"/>
-          <p:cNvSpPr txBox="1"/>
-          <p:nvPr/>
-        </p:nvSpPr>
-        <p:spPr>
-          <a:xfrm>
-            <a:off x="6858000" y="2788920"/>
-            <a:ext cx="4754880" cy="1051560"/>
-          </a:xfrm>
-          <a:prstGeom prst="rect">
-            <a:avLst/>
-          </a:prstGeom>
-          <a:noFill/>
-        </p:spPr>
-        <p:txBody>
-          <a:bodyPr wrap="square">
-            <a:spAutoFit/>
-          </a:bodyPr>
-          <a:lstStyle/>
-          <a:p>
-            <a:pPr algn="l"/>
-            <a:r>
-              <a:rPr sz="1200" b="0" i="0">
-                <a:solidFill>
-                  <a:srgbClr val="8B9DC3"/>
-                </a:solidFill>
-                <a:latin typeface="Calibri"/>
-              </a:rPr>
-              <a:t>Geef morgenochtend weersgegevens in → model geeft modus + vertrektijd</a:t>
-            </a:r>
-          </a:p>
-        </p:txBody>
-      </p:sp>
-      <p:sp>
-        <p:nvSpPr>
-          <p:cNvPr id="16" name="Rectangle 15"/>
-          <p:cNvSpPr/>
-          <p:nvPr/>
-        </p:nvSpPr>
-        <p:spPr>
-          <a:xfrm>
-            <a:off x="411480" y="4251960"/>
-            <a:ext cx="5486400" cy="1920240"/>
-          </a:xfrm>
-          <a:prstGeom prst="rect">
-            <a:avLst/>
-          </a:prstGeom>
-          <a:solidFill>
-            <a:srgbClr val="112D4E"/>
-          </a:solidFill>
-          <a:ln>
-            <a:noFill/>
-          </a:ln>
-        </p:spPr>
-        <p:style>
-          <a:lnRef idx="1">
-            <a:schemeClr val="accent1"/>
-          </a:lnRef>
-          <a:fillRef idx="3">
-            <a:schemeClr val="accent1"/>
-          </a:fillRef>
-          <a:effectRef idx="2">
-            <a:schemeClr val="accent1"/>
-          </a:effectRef>
-          <a:fontRef idx="minor">
-            <a:schemeClr val="lt1"/>
-          </a:fontRef>
-        </p:style>
-        <p:txBody>
-          <a:bodyPr rtlCol="0" anchor="ctr"/>
-          <a:lstStyle/>
-          <a:p>
-            <a:pPr algn="ctr"/>
-          </a:p>
-        </p:txBody>
-      </p:sp>
-      <p:sp>
-        <p:nvSpPr>
-          <p:cNvPr id="17" name="Rectangle 16"/>
-          <p:cNvSpPr/>
-          <p:nvPr/>
-        </p:nvSpPr>
-        <p:spPr>
-          <a:xfrm>
-            <a:off x="411480" y="4251960"/>
-            <a:ext cx="502920" cy="1920240"/>
-          </a:xfrm>
-          <a:prstGeom prst="rect">
-            <a:avLst/>
-          </a:prstGeom>
-          <a:solidFill>
-            <a:srgbClr val="00C8A0"/>
-          </a:solidFill>
-          <a:ln>
-            <a:noFill/>
-          </a:ln>
-        </p:spPr>
-        <p:style>
-          <a:lnRef idx="1">
-            <a:schemeClr val="accent1"/>
-          </a:lnRef>
-          <a:fillRef idx="3">
-            <a:schemeClr val="accent1"/>
-          </a:fillRef>
-          <a:effectRef idx="2">
-            <a:schemeClr val="accent1"/>
-          </a:effectRef>
-          <a:fontRef idx="minor">
-            <a:schemeClr val="lt1"/>
-          </a:fontRef>
-        </p:style>
-        <p:txBody>
-          <a:bodyPr rtlCol="0" anchor="ctr"/>
-          <a:lstStyle/>
-          <a:p>
-            <a:pPr algn="ctr"/>
-          </a:p>
-        </p:txBody>
-      </p:sp>
-      <p:sp>
-        <p:nvSpPr>
-          <p:cNvPr id="18" name="TextBox 17"/>
-          <p:cNvSpPr txBox="1"/>
-          <p:nvPr/>
-        </p:nvSpPr>
-        <p:spPr>
-          <a:xfrm>
-            <a:off x="475488" y="4846320"/>
-            <a:ext cx="365760" cy="548640"/>
-          </a:xfrm>
-          <a:prstGeom prst="rect">
-            <a:avLst/>
-          </a:prstGeom>
-          <a:noFill/>
-        </p:spPr>
-        <p:txBody>
-          <a:bodyPr wrap="square">
-            <a:spAutoFit/>
-          </a:bodyPr>
-          <a:lstStyle/>
-          <a:p>
-            <a:pPr algn="ctr"/>
-            <a:r>
-              <a:rPr sz="2200" b="1" i="0">
-                <a:solidFill>
-                  <a:srgbClr val="FFFFFF"/>
-                </a:solidFill>
-                <a:latin typeface="Calibri"/>
-              </a:rPr>
-              <a:t>3</a:t>
-            </a:r>
-          </a:p>
-        </p:txBody>
-      </p:sp>
-      <p:sp>
-        <p:nvSpPr>
-          <p:cNvPr id="19" name="TextBox 18"/>
-          <p:cNvSpPr txBox="1"/>
-          <p:nvPr/>
-        </p:nvSpPr>
-        <p:spPr>
-          <a:xfrm>
-            <a:off x="1051560" y="4389120"/>
-            <a:ext cx="4754880" cy="457200"/>
-          </a:xfrm>
-          <a:prstGeom prst="rect">
-            <a:avLst/>
-          </a:prstGeom>
-          <a:noFill/>
-        </p:spPr>
-        <p:txBody>
-          <a:bodyPr wrap="square">
-            <a:spAutoFit/>
-          </a:bodyPr>
-          <a:lstStyle/>
-          <a:p>
-            <a:pPr algn="l"/>
-            <a:r>
-              <a:rPr sz="1500" b="1" i="0">
-                <a:solidFill>
-                  <a:srgbClr val="FFFFFF"/>
-                </a:solidFill>
-                <a:latin typeface="Calibri"/>
-              </a:rPr>
-              <a:t>Risicokalender 2026–2027</a:t>
-            </a:r>
-          </a:p>
-        </p:txBody>
-      </p:sp>
-      <p:sp>
-        <p:nvSpPr>
-          <p:cNvPr id="20" name="TextBox 19"/>
-          <p:cNvSpPr txBox="1"/>
-          <p:nvPr/>
-        </p:nvSpPr>
-        <p:spPr>
-          <a:xfrm>
-            <a:off x="1051560" y="4892040"/>
-            <a:ext cx="4754880" cy="1051560"/>
-          </a:xfrm>
-          <a:prstGeom prst="rect">
-            <a:avLst/>
-          </a:prstGeom>
-          <a:noFill/>
-        </p:spPr>
-        <p:txBody>
-          <a:bodyPr wrap="square">
-            <a:spAutoFit/>
-          </a:bodyPr>
-          <a:lstStyle/>
-          <a:p>
-            <a:pPr algn="l"/>
-            <a:r>
-              <a:rPr sz="1200" b="0" i="0">
-                <a:solidFill>
-                  <a:srgbClr val="8B9DC3"/>
-                </a:solidFill>
-                <a:latin typeface="Calibri"/>
-              </a:rPr>
-              <a:t>Heatmap van 'rode dagen' — ideaal voor langetermijnplanning</a:t>
-            </a:r>
-          </a:p>
-        </p:txBody>
-      </p:sp>
-      <p:sp>
-        <p:nvSpPr>
-          <p:cNvPr id="21" name="Rectangle 20"/>
-          <p:cNvSpPr/>
-          <p:nvPr/>
-        </p:nvSpPr>
-        <p:spPr>
-          <a:xfrm>
-            <a:off x="6217920" y="4251960"/>
-            <a:ext cx="5486400" cy="1920240"/>
-          </a:xfrm>
-          <a:prstGeom prst="rect">
-            <a:avLst/>
-          </a:prstGeom>
-          <a:solidFill>
-            <a:srgbClr val="112D4E"/>
-          </a:solidFill>
-          <a:ln>
-            <a:noFill/>
-          </a:ln>
-        </p:spPr>
-        <p:style>
-          <a:lnRef idx="1">
-            <a:schemeClr val="accent1"/>
-          </a:lnRef>
-          <a:fillRef idx="3">
-            <a:schemeClr val="accent1"/>
-          </a:fillRef>
-          <a:effectRef idx="2">
-            <a:schemeClr val="accent1"/>
-          </a:effectRef>
-          <a:fontRef idx="minor">
-            <a:schemeClr val="lt1"/>
-          </a:fontRef>
-        </p:style>
-        <p:txBody>
-          <a:bodyPr rtlCol="0" anchor="ctr"/>
-          <a:lstStyle/>
-          <a:p>
-            <a:pPr algn="ctr"/>
-          </a:p>
-        </p:txBody>
-      </p:sp>
-      <p:sp>
-        <p:nvSpPr>
-          <p:cNvPr id="22" name="Rectangle 21"/>
-          <p:cNvSpPr/>
-          <p:nvPr/>
-        </p:nvSpPr>
-        <p:spPr>
-          <a:xfrm>
-            <a:off x="6217920" y="4251960"/>
-            <a:ext cx="502920" cy="1920240"/>
-          </a:xfrm>
-          <a:prstGeom prst="rect">
-            <a:avLst/>
-          </a:prstGeom>
-          <a:solidFill>
-            <a:srgbClr val="00C8A0"/>
-          </a:solidFill>
-          <a:ln>
-            <a:noFill/>
-          </a:ln>
-        </p:spPr>
-        <p:style>
-          <a:lnRef idx="1">
-            <a:schemeClr val="accent1"/>
-          </a:lnRef>
-          <a:fillRef idx="3">
-            <a:schemeClr val="accent1"/>
-          </a:fillRef>
-          <a:effectRef idx="2">
-            <a:schemeClr val="accent1"/>
-          </a:effectRef>
-          <a:fontRef idx="minor">
-            <a:schemeClr val="lt1"/>
-          </a:fontRef>
-        </p:style>
-        <p:txBody>
-          <a:bodyPr rtlCol="0" anchor="ctr"/>
-          <a:lstStyle/>
-          <a:p>
-            <a:pPr algn="ctr"/>
-          </a:p>
-        </p:txBody>
-      </p:sp>
-      <p:sp>
-        <p:nvSpPr>
-          <p:cNvPr id="23" name="TextBox 22"/>
-          <p:cNvSpPr txBox="1"/>
-          <p:nvPr/>
-        </p:nvSpPr>
-        <p:spPr>
-          <a:xfrm>
-            <a:off x="6281928" y="4846320"/>
-            <a:ext cx="365760" cy="548640"/>
-          </a:xfrm>
-          <a:prstGeom prst="rect">
-            <a:avLst/>
-          </a:prstGeom>
-          <a:noFill/>
-        </p:spPr>
-        <p:txBody>
-          <a:bodyPr wrap="square">
-            <a:spAutoFit/>
-          </a:bodyPr>
-          <a:lstStyle/>
-          <a:p>
-            <a:pPr algn="ctr"/>
-            <a:r>
-              <a:rPr sz="2200" b="1" i="0">
-                <a:solidFill>
-                  <a:srgbClr val="FFFFFF"/>
-                </a:solidFill>
-                <a:latin typeface="Calibri"/>
-              </a:rPr>
-              <a:t>4</a:t>
-            </a:r>
-          </a:p>
-        </p:txBody>
-      </p:sp>
-      <p:sp>
-        <p:nvSpPr>
-          <p:cNvPr id="24" name="TextBox 23"/>
-          <p:cNvSpPr txBox="1"/>
-          <p:nvPr/>
-        </p:nvSpPr>
-        <p:spPr>
-          <a:xfrm>
-            <a:off x="6858000" y="4389120"/>
-            <a:ext cx="4754880" cy="457200"/>
-          </a:xfrm>
-          <a:prstGeom prst="rect">
-            <a:avLst/>
-          </a:prstGeom>
-          <a:noFill/>
-        </p:spPr>
-        <p:txBody>
-          <a:bodyPr wrap="square">
-            <a:spAutoFit/>
-          </a:bodyPr>
-          <a:lstStyle/>
-          <a:p>
-            <a:pPr algn="l"/>
-            <a:r>
-              <a:rPr sz="1500" b="1" i="0">
-                <a:solidFill>
-                  <a:srgbClr val="FFFFFF"/>
-                </a:solidFill>
-                <a:latin typeface="Calibri"/>
-              </a:rPr>
-              <a:t>50 Scenario's bekijken</a:t>
-            </a:r>
-          </a:p>
-        </p:txBody>
-      </p:sp>
-      <p:sp>
-        <p:nvSpPr>
-          <p:cNvPr id="25" name="TextBox 24"/>
-          <p:cNvSpPr txBox="1"/>
-          <p:nvPr/>
-        </p:nvSpPr>
-        <p:spPr>
-          <a:xfrm>
-            <a:off x="6858000" y="4892040"/>
-            <a:ext cx="4754880" cy="1051560"/>
-          </a:xfrm>
-          <a:prstGeom prst="rect">
-            <a:avLst/>
-          </a:prstGeom>
-          <a:noFill/>
-        </p:spPr>
-        <p:txBody>
-          <a:bodyPr wrap="square">
-            <a:spAutoFit/>
-          </a:bodyPr>
-          <a:lstStyle/>
-          <a:p>
-            <a:pPr algn="l"/>
-            <a:r>
-              <a:rPr sz="1200" b="0" i="0">
-                <a:solidFill>
-                  <a:srgbClr val="8B9DC3"/>
-                </a:solidFill>
-                <a:latin typeface="Calibri"/>
-              </a:rPr>
-              <a:t>scenario_predictions.png — alle combinaties van weekdag × weer</a:t>
+              <a:t>weather_risk &gt;= 5
+(sneeuw + iets, of zware regen + storm)
+→ Thuiswerken aanbevolen</a:t>
             </a:r>
           </a:p>
         </p:txBody>
@@ -12605,6 +13439,1992 @@
 </file>
 
 <file path=ppt/slides/slide21.xml><?xml version="1.0" encoding="utf-8"?>
+<p:sld xmlns:a="http://schemas.openxmlformats.org/drawingml/2006/main" xmlns:p="http://schemas.openxmlformats.org/presentationml/2006/main" xmlns:r="http://schemas.openxmlformats.org/officeDocument/2006/relationships">
+  <p:cSld>
+    <p:bg>
+      <p:bgPr>
+        <a:solidFill>
+          <a:srgbClr val="0D1B2A"/>
+        </a:solidFill>
+        <a:effectLst/>
+      </p:bgPr>
+    </p:bg>
+    <p:spTree>
+      <p:nvGrpSpPr>
+        <p:cNvPr id="1" name=""/>
+        <p:cNvGrpSpPr/>
+        <p:nvPr/>
+      </p:nvGrpSpPr>
+      <p:grpSpPr/>
+      <p:sp>
+        <p:nvSpPr>
+          <p:cNvPr id="2" name="TextBox 1"/>
+          <p:cNvSpPr txBox="1"/>
+          <p:nvPr/>
+        </p:nvSpPr>
+        <p:spPr>
+          <a:xfrm>
+            <a:off x="411480" y="256032"/>
+            <a:ext cx="11338560" cy="594360"/>
+          </a:xfrm>
+          <a:prstGeom prst="rect">
+            <a:avLst/>
+          </a:prstGeom>
+          <a:noFill/>
+        </p:spPr>
+        <p:txBody>
+          <a:bodyPr wrap="square">
+            <a:spAutoFit/>
+          </a:bodyPr>
+          <a:lstStyle/>
+          <a:p>
+            <a:pPr algn="l"/>
+            <a:r>
+              <a:rPr sz="3000" b="1" i="0">
+                <a:solidFill>
+                  <a:srgbClr val="00C8A0"/>
+                </a:solidFill>
+                <a:latin typeface="Calibri"/>
+              </a:rPr>
+              <a:t>Sleutelinzichten</a:t>
+            </a:r>
+          </a:p>
+        </p:txBody>
+      </p:sp>
+      <p:sp>
+        <p:nvSpPr>
+          <p:cNvPr id="3" name="Rectangle 2"/>
+          <p:cNvSpPr/>
+          <p:nvPr/>
+        </p:nvSpPr>
+        <p:spPr>
+          <a:xfrm>
+            <a:off x="365760" y="822960"/>
+            <a:ext cx="11430000" cy="25400"/>
+          </a:xfrm>
+          <a:prstGeom prst="rect">
+            <a:avLst/>
+          </a:prstGeom>
+          <a:solidFill>
+            <a:srgbClr val="00C8A0"/>
+          </a:solidFill>
+          <a:ln>
+            <a:noFill/>
+          </a:ln>
+        </p:spPr>
+        <p:style>
+          <a:lnRef idx="1">
+            <a:schemeClr val="accent1"/>
+          </a:lnRef>
+          <a:fillRef idx="3">
+            <a:schemeClr val="accent1"/>
+          </a:fillRef>
+          <a:effectRef idx="2">
+            <a:schemeClr val="accent1"/>
+          </a:effectRef>
+          <a:fontRef idx="minor">
+            <a:schemeClr val="lt1"/>
+          </a:fontRef>
+        </p:style>
+        <p:txBody>
+          <a:bodyPr rtlCol="0" anchor="ctr"/>
+          <a:lstStyle/>
+          <a:p>
+            <a:pPr algn="ctr"/>
+          </a:p>
+        </p:txBody>
+      </p:sp>
+      <p:sp>
+        <p:nvSpPr>
+          <p:cNvPr id="4" name="Rectangle 3"/>
+          <p:cNvSpPr/>
+          <p:nvPr/>
+        </p:nvSpPr>
+        <p:spPr>
+          <a:xfrm>
+            <a:off x="411480" y="1188720"/>
+            <a:ext cx="5486400" cy="1554480"/>
+          </a:xfrm>
+          <a:prstGeom prst="rect">
+            <a:avLst/>
+          </a:prstGeom>
+          <a:solidFill>
+            <a:srgbClr val="112D4E"/>
+          </a:solidFill>
+          <a:ln>
+            <a:noFill/>
+          </a:ln>
+        </p:spPr>
+        <p:style>
+          <a:lnRef idx="1">
+            <a:schemeClr val="accent1"/>
+          </a:lnRef>
+          <a:fillRef idx="3">
+            <a:schemeClr val="accent1"/>
+          </a:fillRef>
+          <a:effectRef idx="2">
+            <a:schemeClr val="accent1"/>
+          </a:effectRef>
+          <a:fontRef idx="minor">
+            <a:schemeClr val="lt1"/>
+          </a:fontRef>
+        </p:style>
+        <p:txBody>
+          <a:bodyPr rtlCol="0" anchor="ctr"/>
+          <a:lstStyle/>
+          <a:p>
+            <a:pPr algn="ctr"/>
+          </a:p>
+        </p:txBody>
+      </p:sp>
+      <p:sp>
+        <p:nvSpPr>
+          <p:cNvPr id="5" name="Rectangle 4"/>
+          <p:cNvSpPr/>
+          <p:nvPr/>
+        </p:nvSpPr>
+        <p:spPr>
+          <a:xfrm>
+            <a:off x="411480" y="1188720"/>
+            <a:ext cx="64008" cy="1554480"/>
+          </a:xfrm>
+          <a:prstGeom prst="rect">
+            <a:avLst/>
+          </a:prstGeom>
+          <a:solidFill>
+            <a:srgbClr val="FF6B35"/>
+          </a:solidFill>
+          <a:ln>
+            <a:noFill/>
+          </a:ln>
+        </p:spPr>
+        <p:style>
+          <a:lnRef idx="1">
+            <a:schemeClr val="accent1"/>
+          </a:lnRef>
+          <a:fillRef idx="3">
+            <a:schemeClr val="accent1"/>
+          </a:fillRef>
+          <a:effectRef idx="2">
+            <a:schemeClr val="accent1"/>
+          </a:effectRef>
+          <a:fontRef idx="minor">
+            <a:schemeClr val="lt1"/>
+          </a:fontRef>
+        </p:style>
+        <p:txBody>
+          <a:bodyPr rtlCol="0" anchor="ctr"/>
+          <a:lstStyle/>
+          <a:p>
+            <a:pPr algn="ctr"/>
+          </a:p>
+        </p:txBody>
+      </p:sp>
+      <p:sp>
+        <p:nvSpPr>
+          <p:cNvPr id="6" name="TextBox 5"/>
+          <p:cNvSpPr txBox="1"/>
+          <p:nvPr/>
+        </p:nvSpPr>
+        <p:spPr>
+          <a:xfrm>
+            <a:off x="594360" y="1280160"/>
+            <a:ext cx="5166360" cy="411480"/>
+          </a:xfrm>
+          <a:prstGeom prst="rect">
+            <a:avLst/>
+          </a:prstGeom>
+          <a:noFill/>
+        </p:spPr>
+        <p:txBody>
+          <a:bodyPr wrap="square">
+            <a:spAutoFit/>
+          </a:bodyPr>
+          <a:lstStyle/>
+          <a:p>
+            <a:pPr algn="l"/>
+            <a:r>
+              <a:rPr sz="1400" b="1" i="0">
+                <a:solidFill>
+                  <a:srgbClr val="FF6B35"/>
+                </a:solidFill>
+                <a:latin typeface="Calibri"/>
+              </a:rPr>
+              <a:t>Ma &amp; do = slechtste dagen voor autorijden</a:t>
+            </a:r>
+          </a:p>
+        </p:txBody>
+      </p:sp>
+      <p:sp>
+        <p:nvSpPr>
+          <p:cNvPr id="7" name="TextBox 6"/>
+          <p:cNvSpPr txBox="1"/>
+          <p:nvPr/>
+        </p:nvSpPr>
+        <p:spPr>
+          <a:xfrm>
+            <a:off x="594360" y="1719072"/>
+            <a:ext cx="5166360" cy="822960"/>
+          </a:xfrm>
+          <a:prstGeom prst="rect">
+            <a:avLst/>
+          </a:prstGeom>
+          <a:noFill/>
+        </p:spPr>
+        <p:txBody>
+          <a:bodyPr wrap="square">
+            <a:spAutoFit/>
+          </a:bodyPr>
+          <a:lstStyle/>
+          <a:p>
+            <a:pPr algn="l"/>
+            <a:r>
+              <a:rPr sz="1200" b="0" i="0">
+                <a:solidFill>
+                  <a:srgbClr val="8B9DC3"/>
+                </a:solidFill>
+                <a:latin typeface="Calibri"/>
+              </a:rPr>
+              <a:t>~18% en ~17% boven vrije doorstroomtijd (Infrabel) — menselijk rijgedrag, niet het weer.</a:t>
+            </a:r>
+          </a:p>
+        </p:txBody>
+      </p:sp>
+      <p:sp>
+        <p:nvSpPr>
+          <p:cNvPr id="8" name="Rectangle 7"/>
+          <p:cNvSpPr/>
+          <p:nvPr/>
+        </p:nvSpPr>
+        <p:spPr>
+          <a:xfrm>
+            <a:off x="6217920" y="1188720"/>
+            <a:ext cx="5486400" cy="1554480"/>
+          </a:xfrm>
+          <a:prstGeom prst="rect">
+            <a:avLst/>
+          </a:prstGeom>
+          <a:solidFill>
+            <a:srgbClr val="112D4E"/>
+          </a:solidFill>
+          <a:ln>
+            <a:noFill/>
+          </a:ln>
+        </p:spPr>
+        <p:style>
+          <a:lnRef idx="1">
+            <a:schemeClr val="accent1"/>
+          </a:lnRef>
+          <a:fillRef idx="3">
+            <a:schemeClr val="accent1"/>
+          </a:fillRef>
+          <a:effectRef idx="2">
+            <a:schemeClr val="accent1"/>
+          </a:effectRef>
+          <a:fontRef idx="minor">
+            <a:schemeClr val="lt1"/>
+          </a:fontRef>
+        </p:style>
+        <p:txBody>
+          <a:bodyPr rtlCol="0" anchor="ctr"/>
+          <a:lstStyle/>
+          <a:p>
+            <a:pPr algn="ctr"/>
+          </a:p>
+        </p:txBody>
+      </p:sp>
+      <p:sp>
+        <p:nvSpPr>
+          <p:cNvPr id="9" name="Rectangle 8"/>
+          <p:cNvSpPr/>
+          <p:nvPr/>
+        </p:nvSpPr>
+        <p:spPr>
+          <a:xfrm>
+            <a:off x="6217920" y="1188720"/>
+            <a:ext cx="64008" cy="1554480"/>
+          </a:xfrm>
+          <a:prstGeom prst="rect">
+            <a:avLst/>
+          </a:prstGeom>
+          <a:solidFill>
+            <a:srgbClr val="00C8A0"/>
+          </a:solidFill>
+          <a:ln>
+            <a:noFill/>
+          </a:ln>
+        </p:spPr>
+        <p:style>
+          <a:lnRef idx="1">
+            <a:schemeClr val="accent1"/>
+          </a:lnRef>
+          <a:fillRef idx="3">
+            <a:schemeClr val="accent1"/>
+          </a:fillRef>
+          <a:effectRef idx="2">
+            <a:schemeClr val="accent1"/>
+          </a:effectRef>
+          <a:fontRef idx="minor">
+            <a:schemeClr val="lt1"/>
+          </a:fontRef>
+        </p:style>
+        <p:txBody>
+          <a:bodyPr rtlCol="0" anchor="ctr"/>
+          <a:lstStyle/>
+          <a:p>
+            <a:pPr algn="ctr"/>
+          </a:p>
+        </p:txBody>
+      </p:sp>
+      <p:sp>
+        <p:nvSpPr>
+          <p:cNvPr id="10" name="TextBox 9"/>
+          <p:cNvSpPr txBox="1"/>
+          <p:nvPr/>
+        </p:nvSpPr>
+        <p:spPr>
+          <a:xfrm>
+            <a:off x="6400800" y="1280160"/>
+            <a:ext cx="5166360" cy="411480"/>
+          </a:xfrm>
+          <a:prstGeom prst="rect">
+            <a:avLst/>
+          </a:prstGeom>
+          <a:noFill/>
+        </p:spPr>
+        <p:txBody>
+          <a:bodyPr wrap="square">
+            <a:spAutoFit/>
+          </a:bodyPr>
+          <a:lstStyle/>
+          <a:p>
+            <a:pPr algn="l"/>
+            <a:r>
+              <a:rPr sz="1400" b="1" i="0">
+                <a:solidFill>
+                  <a:srgbClr val="00C8A0"/>
+                </a:solidFill>
+                <a:latin typeface="Calibri"/>
+              </a:rPr>
+              <a:t>Zware regen: de grootste weerimpact op autoverkeer</a:t>
+            </a:r>
+          </a:p>
+        </p:txBody>
+      </p:sp>
+      <p:sp>
+        <p:nvSpPr>
+          <p:cNvPr id="11" name="TextBox 10"/>
+          <p:cNvSpPr txBox="1"/>
+          <p:nvPr/>
+        </p:nvSpPr>
+        <p:spPr>
+          <a:xfrm>
+            <a:off x="6400800" y="1719072"/>
+            <a:ext cx="5166360" cy="822960"/>
+          </a:xfrm>
+          <a:prstGeom prst="rect">
+            <a:avLst/>
+          </a:prstGeom>
+          <a:noFill/>
+        </p:spPr>
+        <p:txBody>
+          <a:bodyPr wrap="square">
+            <a:spAutoFit/>
+          </a:bodyPr>
+          <a:lstStyle/>
+          <a:p>
+            <a:pPr algn="l"/>
+            <a:r>
+              <a:rPr sz="1200" b="0" i="0">
+                <a:solidFill>
+                  <a:srgbClr val="8B9DC3"/>
+                </a:solidFill>
+                <a:latin typeface="Calibri"/>
+              </a:rPr>
+              <a:t>+12% reistijd bij piekintensiteit ≥ 5 mm/u — lichte regen en rijp slechts +3–4%.</a:t>
+            </a:r>
+          </a:p>
+        </p:txBody>
+      </p:sp>
+      <p:sp>
+        <p:nvSpPr>
+          <p:cNvPr id="12" name="Rectangle 11"/>
+          <p:cNvSpPr/>
+          <p:nvPr/>
+        </p:nvSpPr>
+        <p:spPr>
+          <a:xfrm>
+            <a:off x="411480" y="2926080"/>
+            <a:ext cx="5486400" cy="1554480"/>
+          </a:xfrm>
+          <a:prstGeom prst="rect">
+            <a:avLst/>
+          </a:prstGeom>
+          <a:solidFill>
+            <a:srgbClr val="112D4E"/>
+          </a:solidFill>
+          <a:ln>
+            <a:noFill/>
+          </a:ln>
+        </p:spPr>
+        <p:style>
+          <a:lnRef idx="1">
+            <a:schemeClr val="accent1"/>
+          </a:lnRef>
+          <a:fillRef idx="3">
+            <a:schemeClr val="accent1"/>
+          </a:fillRef>
+          <a:effectRef idx="2">
+            <a:schemeClr val="accent1"/>
+          </a:effectRef>
+          <a:fontRef idx="minor">
+            <a:schemeClr val="lt1"/>
+          </a:fontRef>
+        </p:style>
+        <p:txBody>
+          <a:bodyPr rtlCol="0" anchor="ctr"/>
+          <a:lstStyle/>
+          <a:p>
+            <a:pPr algn="ctr"/>
+          </a:p>
+        </p:txBody>
+      </p:sp>
+      <p:sp>
+        <p:nvSpPr>
+          <p:cNvPr id="13" name="Rectangle 12"/>
+          <p:cNvSpPr/>
+          <p:nvPr/>
+        </p:nvSpPr>
+        <p:spPr>
+          <a:xfrm>
+            <a:off x="411480" y="2926080"/>
+            <a:ext cx="64008" cy="1554480"/>
+          </a:xfrm>
+          <a:prstGeom prst="rect">
+            <a:avLst/>
+          </a:prstGeom>
+          <a:solidFill>
+            <a:srgbClr val="FF6B35"/>
+          </a:solidFill>
+          <a:ln>
+            <a:noFill/>
+          </a:ln>
+        </p:spPr>
+        <p:style>
+          <a:lnRef idx="1">
+            <a:schemeClr val="accent1"/>
+          </a:lnRef>
+          <a:fillRef idx="3">
+            <a:schemeClr val="accent1"/>
+          </a:fillRef>
+          <a:effectRef idx="2">
+            <a:schemeClr val="accent1"/>
+          </a:effectRef>
+          <a:fontRef idx="minor">
+            <a:schemeClr val="lt1"/>
+          </a:fontRef>
+        </p:style>
+        <p:txBody>
+          <a:bodyPr rtlCol="0" anchor="ctr"/>
+          <a:lstStyle/>
+          <a:p>
+            <a:pPr algn="ctr"/>
+          </a:p>
+        </p:txBody>
+      </p:sp>
+      <p:sp>
+        <p:nvSpPr>
+          <p:cNvPr id="14" name="TextBox 13"/>
+          <p:cNvSpPr txBox="1"/>
+          <p:nvPr/>
+        </p:nvSpPr>
+        <p:spPr>
+          <a:xfrm>
+            <a:off x="594360" y="3017520"/>
+            <a:ext cx="5166360" cy="411480"/>
+          </a:xfrm>
+          <a:prstGeom prst="rect">
+            <a:avLst/>
+          </a:prstGeom>
+          <a:noFill/>
+        </p:spPr>
+        <p:txBody>
+          <a:bodyPr wrap="square">
+            <a:spAutoFit/>
+          </a:bodyPr>
+          <a:lstStyle/>
+          <a:p>
+            <a:pPr algn="l"/>
+            <a:r>
+              <a:rPr sz="1400" b="1" i="0">
+                <a:solidFill>
+                  <a:srgbClr val="FF6B35"/>
+                </a:solidFill>
+                <a:latin typeface="Calibri"/>
+              </a:rPr>
+              <a:t>Weer is NIET afhankelijk van weekdag</a:t>
+            </a:r>
+          </a:p>
+        </p:txBody>
+      </p:sp>
+      <p:sp>
+        <p:nvSpPr>
+          <p:cNvPr id="15" name="TextBox 14"/>
+          <p:cNvSpPr txBox="1"/>
+          <p:nvPr/>
+        </p:nvSpPr>
+        <p:spPr>
+          <a:xfrm>
+            <a:off x="594360" y="3456432"/>
+            <a:ext cx="5166360" cy="822960"/>
+          </a:xfrm>
+          <a:prstGeom prst="rect">
+            <a:avLst/>
+          </a:prstGeom>
+          <a:noFill/>
+        </p:spPr>
+        <p:txBody>
+          <a:bodyPr wrap="square">
+            <a:spAutoFit/>
+          </a:bodyPr>
+          <a:lstStyle/>
+          <a:p>
+            <a:pPr algn="l"/>
+            <a:r>
+              <a:rPr sz="1200" b="0" i="0">
+                <a:solidFill>
+                  <a:srgbClr val="8B9DC3"/>
+                </a:solidFill>
+                <a:latin typeface="Calibri"/>
+              </a:rPr>
+              <a:t>Maandag is niet natter dan vrijdag. Verkeerspatronen = mensengedrag.</a:t>
+            </a:r>
+          </a:p>
+        </p:txBody>
+      </p:sp>
+      <p:sp>
+        <p:nvSpPr>
+          <p:cNvPr id="16" name="Rectangle 15"/>
+          <p:cNvSpPr/>
+          <p:nvPr/>
+        </p:nvSpPr>
+        <p:spPr>
+          <a:xfrm>
+            <a:off x="6217920" y="2926080"/>
+            <a:ext cx="5486400" cy="1554480"/>
+          </a:xfrm>
+          <a:prstGeom prst="rect">
+            <a:avLst/>
+          </a:prstGeom>
+          <a:solidFill>
+            <a:srgbClr val="112D4E"/>
+          </a:solidFill>
+          <a:ln>
+            <a:noFill/>
+          </a:ln>
+        </p:spPr>
+        <p:style>
+          <a:lnRef idx="1">
+            <a:schemeClr val="accent1"/>
+          </a:lnRef>
+          <a:fillRef idx="3">
+            <a:schemeClr val="accent1"/>
+          </a:fillRef>
+          <a:effectRef idx="2">
+            <a:schemeClr val="accent1"/>
+          </a:effectRef>
+          <a:fontRef idx="minor">
+            <a:schemeClr val="lt1"/>
+          </a:fontRef>
+        </p:style>
+        <p:txBody>
+          <a:bodyPr rtlCol="0" anchor="ctr"/>
+          <a:lstStyle/>
+          <a:p>
+            <a:pPr algn="ctr"/>
+          </a:p>
+        </p:txBody>
+      </p:sp>
+      <p:sp>
+        <p:nvSpPr>
+          <p:cNvPr id="17" name="Rectangle 16"/>
+          <p:cNvSpPr/>
+          <p:nvPr/>
+        </p:nvSpPr>
+        <p:spPr>
+          <a:xfrm>
+            <a:off x="6217920" y="2926080"/>
+            <a:ext cx="64008" cy="1554480"/>
+          </a:xfrm>
+          <a:prstGeom prst="rect">
+            <a:avLst/>
+          </a:prstGeom>
+          <a:solidFill>
+            <a:srgbClr val="A060FF"/>
+          </a:solidFill>
+          <a:ln>
+            <a:noFill/>
+          </a:ln>
+        </p:spPr>
+        <p:style>
+          <a:lnRef idx="1">
+            <a:schemeClr val="accent1"/>
+          </a:lnRef>
+          <a:fillRef idx="3">
+            <a:schemeClr val="accent1"/>
+          </a:fillRef>
+          <a:effectRef idx="2">
+            <a:schemeClr val="accent1"/>
+          </a:effectRef>
+          <a:fontRef idx="minor">
+            <a:schemeClr val="lt1"/>
+          </a:fontRef>
+        </p:style>
+        <p:txBody>
+          <a:bodyPr rtlCol="0" anchor="ctr"/>
+          <a:lstStyle/>
+          <a:p>
+            <a:pPr algn="ctr"/>
+          </a:p>
+        </p:txBody>
+      </p:sp>
+      <p:sp>
+        <p:nvSpPr>
+          <p:cNvPr id="18" name="TextBox 17"/>
+          <p:cNvSpPr txBox="1"/>
+          <p:nvPr/>
+        </p:nvSpPr>
+        <p:spPr>
+          <a:xfrm>
+            <a:off x="6400800" y="3017520"/>
+            <a:ext cx="5166360" cy="411480"/>
+          </a:xfrm>
+          <a:prstGeom prst="rect">
+            <a:avLst/>
+          </a:prstGeom>
+          <a:noFill/>
+        </p:spPr>
+        <p:txBody>
+          <a:bodyPr wrap="square">
+            <a:spAutoFit/>
+          </a:bodyPr>
+          <a:lstStyle/>
+          <a:p>
+            <a:pPr algn="l"/>
+            <a:r>
+              <a:rPr sz="1400" b="1" i="0">
+                <a:solidFill>
+                  <a:srgbClr val="A060FF"/>
+                </a:solidFill>
+                <a:latin typeface="Calibri"/>
+              </a:rPr>
+              <a:t>Trein is concurrentieel</a:t>
+            </a:r>
+          </a:p>
+        </p:txBody>
+      </p:sp>
+      <p:sp>
+        <p:nvSpPr>
+          <p:cNvPr id="19" name="TextBox 18"/>
+          <p:cNvSpPr txBox="1"/>
+          <p:nvPr/>
+        </p:nvSpPr>
+        <p:spPr>
+          <a:xfrm>
+            <a:off x="6400800" y="3456432"/>
+            <a:ext cx="5166360" cy="822960"/>
+          </a:xfrm>
+          <a:prstGeom prst="rect">
+            <a:avLst/>
+          </a:prstGeom>
+          <a:noFill/>
+        </p:spPr>
+        <p:txBody>
+          <a:bodyPr wrap="square">
+            <a:spAutoFit/>
+          </a:bodyPr>
+          <a:lstStyle/>
+          <a:p>
+            <a:pPr algn="l"/>
+            <a:r>
+              <a:rPr sz="1200" b="0" i="0">
+                <a:solidFill>
+                  <a:srgbClr val="8B9DC3"/>
+                </a:solidFill>
+                <a:latin typeface="Calibri"/>
+              </a:rPr>
+              <a:t>Op een significant deel werkdagen is de trein sneller dan de auto (zelfs met 10 min buffer).</a:t>
+            </a:r>
+          </a:p>
+        </p:txBody>
+      </p:sp>
+      <p:sp>
+        <p:nvSpPr>
+          <p:cNvPr id="20" name="Rectangle 19"/>
+          <p:cNvSpPr/>
+          <p:nvPr/>
+        </p:nvSpPr>
+        <p:spPr>
+          <a:xfrm>
+            <a:off x="411480" y="4663440"/>
+            <a:ext cx="5486400" cy="1554480"/>
+          </a:xfrm>
+          <a:prstGeom prst="rect">
+            <a:avLst/>
+          </a:prstGeom>
+          <a:solidFill>
+            <a:srgbClr val="112D4E"/>
+          </a:solidFill>
+          <a:ln>
+            <a:noFill/>
+          </a:ln>
+        </p:spPr>
+        <p:style>
+          <a:lnRef idx="1">
+            <a:schemeClr val="accent1"/>
+          </a:lnRef>
+          <a:fillRef idx="3">
+            <a:schemeClr val="accent1"/>
+          </a:fillRef>
+          <a:effectRef idx="2">
+            <a:schemeClr val="accent1"/>
+          </a:effectRef>
+          <a:fontRef idx="minor">
+            <a:schemeClr val="lt1"/>
+          </a:fontRef>
+        </p:style>
+        <p:txBody>
+          <a:bodyPr rtlCol="0" anchor="ctr"/>
+          <a:lstStyle/>
+          <a:p>
+            <a:pPr algn="ctr"/>
+          </a:p>
+        </p:txBody>
+      </p:sp>
+      <p:sp>
+        <p:nvSpPr>
+          <p:cNvPr id="21" name="Rectangle 20"/>
+          <p:cNvSpPr/>
+          <p:nvPr/>
+        </p:nvSpPr>
+        <p:spPr>
+          <a:xfrm>
+            <a:off x="411480" y="4663440"/>
+            <a:ext cx="64008" cy="1554480"/>
+          </a:xfrm>
+          <a:prstGeom prst="rect">
+            <a:avLst/>
+          </a:prstGeom>
+          <a:solidFill>
+            <a:srgbClr val="0099FF"/>
+          </a:solidFill>
+          <a:ln>
+            <a:noFill/>
+          </a:ln>
+        </p:spPr>
+        <p:style>
+          <a:lnRef idx="1">
+            <a:schemeClr val="accent1"/>
+          </a:lnRef>
+          <a:fillRef idx="3">
+            <a:schemeClr val="accent1"/>
+          </a:fillRef>
+          <a:effectRef idx="2">
+            <a:schemeClr val="accent1"/>
+          </a:effectRef>
+          <a:fontRef idx="minor">
+            <a:schemeClr val="lt1"/>
+          </a:fontRef>
+        </p:style>
+        <p:txBody>
+          <a:bodyPr rtlCol="0" anchor="ctr"/>
+          <a:lstStyle/>
+          <a:p>
+            <a:pPr algn="ctr"/>
+          </a:p>
+        </p:txBody>
+      </p:sp>
+      <p:sp>
+        <p:nvSpPr>
+          <p:cNvPr id="22" name="TextBox 21"/>
+          <p:cNvSpPr txBox="1"/>
+          <p:nvPr/>
+        </p:nvSpPr>
+        <p:spPr>
+          <a:xfrm>
+            <a:off x="594360" y="4754880"/>
+            <a:ext cx="5166360" cy="411480"/>
+          </a:xfrm>
+          <a:prstGeom prst="rect">
+            <a:avLst/>
+          </a:prstGeom>
+          <a:noFill/>
+        </p:spPr>
+        <p:txBody>
+          <a:bodyPr wrap="square">
+            <a:spAutoFit/>
+          </a:bodyPr>
+          <a:lstStyle/>
+          <a:p>
+            <a:pPr algn="l"/>
+            <a:r>
+              <a:rPr sz="1400" b="1" i="0">
+                <a:solidFill>
+                  <a:srgbClr val="0099FF"/>
+                </a:solidFill>
+                <a:latin typeface="Calibri"/>
+              </a:rPr>
+              <a:t>Januari–februari &amp; nov–december = hoogste risicomaanden</a:t>
+            </a:r>
+          </a:p>
+        </p:txBody>
+      </p:sp>
+      <p:sp>
+        <p:nvSpPr>
+          <p:cNvPr id="23" name="TextBox 22"/>
+          <p:cNvSpPr txBox="1"/>
+          <p:nvPr/>
+        </p:nvSpPr>
+        <p:spPr>
+          <a:xfrm>
+            <a:off x="594360" y="5193792"/>
+            <a:ext cx="5166360" cy="822960"/>
+          </a:xfrm>
+          <a:prstGeom prst="rect">
+            <a:avLst/>
+          </a:prstGeom>
+          <a:noFill/>
+        </p:spPr>
+        <p:txBody>
+          <a:bodyPr wrap="square">
+            <a:spAutoFit/>
+          </a:bodyPr>
+          <a:lstStyle/>
+          <a:p>
+            <a:pPr algn="l"/>
+            <a:r>
+              <a:rPr sz="1200" b="0" i="0">
+                <a:solidFill>
+                  <a:srgbClr val="8B9DC3"/>
+                </a:solidFill>
+                <a:latin typeface="Calibri"/>
+              </a:rPr>
+              <a:t>Beide vervoersmodi zijn tegelijk belast bij slechte weersomstandigheden.</a:t>
+            </a:r>
+          </a:p>
+        </p:txBody>
+      </p:sp>
+      <p:sp>
+        <p:nvSpPr>
+          <p:cNvPr id="24" name="Rectangle 23"/>
+          <p:cNvSpPr/>
+          <p:nvPr/>
+        </p:nvSpPr>
+        <p:spPr>
+          <a:xfrm>
+            <a:off x="6217920" y="4663440"/>
+            <a:ext cx="5486400" cy="1554480"/>
+          </a:xfrm>
+          <a:prstGeom prst="rect">
+            <a:avLst/>
+          </a:prstGeom>
+          <a:solidFill>
+            <a:srgbClr val="112D4E"/>
+          </a:solidFill>
+          <a:ln>
+            <a:noFill/>
+          </a:ln>
+        </p:spPr>
+        <p:style>
+          <a:lnRef idx="1">
+            <a:schemeClr val="accent1"/>
+          </a:lnRef>
+          <a:fillRef idx="3">
+            <a:schemeClr val="accent1"/>
+          </a:fillRef>
+          <a:effectRef idx="2">
+            <a:schemeClr val="accent1"/>
+          </a:effectRef>
+          <a:fontRef idx="minor">
+            <a:schemeClr val="lt1"/>
+          </a:fontRef>
+        </p:style>
+        <p:txBody>
+          <a:bodyPr rtlCol="0" anchor="ctr"/>
+          <a:lstStyle/>
+          <a:p>
+            <a:pPr algn="ctr"/>
+          </a:p>
+        </p:txBody>
+      </p:sp>
+      <p:sp>
+        <p:nvSpPr>
+          <p:cNvPr id="25" name="Rectangle 24"/>
+          <p:cNvSpPr/>
+          <p:nvPr/>
+        </p:nvSpPr>
+        <p:spPr>
+          <a:xfrm>
+            <a:off x="6217920" y="4663440"/>
+            <a:ext cx="64008" cy="1554480"/>
+          </a:xfrm>
+          <a:prstGeom prst="rect">
+            <a:avLst/>
+          </a:prstGeom>
+          <a:solidFill>
+            <a:srgbClr val="00C8A0"/>
+          </a:solidFill>
+          <a:ln>
+            <a:noFill/>
+          </a:ln>
+        </p:spPr>
+        <p:style>
+          <a:lnRef idx="1">
+            <a:schemeClr val="accent1"/>
+          </a:lnRef>
+          <a:fillRef idx="3">
+            <a:schemeClr val="accent1"/>
+          </a:fillRef>
+          <a:effectRef idx="2">
+            <a:schemeClr val="accent1"/>
+          </a:effectRef>
+          <a:fontRef idx="minor">
+            <a:schemeClr val="lt1"/>
+          </a:fontRef>
+        </p:style>
+        <p:txBody>
+          <a:bodyPr rtlCol="0" anchor="ctr"/>
+          <a:lstStyle/>
+          <a:p>
+            <a:pPr algn="ctr"/>
+          </a:p>
+        </p:txBody>
+      </p:sp>
+      <p:sp>
+        <p:nvSpPr>
+          <p:cNvPr id="26" name="TextBox 25"/>
+          <p:cNvSpPr txBox="1"/>
+          <p:nvPr/>
+        </p:nvSpPr>
+        <p:spPr>
+          <a:xfrm>
+            <a:off x="6400800" y="4754880"/>
+            <a:ext cx="5166360" cy="411480"/>
+          </a:xfrm>
+          <a:prstGeom prst="rect">
+            <a:avLst/>
+          </a:prstGeom>
+          <a:noFill/>
+        </p:spPr>
+        <p:txBody>
+          <a:bodyPr wrap="square">
+            <a:spAutoFit/>
+          </a:bodyPr>
+          <a:lstStyle/>
+          <a:p>
+            <a:pPr algn="l"/>
+            <a:r>
+              <a:rPr sz="1400" b="1" i="0">
+                <a:solidFill>
+                  <a:srgbClr val="00C8A0"/>
+                </a:solidFill>
+                <a:latin typeface="Calibri"/>
+              </a:rPr>
+              <a:t>Juiste route: E17 → R1 → E19 via Antwerpen</a:t>
+            </a:r>
+          </a:p>
+        </p:txBody>
+      </p:sp>
+      <p:sp>
+        <p:nvSpPr>
+          <p:cNvPr id="27" name="TextBox 26"/>
+          <p:cNvSpPr txBox="1"/>
+          <p:nvPr/>
+        </p:nvSpPr>
+        <p:spPr>
+          <a:xfrm>
+            <a:off x="6400800" y="5193792"/>
+            <a:ext cx="5166360" cy="822960"/>
+          </a:xfrm>
+          <a:prstGeom prst="rect">
+            <a:avLst/>
+          </a:prstGeom>
+          <a:noFill/>
+        </p:spPr>
+        <p:txBody>
+          <a:bodyPr wrap="square">
+            <a:spAutoFit/>
+          </a:bodyPr>
+          <a:lstStyle/>
+          <a:p>
+            <a:pPr algn="l"/>
+            <a:r>
+              <a:rPr sz="1200" b="0" i="0">
+                <a:solidFill>
+                  <a:srgbClr val="8B9DC3"/>
+                </a:solidFill>
+                <a:latin typeface="Calibri"/>
+              </a:rPr>
+              <a:t>Niet de directe E40. Bevestigd door VC-gegevens die overeenkomen met GPS-aanbevelingen.</a:t>
+            </a:r>
+          </a:p>
+        </p:txBody>
+      </p:sp>
+    </p:spTree>
+  </p:cSld>
+  <p:clrMapOvr>
+    <a:masterClrMapping/>
+  </p:clrMapOvr>
+</p:sld>
+</file>
+
+<file path=ppt/slides/slide22.xml><?xml version="1.0" encoding="utf-8"?>
+<p:sld xmlns:a="http://schemas.openxmlformats.org/drawingml/2006/main" xmlns:p="http://schemas.openxmlformats.org/presentationml/2006/main" xmlns:r="http://schemas.openxmlformats.org/officeDocument/2006/relationships">
+  <p:cSld>
+    <p:bg>
+      <p:bgPr>
+        <a:solidFill>
+          <a:srgbClr val="0D1B2A"/>
+        </a:solidFill>
+        <a:effectLst/>
+      </p:bgPr>
+    </p:bg>
+    <p:spTree>
+      <p:nvGrpSpPr>
+        <p:cNvPr id="1" name=""/>
+        <p:cNvGrpSpPr/>
+        <p:nvPr/>
+      </p:nvGrpSpPr>
+      <p:grpSpPr/>
+      <p:sp>
+        <p:nvSpPr>
+          <p:cNvPr id="2" name="Rectangle 1"/>
+          <p:cNvSpPr/>
+          <p:nvPr/>
+        </p:nvSpPr>
+        <p:spPr>
+          <a:xfrm>
+            <a:off x="0" y="0"/>
+            <a:ext cx="12188952" cy="1920240"/>
+          </a:xfrm>
+          <a:prstGeom prst="rect">
+            <a:avLst/>
+          </a:prstGeom>
+          <a:solidFill>
+            <a:srgbClr val="112D4E"/>
+          </a:solidFill>
+          <a:ln>
+            <a:noFill/>
+          </a:ln>
+        </p:spPr>
+        <p:style>
+          <a:lnRef idx="1">
+            <a:schemeClr val="accent1"/>
+          </a:lnRef>
+          <a:fillRef idx="3">
+            <a:schemeClr val="accent1"/>
+          </a:fillRef>
+          <a:effectRef idx="2">
+            <a:schemeClr val="accent1"/>
+          </a:effectRef>
+          <a:fontRef idx="minor">
+            <a:schemeClr val="lt1"/>
+          </a:fontRef>
+        </p:style>
+        <p:txBody>
+          <a:bodyPr rtlCol="0" anchor="ctr"/>
+          <a:lstStyle/>
+          <a:p>
+            <a:pPr algn="ctr"/>
+          </a:p>
+        </p:txBody>
+      </p:sp>
+      <p:sp>
+        <p:nvSpPr>
+          <p:cNvPr id="3" name="Rectangle 2"/>
+          <p:cNvSpPr/>
+          <p:nvPr/>
+        </p:nvSpPr>
+        <p:spPr>
+          <a:xfrm>
+            <a:off x="0" y="1874519"/>
+            <a:ext cx="12188952" cy="73152"/>
+          </a:xfrm>
+          <a:prstGeom prst="rect">
+            <a:avLst/>
+          </a:prstGeom>
+          <a:solidFill>
+            <a:srgbClr val="00C8A0"/>
+          </a:solidFill>
+          <a:ln>
+            <a:noFill/>
+          </a:ln>
+        </p:spPr>
+        <p:style>
+          <a:lnRef idx="1">
+            <a:schemeClr val="accent1"/>
+          </a:lnRef>
+          <a:fillRef idx="3">
+            <a:schemeClr val="accent1"/>
+          </a:fillRef>
+          <a:effectRef idx="2">
+            <a:schemeClr val="accent1"/>
+          </a:effectRef>
+          <a:fontRef idx="minor">
+            <a:schemeClr val="lt1"/>
+          </a:fontRef>
+        </p:style>
+        <p:txBody>
+          <a:bodyPr rtlCol="0" anchor="ctr"/>
+          <a:lstStyle/>
+          <a:p>
+            <a:pPr algn="ctr"/>
+          </a:p>
+        </p:txBody>
+      </p:sp>
+      <p:sp>
+        <p:nvSpPr>
+          <p:cNvPr id="4" name="TextBox 3"/>
+          <p:cNvSpPr txBox="1"/>
+          <p:nvPr/>
+        </p:nvSpPr>
+        <p:spPr>
+          <a:xfrm>
+            <a:off x="411480" y="274320"/>
+            <a:ext cx="11338560" cy="548640"/>
+          </a:xfrm>
+          <a:prstGeom prst="rect">
+            <a:avLst/>
+          </a:prstGeom>
+          <a:noFill/>
+        </p:spPr>
+        <p:txBody>
+          <a:bodyPr wrap="square">
+            <a:spAutoFit/>
+          </a:bodyPr>
+          <a:lstStyle/>
+          <a:p>
+            <a:pPr algn="l"/>
+            <a:r>
+              <a:rPr sz="1600" b="1" i="0">
+                <a:solidFill>
+                  <a:srgbClr val="00C8A0"/>
+                </a:solidFill>
+                <a:latin typeface="Calibri"/>
+              </a:rPr>
+              <a:t>LIVE DEMO</a:t>
+            </a:r>
+          </a:p>
+        </p:txBody>
+      </p:sp>
+      <p:sp>
+        <p:nvSpPr>
+          <p:cNvPr id="5" name="TextBox 4"/>
+          <p:cNvSpPr txBox="1"/>
+          <p:nvPr/>
+        </p:nvSpPr>
+        <p:spPr>
+          <a:xfrm>
+            <a:off x="411480" y="777240"/>
+            <a:ext cx="11338560" cy="731520"/>
+          </a:xfrm>
+          <a:prstGeom prst="rect">
+            <a:avLst/>
+          </a:prstGeom>
+          <a:noFill/>
+        </p:spPr>
+        <p:txBody>
+          <a:bodyPr wrap="square">
+            <a:spAutoFit/>
+          </a:bodyPr>
+          <a:lstStyle/>
+          <a:p>
+            <a:pPr algn="l"/>
+            <a:r>
+              <a:rPr sz="3400" b="1" i="0">
+                <a:solidFill>
+                  <a:srgbClr val="FFFFFF"/>
+                </a:solidFill>
+                <a:latin typeface="Calibri"/>
+              </a:rPr>
+              <a:t>gent_mechelen_commute_risk_forecast.ipynb</a:t>
+            </a:r>
+          </a:p>
+        </p:txBody>
+      </p:sp>
+      <p:sp>
+        <p:nvSpPr>
+          <p:cNvPr id="6" name="Rectangle 5"/>
+          <p:cNvSpPr/>
+          <p:nvPr/>
+        </p:nvSpPr>
+        <p:spPr>
+          <a:xfrm>
+            <a:off x="411480" y="2148840"/>
+            <a:ext cx="5486400" cy="1920240"/>
+          </a:xfrm>
+          <a:prstGeom prst="rect">
+            <a:avLst/>
+          </a:prstGeom>
+          <a:solidFill>
+            <a:srgbClr val="112D4E"/>
+          </a:solidFill>
+          <a:ln>
+            <a:noFill/>
+          </a:ln>
+        </p:spPr>
+        <p:style>
+          <a:lnRef idx="1">
+            <a:schemeClr val="accent1"/>
+          </a:lnRef>
+          <a:fillRef idx="3">
+            <a:schemeClr val="accent1"/>
+          </a:fillRef>
+          <a:effectRef idx="2">
+            <a:schemeClr val="accent1"/>
+          </a:effectRef>
+          <a:fontRef idx="minor">
+            <a:schemeClr val="lt1"/>
+          </a:fontRef>
+        </p:style>
+        <p:txBody>
+          <a:bodyPr rtlCol="0" anchor="ctr"/>
+          <a:lstStyle/>
+          <a:p>
+            <a:pPr algn="ctr"/>
+          </a:p>
+        </p:txBody>
+      </p:sp>
+      <p:sp>
+        <p:nvSpPr>
+          <p:cNvPr id="7" name="Rectangle 6"/>
+          <p:cNvSpPr/>
+          <p:nvPr/>
+        </p:nvSpPr>
+        <p:spPr>
+          <a:xfrm>
+            <a:off x="411480" y="2148840"/>
+            <a:ext cx="502920" cy="1920240"/>
+          </a:xfrm>
+          <a:prstGeom prst="rect">
+            <a:avLst/>
+          </a:prstGeom>
+          <a:solidFill>
+            <a:srgbClr val="00C8A0"/>
+          </a:solidFill>
+          <a:ln>
+            <a:noFill/>
+          </a:ln>
+        </p:spPr>
+        <p:style>
+          <a:lnRef idx="1">
+            <a:schemeClr val="accent1"/>
+          </a:lnRef>
+          <a:fillRef idx="3">
+            <a:schemeClr val="accent1"/>
+          </a:fillRef>
+          <a:effectRef idx="2">
+            <a:schemeClr val="accent1"/>
+          </a:effectRef>
+          <a:fontRef idx="minor">
+            <a:schemeClr val="lt1"/>
+          </a:fontRef>
+        </p:style>
+        <p:txBody>
+          <a:bodyPr rtlCol="0" anchor="ctr"/>
+          <a:lstStyle/>
+          <a:p>
+            <a:pPr algn="ctr"/>
+          </a:p>
+        </p:txBody>
+      </p:sp>
+      <p:sp>
+        <p:nvSpPr>
+          <p:cNvPr id="8" name="TextBox 7"/>
+          <p:cNvSpPr txBox="1"/>
+          <p:nvPr/>
+        </p:nvSpPr>
+        <p:spPr>
+          <a:xfrm>
+            <a:off x="475488" y="2743200"/>
+            <a:ext cx="365760" cy="548640"/>
+          </a:xfrm>
+          <a:prstGeom prst="rect">
+            <a:avLst/>
+          </a:prstGeom>
+          <a:noFill/>
+        </p:spPr>
+        <p:txBody>
+          <a:bodyPr wrap="square">
+            <a:spAutoFit/>
+          </a:bodyPr>
+          <a:lstStyle/>
+          <a:p>
+            <a:pPr algn="ctr"/>
+            <a:r>
+              <a:rPr sz="2200" b="1" i="0">
+                <a:solidFill>
+                  <a:srgbClr val="FFFFFF"/>
+                </a:solidFill>
+                <a:latin typeface="Calibri"/>
+              </a:rPr>
+              <a:t>1</a:t>
+            </a:r>
+          </a:p>
+        </p:txBody>
+      </p:sp>
+      <p:sp>
+        <p:nvSpPr>
+          <p:cNvPr id="9" name="TextBox 8"/>
+          <p:cNvSpPr txBox="1"/>
+          <p:nvPr/>
+        </p:nvSpPr>
+        <p:spPr>
+          <a:xfrm>
+            <a:off x="1051560" y="2286000"/>
+            <a:ext cx="4754880" cy="457200"/>
+          </a:xfrm>
+          <a:prstGeom prst="rect">
+            <a:avLst/>
+          </a:prstGeom>
+          <a:noFill/>
+        </p:spPr>
+        <p:txBody>
+          <a:bodyPr wrap="square">
+            <a:spAutoFit/>
+          </a:bodyPr>
+          <a:lstStyle/>
+          <a:p>
+            <a:pPr algn="l"/>
+            <a:r>
+              <a:rPr sz="1500" b="1" i="0">
+                <a:solidFill>
+                  <a:srgbClr val="FFFFFF"/>
+                </a:solidFill>
+                <a:latin typeface="Calibri"/>
+              </a:rPr>
+              <a:t>Snelle Run cel uitvoeren</a:t>
+            </a:r>
+          </a:p>
+        </p:txBody>
+      </p:sp>
+      <p:sp>
+        <p:nvSpPr>
+          <p:cNvPr id="10" name="TextBox 9"/>
+          <p:cNvSpPr txBox="1"/>
+          <p:nvPr/>
+        </p:nvSpPr>
+        <p:spPr>
+          <a:xfrm>
+            <a:off x="1051560" y="2788920"/>
+            <a:ext cx="4754880" cy="1051560"/>
+          </a:xfrm>
+          <a:prstGeom prst="rect">
+            <a:avLst/>
+          </a:prstGeom>
+          <a:noFill/>
+        </p:spPr>
+        <p:txBody>
+          <a:bodyPr wrap="square">
+            <a:spAutoFit/>
+          </a:bodyPr>
+          <a:lstStyle/>
+          <a:p>
+            <a:pPr algn="l"/>
+            <a:r>
+              <a:rPr sz="1200" b="0" i="0">
+                <a:solidFill>
+                  <a:srgbClr val="8B9DC3"/>
+                </a:solidFill>
+                <a:latin typeface="Calibri"/>
+              </a:rPr>
+              <a:t>Laadt gecachede resultaten → toont backtest KPI's &amp; aanbevelingen direct</a:t>
+            </a:r>
+          </a:p>
+        </p:txBody>
+      </p:sp>
+      <p:sp>
+        <p:nvSpPr>
+          <p:cNvPr id="11" name="Rectangle 10"/>
+          <p:cNvSpPr/>
+          <p:nvPr/>
+        </p:nvSpPr>
+        <p:spPr>
+          <a:xfrm>
+            <a:off x="6217920" y="2148840"/>
+            <a:ext cx="5486400" cy="1920240"/>
+          </a:xfrm>
+          <a:prstGeom prst="rect">
+            <a:avLst/>
+          </a:prstGeom>
+          <a:solidFill>
+            <a:srgbClr val="112D4E"/>
+          </a:solidFill>
+          <a:ln>
+            <a:noFill/>
+          </a:ln>
+        </p:spPr>
+        <p:style>
+          <a:lnRef idx="1">
+            <a:schemeClr val="accent1"/>
+          </a:lnRef>
+          <a:fillRef idx="3">
+            <a:schemeClr val="accent1"/>
+          </a:fillRef>
+          <a:effectRef idx="2">
+            <a:schemeClr val="accent1"/>
+          </a:effectRef>
+          <a:fontRef idx="minor">
+            <a:schemeClr val="lt1"/>
+          </a:fontRef>
+        </p:style>
+        <p:txBody>
+          <a:bodyPr rtlCol="0" anchor="ctr"/>
+          <a:lstStyle/>
+          <a:p>
+            <a:pPr algn="ctr"/>
+          </a:p>
+        </p:txBody>
+      </p:sp>
+      <p:sp>
+        <p:nvSpPr>
+          <p:cNvPr id="12" name="Rectangle 11"/>
+          <p:cNvSpPr/>
+          <p:nvPr/>
+        </p:nvSpPr>
+        <p:spPr>
+          <a:xfrm>
+            <a:off x="6217920" y="2148840"/>
+            <a:ext cx="502920" cy="1920240"/>
+          </a:xfrm>
+          <a:prstGeom prst="rect">
+            <a:avLst/>
+          </a:prstGeom>
+          <a:solidFill>
+            <a:srgbClr val="00C8A0"/>
+          </a:solidFill>
+          <a:ln>
+            <a:noFill/>
+          </a:ln>
+        </p:spPr>
+        <p:style>
+          <a:lnRef idx="1">
+            <a:schemeClr val="accent1"/>
+          </a:lnRef>
+          <a:fillRef idx="3">
+            <a:schemeClr val="accent1"/>
+          </a:fillRef>
+          <a:effectRef idx="2">
+            <a:schemeClr val="accent1"/>
+          </a:effectRef>
+          <a:fontRef idx="minor">
+            <a:schemeClr val="lt1"/>
+          </a:fontRef>
+        </p:style>
+        <p:txBody>
+          <a:bodyPr rtlCol="0" anchor="ctr"/>
+          <a:lstStyle/>
+          <a:p>
+            <a:pPr algn="ctr"/>
+          </a:p>
+        </p:txBody>
+      </p:sp>
+      <p:sp>
+        <p:nvSpPr>
+          <p:cNvPr id="13" name="TextBox 12"/>
+          <p:cNvSpPr txBox="1"/>
+          <p:nvPr/>
+        </p:nvSpPr>
+        <p:spPr>
+          <a:xfrm>
+            <a:off x="6281928" y="2743200"/>
+            <a:ext cx="365760" cy="548640"/>
+          </a:xfrm>
+          <a:prstGeom prst="rect">
+            <a:avLst/>
+          </a:prstGeom>
+          <a:noFill/>
+        </p:spPr>
+        <p:txBody>
+          <a:bodyPr wrap="square">
+            <a:spAutoFit/>
+          </a:bodyPr>
+          <a:lstStyle/>
+          <a:p>
+            <a:pPr algn="ctr"/>
+            <a:r>
+              <a:rPr sz="2200" b="1" i="0">
+                <a:solidFill>
+                  <a:srgbClr val="FFFFFF"/>
+                </a:solidFill>
+                <a:latin typeface="Calibri"/>
+              </a:rPr>
+              <a:t>2</a:t>
+            </a:r>
+          </a:p>
+        </p:txBody>
+      </p:sp>
+      <p:sp>
+        <p:nvSpPr>
+          <p:cNvPr id="14" name="TextBox 13"/>
+          <p:cNvSpPr txBox="1"/>
+          <p:nvPr/>
+        </p:nvSpPr>
+        <p:spPr>
+          <a:xfrm>
+            <a:off x="6858000" y="2286000"/>
+            <a:ext cx="4754880" cy="457200"/>
+          </a:xfrm>
+          <a:prstGeom prst="rect">
+            <a:avLst/>
+          </a:prstGeom>
+          <a:noFill/>
+        </p:spPr>
+        <p:txBody>
+          <a:bodyPr wrap="square">
+            <a:spAutoFit/>
+          </a:bodyPr>
+          <a:lstStyle/>
+          <a:p>
+            <a:pPr algn="l"/>
+            <a:r>
+              <a:rPr sz="1500" b="1" i="0">
+                <a:solidFill>
+                  <a:srgbClr val="FFFFFF"/>
+                </a:solidFill>
+                <a:latin typeface="Calibri"/>
+              </a:rPr>
+              <a:t>Dag-voorspelling</a:t>
+            </a:r>
+          </a:p>
+        </p:txBody>
+      </p:sp>
+      <p:sp>
+        <p:nvSpPr>
+          <p:cNvPr id="15" name="TextBox 14"/>
+          <p:cNvSpPr txBox="1"/>
+          <p:nvPr/>
+        </p:nvSpPr>
+        <p:spPr>
+          <a:xfrm>
+            <a:off x="6858000" y="2788920"/>
+            <a:ext cx="4754880" cy="1051560"/>
+          </a:xfrm>
+          <a:prstGeom prst="rect">
+            <a:avLst/>
+          </a:prstGeom>
+          <a:noFill/>
+        </p:spPr>
+        <p:txBody>
+          <a:bodyPr wrap="square">
+            <a:spAutoFit/>
+          </a:bodyPr>
+          <a:lstStyle/>
+          <a:p>
+            <a:pPr algn="l"/>
+            <a:r>
+              <a:rPr sz="1200" b="0" i="0">
+                <a:solidFill>
+                  <a:srgbClr val="8B9DC3"/>
+                </a:solidFill>
+                <a:latin typeface="Calibri"/>
+              </a:rPr>
+              <a:t>Geef morgenochtend weersgegevens in → model geeft modus + vertrektijd</a:t>
+            </a:r>
+          </a:p>
+        </p:txBody>
+      </p:sp>
+      <p:sp>
+        <p:nvSpPr>
+          <p:cNvPr id="16" name="Rectangle 15"/>
+          <p:cNvSpPr/>
+          <p:nvPr/>
+        </p:nvSpPr>
+        <p:spPr>
+          <a:xfrm>
+            <a:off x="411480" y="4251960"/>
+            <a:ext cx="5486400" cy="1920240"/>
+          </a:xfrm>
+          <a:prstGeom prst="rect">
+            <a:avLst/>
+          </a:prstGeom>
+          <a:solidFill>
+            <a:srgbClr val="112D4E"/>
+          </a:solidFill>
+          <a:ln>
+            <a:noFill/>
+          </a:ln>
+        </p:spPr>
+        <p:style>
+          <a:lnRef idx="1">
+            <a:schemeClr val="accent1"/>
+          </a:lnRef>
+          <a:fillRef idx="3">
+            <a:schemeClr val="accent1"/>
+          </a:fillRef>
+          <a:effectRef idx="2">
+            <a:schemeClr val="accent1"/>
+          </a:effectRef>
+          <a:fontRef idx="minor">
+            <a:schemeClr val="lt1"/>
+          </a:fontRef>
+        </p:style>
+        <p:txBody>
+          <a:bodyPr rtlCol="0" anchor="ctr"/>
+          <a:lstStyle/>
+          <a:p>
+            <a:pPr algn="ctr"/>
+          </a:p>
+        </p:txBody>
+      </p:sp>
+      <p:sp>
+        <p:nvSpPr>
+          <p:cNvPr id="17" name="Rectangle 16"/>
+          <p:cNvSpPr/>
+          <p:nvPr/>
+        </p:nvSpPr>
+        <p:spPr>
+          <a:xfrm>
+            <a:off x="411480" y="4251960"/>
+            <a:ext cx="502920" cy="1920240"/>
+          </a:xfrm>
+          <a:prstGeom prst="rect">
+            <a:avLst/>
+          </a:prstGeom>
+          <a:solidFill>
+            <a:srgbClr val="00C8A0"/>
+          </a:solidFill>
+          <a:ln>
+            <a:noFill/>
+          </a:ln>
+        </p:spPr>
+        <p:style>
+          <a:lnRef idx="1">
+            <a:schemeClr val="accent1"/>
+          </a:lnRef>
+          <a:fillRef idx="3">
+            <a:schemeClr val="accent1"/>
+          </a:fillRef>
+          <a:effectRef idx="2">
+            <a:schemeClr val="accent1"/>
+          </a:effectRef>
+          <a:fontRef idx="minor">
+            <a:schemeClr val="lt1"/>
+          </a:fontRef>
+        </p:style>
+        <p:txBody>
+          <a:bodyPr rtlCol="0" anchor="ctr"/>
+          <a:lstStyle/>
+          <a:p>
+            <a:pPr algn="ctr"/>
+          </a:p>
+        </p:txBody>
+      </p:sp>
+      <p:sp>
+        <p:nvSpPr>
+          <p:cNvPr id="18" name="TextBox 17"/>
+          <p:cNvSpPr txBox="1"/>
+          <p:nvPr/>
+        </p:nvSpPr>
+        <p:spPr>
+          <a:xfrm>
+            <a:off x="475488" y="4846320"/>
+            <a:ext cx="365760" cy="548640"/>
+          </a:xfrm>
+          <a:prstGeom prst="rect">
+            <a:avLst/>
+          </a:prstGeom>
+          <a:noFill/>
+        </p:spPr>
+        <p:txBody>
+          <a:bodyPr wrap="square">
+            <a:spAutoFit/>
+          </a:bodyPr>
+          <a:lstStyle/>
+          <a:p>
+            <a:pPr algn="ctr"/>
+            <a:r>
+              <a:rPr sz="2200" b="1" i="0">
+                <a:solidFill>
+                  <a:srgbClr val="FFFFFF"/>
+                </a:solidFill>
+                <a:latin typeface="Calibri"/>
+              </a:rPr>
+              <a:t>3</a:t>
+            </a:r>
+          </a:p>
+        </p:txBody>
+      </p:sp>
+      <p:sp>
+        <p:nvSpPr>
+          <p:cNvPr id="19" name="TextBox 18"/>
+          <p:cNvSpPr txBox="1"/>
+          <p:nvPr/>
+        </p:nvSpPr>
+        <p:spPr>
+          <a:xfrm>
+            <a:off x="1051560" y="4389120"/>
+            <a:ext cx="4754880" cy="457200"/>
+          </a:xfrm>
+          <a:prstGeom prst="rect">
+            <a:avLst/>
+          </a:prstGeom>
+          <a:noFill/>
+        </p:spPr>
+        <p:txBody>
+          <a:bodyPr wrap="square">
+            <a:spAutoFit/>
+          </a:bodyPr>
+          <a:lstStyle/>
+          <a:p>
+            <a:pPr algn="l"/>
+            <a:r>
+              <a:rPr sz="1500" b="1" i="0">
+                <a:solidFill>
+                  <a:srgbClr val="FFFFFF"/>
+                </a:solidFill>
+                <a:latin typeface="Calibri"/>
+              </a:rPr>
+              <a:t>Risicokalender 2026–2027</a:t>
+            </a:r>
+          </a:p>
+        </p:txBody>
+      </p:sp>
+      <p:sp>
+        <p:nvSpPr>
+          <p:cNvPr id="20" name="TextBox 19"/>
+          <p:cNvSpPr txBox="1"/>
+          <p:nvPr/>
+        </p:nvSpPr>
+        <p:spPr>
+          <a:xfrm>
+            <a:off x="1051560" y="4892040"/>
+            <a:ext cx="4754880" cy="1051560"/>
+          </a:xfrm>
+          <a:prstGeom prst="rect">
+            <a:avLst/>
+          </a:prstGeom>
+          <a:noFill/>
+        </p:spPr>
+        <p:txBody>
+          <a:bodyPr wrap="square">
+            <a:spAutoFit/>
+          </a:bodyPr>
+          <a:lstStyle/>
+          <a:p>
+            <a:pPr algn="l"/>
+            <a:r>
+              <a:rPr sz="1200" b="0" i="0">
+                <a:solidFill>
+                  <a:srgbClr val="8B9DC3"/>
+                </a:solidFill>
+                <a:latin typeface="Calibri"/>
+              </a:rPr>
+              <a:t>Heatmap van 'rode dagen' — ideaal voor langetermijnplanning</a:t>
+            </a:r>
+          </a:p>
+        </p:txBody>
+      </p:sp>
+      <p:sp>
+        <p:nvSpPr>
+          <p:cNvPr id="21" name="Rectangle 20"/>
+          <p:cNvSpPr/>
+          <p:nvPr/>
+        </p:nvSpPr>
+        <p:spPr>
+          <a:xfrm>
+            <a:off x="6217920" y="4251960"/>
+            <a:ext cx="5486400" cy="1920240"/>
+          </a:xfrm>
+          <a:prstGeom prst="rect">
+            <a:avLst/>
+          </a:prstGeom>
+          <a:solidFill>
+            <a:srgbClr val="112D4E"/>
+          </a:solidFill>
+          <a:ln>
+            <a:noFill/>
+          </a:ln>
+        </p:spPr>
+        <p:style>
+          <a:lnRef idx="1">
+            <a:schemeClr val="accent1"/>
+          </a:lnRef>
+          <a:fillRef idx="3">
+            <a:schemeClr val="accent1"/>
+          </a:fillRef>
+          <a:effectRef idx="2">
+            <a:schemeClr val="accent1"/>
+          </a:effectRef>
+          <a:fontRef idx="minor">
+            <a:schemeClr val="lt1"/>
+          </a:fontRef>
+        </p:style>
+        <p:txBody>
+          <a:bodyPr rtlCol="0" anchor="ctr"/>
+          <a:lstStyle/>
+          <a:p>
+            <a:pPr algn="ctr"/>
+          </a:p>
+        </p:txBody>
+      </p:sp>
+      <p:sp>
+        <p:nvSpPr>
+          <p:cNvPr id="22" name="Rectangle 21"/>
+          <p:cNvSpPr/>
+          <p:nvPr/>
+        </p:nvSpPr>
+        <p:spPr>
+          <a:xfrm>
+            <a:off x="6217920" y="4251960"/>
+            <a:ext cx="502920" cy="1920240"/>
+          </a:xfrm>
+          <a:prstGeom prst="rect">
+            <a:avLst/>
+          </a:prstGeom>
+          <a:solidFill>
+            <a:srgbClr val="00C8A0"/>
+          </a:solidFill>
+          <a:ln>
+            <a:noFill/>
+          </a:ln>
+        </p:spPr>
+        <p:style>
+          <a:lnRef idx="1">
+            <a:schemeClr val="accent1"/>
+          </a:lnRef>
+          <a:fillRef idx="3">
+            <a:schemeClr val="accent1"/>
+          </a:fillRef>
+          <a:effectRef idx="2">
+            <a:schemeClr val="accent1"/>
+          </a:effectRef>
+          <a:fontRef idx="minor">
+            <a:schemeClr val="lt1"/>
+          </a:fontRef>
+        </p:style>
+        <p:txBody>
+          <a:bodyPr rtlCol="0" anchor="ctr"/>
+          <a:lstStyle/>
+          <a:p>
+            <a:pPr algn="ctr"/>
+          </a:p>
+        </p:txBody>
+      </p:sp>
+      <p:sp>
+        <p:nvSpPr>
+          <p:cNvPr id="23" name="TextBox 22"/>
+          <p:cNvSpPr txBox="1"/>
+          <p:nvPr/>
+        </p:nvSpPr>
+        <p:spPr>
+          <a:xfrm>
+            <a:off x="6281928" y="4846320"/>
+            <a:ext cx="365760" cy="548640"/>
+          </a:xfrm>
+          <a:prstGeom prst="rect">
+            <a:avLst/>
+          </a:prstGeom>
+          <a:noFill/>
+        </p:spPr>
+        <p:txBody>
+          <a:bodyPr wrap="square">
+            <a:spAutoFit/>
+          </a:bodyPr>
+          <a:lstStyle/>
+          <a:p>
+            <a:pPr algn="ctr"/>
+            <a:r>
+              <a:rPr sz="2200" b="1" i="0">
+                <a:solidFill>
+                  <a:srgbClr val="FFFFFF"/>
+                </a:solidFill>
+                <a:latin typeface="Calibri"/>
+              </a:rPr>
+              <a:t>4</a:t>
+            </a:r>
+          </a:p>
+        </p:txBody>
+      </p:sp>
+      <p:sp>
+        <p:nvSpPr>
+          <p:cNvPr id="24" name="TextBox 23"/>
+          <p:cNvSpPr txBox="1"/>
+          <p:nvPr/>
+        </p:nvSpPr>
+        <p:spPr>
+          <a:xfrm>
+            <a:off x="6858000" y="4389120"/>
+            <a:ext cx="4754880" cy="457200"/>
+          </a:xfrm>
+          <a:prstGeom prst="rect">
+            <a:avLst/>
+          </a:prstGeom>
+          <a:noFill/>
+        </p:spPr>
+        <p:txBody>
+          <a:bodyPr wrap="square">
+            <a:spAutoFit/>
+          </a:bodyPr>
+          <a:lstStyle/>
+          <a:p>
+            <a:pPr algn="l"/>
+            <a:r>
+              <a:rPr sz="1500" b="1" i="0">
+                <a:solidFill>
+                  <a:srgbClr val="FFFFFF"/>
+                </a:solidFill>
+                <a:latin typeface="Calibri"/>
+              </a:rPr>
+              <a:t>50 Scenario's bekijken</a:t>
+            </a:r>
+          </a:p>
+        </p:txBody>
+      </p:sp>
+      <p:sp>
+        <p:nvSpPr>
+          <p:cNvPr id="25" name="TextBox 24"/>
+          <p:cNvSpPr txBox="1"/>
+          <p:nvPr/>
+        </p:nvSpPr>
+        <p:spPr>
+          <a:xfrm>
+            <a:off x="6858000" y="4892040"/>
+            <a:ext cx="4754880" cy="1051560"/>
+          </a:xfrm>
+          <a:prstGeom prst="rect">
+            <a:avLst/>
+          </a:prstGeom>
+          <a:noFill/>
+        </p:spPr>
+        <p:txBody>
+          <a:bodyPr wrap="square">
+            <a:spAutoFit/>
+          </a:bodyPr>
+          <a:lstStyle/>
+          <a:p>
+            <a:pPr algn="l"/>
+            <a:r>
+              <a:rPr sz="1200" b="0" i="0">
+                <a:solidFill>
+                  <a:srgbClr val="8B9DC3"/>
+                </a:solidFill>
+                <a:latin typeface="Calibri"/>
+              </a:rPr>
+              <a:t>scenario_predictions.png — alle combinaties van weekdag × weer</a:t>
+            </a:r>
+          </a:p>
+        </p:txBody>
+      </p:sp>
+    </p:spTree>
+  </p:cSld>
+  <p:clrMapOvr>
+    <a:masterClrMapping/>
+  </p:clrMapOvr>
+</p:sld>
+</file>
+
+<file path=ppt/slides/slide23.xml><?xml version="1.0" encoding="utf-8"?>
 <p:sld xmlns:a="http://schemas.openxmlformats.org/drawingml/2006/main" xmlns:p="http://schemas.openxmlformats.org/presentationml/2006/main" xmlns:r="http://schemas.openxmlformats.org/officeDocument/2006/relationships">
   <p:cSld>
     <p:bg>
